--- a/OC_P3_Support_Presentation.pptx
+++ b/OC_P3_Support_Presentation.pptx
@@ -5,19 +5,20 @@
     <p:sldMasterId id="2147483648" r:id="rId1"/>
   </p:sldMasterIdLst>
   <p:notesMasterIdLst>
-    <p:notesMasterId r:id="rId12"/>
+    <p:notesMasterId r:id="rId13"/>
   </p:notesMasterIdLst>
   <p:sldIdLst>
     <p:sldId id="256" r:id="rId2"/>
-    <p:sldId id="257" r:id="rId3"/>
-    <p:sldId id="264" r:id="rId4"/>
-    <p:sldId id="258" r:id="rId5"/>
-    <p:sldId id="259" r:id="rId6"/>
-    <p:sldId id="260" r:id="rId7"/>
-    <p:sldId id="265" r:id="rId8"/>
-    <p:sldId id="261" r:id="rId9"/>
-    <p:sldId id="262" r:id="rId10"/>
-    <p:sldId id="263" r:id="rId11"/>
+    <p:sldId id="266" r:id="rId3"/>
+    <p:sldId id="257" r:id="rId4"/>
+    <p:sldId id="264" r:id="rId5"/>
+    <p:sldId id="258" r:id="rId6"/>
+    <p:sldId id="259" r:id="rId7"/>
+    <p:sldId id="260" r:id="rId8"/>
+    <p:sldId id="265" r:id="rId9"/>
+    <p:sldId id="261" r:id="rId10"/>
+    <p:sldId id="262" r:id="rId11"/>
+    <p:sldId id="263" r:id="rId12"/>
   </p:sldIdLst>
   <p:sldSz cx="12192000" cy="6858000"/>
   <p:notesSz cx="6858000" cy="9144000"/>
@@ -217,7 +218,7 @@
           <a:p>
             <a:fld id="{5B52BF14-2FBF-4643-8257-60843B12A07C}" type="datetimeFigureOut">
               <a:rPr lang="fr-FR" smtClean="0"/>
-              <a:t>18/10/2026</a:t>
+              <a:t>20/10/2026</a:t>
             </a:fld>
             <a:endParaRPr lang="fr-FR"/>
           </a:p>
@@ -484,6 +485,202 @@
 </p:notesMaster>
 </file>
 
+<file path=ppt/notesSlides/notesSlide1.xml><?xml version="1.0" encoding="utf-8"?>
+<p:notes xmlns:a="http://schemas.openxmlformats.org/drawingml/2006/main" xmlns:r="http://schemas.openxmlformats.org/officeDocument/2006/relationships" xmlns:p="http://schemas.openxmlformats.org/presentationml/2006/main">
+  <p:cSld>
+    <p:spTree>
+      <p:nvGrpSpPr>
+        <p:cNvPr id="1" name=""/>
+        <p:cNvGrpSpPr/>
+        <p:nvPr/>
+      </p:nvGrpSpPr>
+      <p:grpSpPr>
+        <a:xfrm>
+          <a:off x="0" y="0"/>
+          <a:ext cx="0" cy="0"/>
+          <a:chOff x="0" y="0"/>
+          <a:chExt cx="0" cy="0"/>
+        </a:xfrm>
+      </p:grpSpPr>
+      <p:sp>
+        <p:nvSpPr>
+          <p:cNvPr id="2" name="Espace réservé de l'image des diapositives 1"/>
+          <p:cNvSpPr>
+            <a:spLocks noGrp="1" noRot="1" noChangeAspect="1"/>
+          </p:cNvSpPr>
+          <p:nvPr>
+            <p:ph type="sldImg"/>
+          </p:nvPr>
+        </p:nvSpPr>
+        <p:spPr/>
+      </p:sp>
+      <p:sp>
+        <p:nvSpPr>
+          <p:cNvPr id="3" name="Espace réservé des notes 2"/>
+          <p:cNvSpPr>
+            <a:spLocks noGrp="1"/>
+          </p:cNvSpPr>
+          <p:nvPr>
+            <p:ph type="body" idx="1"/>
+          </p:nvPr>
+        </p:nvSpPr>
+        <p:spPr/>
+        <p:txBody>
+          <a:bodyPr/>
+          <a:lstStyle/>
+          <a:p>
+            <a:endParaRPr lang="fr-FR" dirty="0"/>
+          </a:p>
+        </p:txBody>
+      </p:sp>
+      <p:sp>
+        <p:nvSpPr>
+          <p:cNvPr id="4" name="Espace réservé du numéro de diapositive 3"/>
+          <p:cNvSpPr>
+            <a:spLocks noGrp="1"/>
+          </p:cNvSpPr>
+          <p:nvPr>
+            <p:ph type="sldNum" sz="quarter" idx="5"/>
+          </p:nvPr>
+        </p:nvSpPr>
+        <p:spPr/>
+        <p:txBody>
+          <a:bodyPr/>
+          <a:lstStyle/>
+          <a:p>
+            <a:fld id="{8A8FD6C3-E2B2-384B-91EF-8FF6F52E910A}" type="slidenum">
+              <a:rPr lang="fr-FR" smtClean="0"/>
+              <a:t>8</a:t>
+            </a:fld>
+            <a:endParaRPr lang="fr-FR"/>
+          </a:p>
+        </p:txBody>
+      </p:sp>
+    </p:spTree>
+    <p:extLst>
+      <p:ext uri="{BB962C8B-B14F-4D97-AF65-F5344CB8AC3E}">
+        <p14:creationId xmlns:p14="http://schemas.microsoft.com/office/powerpoint/2010/main" val="2564040239"/>
+      </p:ext>
+    </p:extLst>
+  </p:cSld>
+  <p:clrMapOvr>
+    <a:masterClrMapping/>
+  </p:clrMapOvr>
+</p:notes>
+</file>
+
+<file path=ppt/notesSlides/notesSlide2.xml><?xml version="1.0" encoding="utf-8"?>
+<p:notes xmlns:a="http://schemas.openxmlformats.org/drawingml/2006/main" xmlns:r="http://schemas.openxmlformats.org/officeDocument/2006/relationships" xmlns:p="http://schemas.openxmlformats.org/presentationml/2006/main">
+  <p:cSld>
+    <p:spTree>
+      <p:nvGrpSpPr>
+        <p:cNvPr id="1" name=""/>
+        <p:cNvGrpSpPr/>
+        <p:nvPr/>
+      </p:nvGrpSpPr>
+      <p:grpSpPr>
+        <a:xfrm>
+          <a:off x="0" y="0"/>
+          <a:ext cx="0" cy="0"/>
+          <a:chOff x="0" y="0"/>
+          <a:chExt cx="0" cy="0"/>
+        </a:xfrm>
+      </p:grpSpPr>
+      <p:sp>
+        <p:nvSpPr>
+          <p:cNvPr id="2" name="Espace réservé de l'image des diapositives 1"/>
+          <p:cNvSpPr>
+            <a:spLocks noGrp="1" noRot="1" noChangeAspect="1"/>
+          </p:cNvSpPr>
+          <p:nvPr>
+            <p:ph type="sldImg"/>
+          </p:nvPr>
+        </p:nvSpPr>
+        <p:spPr/>
+      </p:sp>
+      <p:sp>
+        <p:nvSpPr>
+          <p:cNvPr id="3" name="Espace réservé des notes 2"/>
+          <p:cNvSpPr>
+            <a:spLocks noGrp="1"/>
+          </p:cNvSpPr>
+          <p:nvPr>
+            <p:ph type="body" idx="1"/>
+          </p:nvPr>
+        </p:nvSpPr>
+        <p:spPr/>
+        <p:txBody>
+          <a:bodyPr/>
+          <a:lstStyle/>
+          <a:p>
+            <a:r>
+              <a:rPr lang="fr-FR" dirty="0"/>
+              <a:t>Tester le module pour la feature importance </a:t>
+            </a:r>
+            <a:r>
+              <a:rPr lang="fr-FR" dirty="0" err="1"/>
+              <a:t>shap</a:t>
+            </a:r>
+            <a:r>
+              <a:rPr lang="fr-FR" dirty="0"/>
+              <a:t> </a:t>
+            </a:r>
+          </a:p>
+          <a:p>
+            <a:endParaRPr lang="fr-FR" dirty="0"/>
+          </a:p>
+          <a:p>
+            <a:r>
+              <a:rPr lang="fr-FR" dirty="0"/>
+              <a:t>Détecter les Multi colinéarité </a:t>
+            </a:r>
+            <a:r>
+              <a:rPr lang="fr-FR"/>
+              <a:t>et significativité </a:t>
+            </a:r>
+            <a:r>
+              <a:rPr lang="fr-FR" dirty="0"/>
+              <a:t>des coefficients </a:t>
+            </a:r>
+          </a:p>
+        </p:txBody>
+      </p:sp>
+      <p:sp>
+        <p:nvSpPr>
+          <p:cNvPr id="4" name="Espace réservé du numéro de diapositive 3"/>
+          <p:cNvSpPr>
+            <a:spLocks noGrp="1"/>
+          </p:cNvSpPr>
+          <p:nvPr>
+            <p:ph type="sldNum" sz="quarter" idx="5"/>
+          </p:nvPr>
+        </p:nvSpPr>
+        <p:spPr/>
+        <p:txBody>
+          <a:bodyPr/>
+          <a:lstStyle/>
+          <a:p>
+            <a:fld id="{8A8FD6C3-E2B2-384B-91EF-8FF6F52E910A}" type="slidenum">
+              <a:rPr lang="fr-FR" smtClean="0"/>
+              <a:t>10</a:t>
+            </a:fld>
+            <a:endParaRPr lang="fr-FR"/>
+          </a:p>
+        </p:txBody>
+      </p:sp>
+    </p:spTree>
+    <p:extLst>
+      <p:ext uri="{BB962C8B-B14F-4D97-AF65-F5344CB8AC3E}">
+        <p14:creationId xmlns:p14="http://schemas.microsoft.com/office/powerpoint/2010/main" val="3034923908"/>
+      </p:ext>
+    </p:extLst>
+  </p:cSld>
+  <p:clrMapOvr>
+    <a:masterClrMapping/>
+  </p:clrMapOvr>
+</p:notes>
+</file>
+
 <file path=ppt/slideLayouts/slideLayout1.xml><?xml version="1.0" encoding="utf-8"?>
 <p:sldLayout xmlns:a="http://schemas.openxmlformats.org/drawingml/2006/main" xmlns:r="http://schemas.openxmlformats.org/officeDocument/2006/relationships" xmlns:p="http://schemas.openxmlformats.org/presentationml/2006/main" type="title" preserve="1">
   <p:cSld name="Title Slide">
@@ -663,7 +860,7 @@
           <a:p>
             <a:fld id="{E9198D03-460D-8844-8DA4-901993F35E2E}" type="datetime1">
               <a:rPr lang="fr-FR" smtClean="0"/>
-              <a:t>18/10/2026</a:t>
+              <a:t>20/10/2026</a:t>
             </a:fld>
             <a:endParaRPr lang="en-US"/>
           </a:p>
@@ -834,7 +1031,7 @@
           <a:p>
             <a:fld id="{2CB1DF16-FDBD-5D4B-808D-E44E618FD851}" type="datetime1">
               <a:rPr lang="fr-FR" smtClean="0"/>
-              <a:t>18/10/2026</a:t>
+              <a:t>20/10/2026</a:t>
             </a:fld>
             <a:endParaRPr lang="en-US"/>
           </a:p>
@@ -1015,7 +1212,7 @@
           <a:p>
             <a:fld id="{FE0F95E7-688D-6646-83EE-0D3BDBA945D2}" type="datetime1">
               <a:rPr lang="fr-FR" smtClean="0"/>
-              <a:t>18/10/2026</a:t>
+              <a:t>20/10/2026</a:t>
             </a:fld>
             <a:endParaRPr lang="en-US"/>
           </a:p>
@@ -1186,7 +1383,7 @@
           <a:p>
             <a:fld id="{7C67E76A-470D-4947-8A0C-6850C0EB2E37}" type="datetime1">
               <a:rPr lang="fr-FR" smtClean="0"/>
-              <a:t>18/10/2026</a:t>
+              <a:t>20/10/2026</a:t>
             </a:fld>
             <a:endParaRPr lang="en-US"/>
           </a:p>
@@ -1434,7 +1631,7 @@
           <a:p>
             <a:fld id="{B4DB2A81-FC3F-D245-83CE-854CC4330A20}" type="datetime1">
               <a:rPr lang="fr-FR" smtClean="0"/>
-              <a:t>18/10/2026</a:t>
+              <a:t>20/10/2026</a:t>
             </a:fld>
             <a:endParaRPr lang="en-US"/>
           </a:p>
@@ -1722,7 +1919,7 @@
           <a:p>
             <a:fld id="{109DE0FF-40ED-5E4D-B616-48B2382715FA}" type="datetime1">
               <a:rPr lang="fr-FR" smtClean="0"/>
-              <a:t>18/10/2026</a:t>
+              <a:t>20/10/2026</a:t>
             </a:fld>
             <a:endParaRPr lang="en-US"/>
           </a:p>
@@ -2144,7 +2341,7 @@
           <a:p>
             <a:fld id="{D4A1C920-A4E5-EA41-94EB-352EA5317C2B}" type="datetime1">
               <a:rPr lang="fr-FR" smtClean="0"/>
-              <a:t>18/10/2026</a:t>
+              <a:t>20/10/2026</a:t>
             </a:fld>
             <a:endParaRPr lang="en-US"/>
           </a:p>
@@ -2264,7 +2461,7 @@
           <a:p>
             <a:fld id="{5DA2C0CE-6880-DC48-81B0-884254DC8EEA}" type="datetime1">
               <a:rPr lang="fr-FR" smtClean="0"/>
-              <a:t>18/10/2026</a:t>
+              <a:t>20/10/2026</a:t>
             </a:fld>
             <a:endParaRPr lang="en-US"/>
           </a:p>
@@ -2362,7 +2559,7 @@
           <a:p>
             <a:fld id="{018917FB-0588-1245-A2B1-13F676E6695E}" type="datetime1">
               <a:rPr lang="fr-FR" smtClean="0"/>
-              <a:t>18/10/2026</a:t>
+              <a:t>20/10/2026</a:t>
             </a:fld>
             <a:endParaRPr lang="en-US"/>
           </a:p>
@@ -2640,7 +2837,7 @@
           <a:p>
             <a:fld id="{6C4566AF-7226-F645-B51D-CD93B5541D03}" type="datetime1">
               <a:rPr lang="fr-FR" smtClean="0"/>
-              <a:t>18/10/2026</a:t>
+              <a:t>20/10/2026</a:t>
             </a:fld>
             <a:endParaRPr lang="en-US"/>
           </a:p>
@@ -2895,7 +3092,7 @@
           <a:p>
             <a:fld id="{9A3DED1A-BC21-1E41-9593-7D539B6103A8}" type="datetime1">
               <a:rPr lang="fr-FR" smtClean="0"/>
-              <a:t>18/10/2026</a:t>
+              <a:t>20/10/2026</a:t>
             </a:fld>
             <a:endParaRPr lang="en-US"/>
           </a:p>
@@ -3109,7 +3306,7 @@
           <a:p>
             <a:fld id="{C48F1A12-357A-B248-8C36-4D6A2870AB2B}" type="datetime1">
               <a:rPr lang="fr-FR" smtClean="0"/>
-              <a:t>18/10/2026</a:t>
+              <a:t>20/10/2026</a:t>
             </a:fld>
             <a:endParaRPr lang="en-US"/>
           </a:p>
@@ -3641,10 +3838,10 @@
       </p:sp>
       <p:pic>
         <p:nvPicPr>
-          <p:cNvPr id="8" name="Image 7">
+          <p:cNvPr id="7" name="Image 6">
             <a:extLst>
               <a:ext uri="{FF2B5EF4-FFF2-40B4-BE49-F238E27FC236}">
-                <a16:creationId xmlns:a16="http://schemas.microsoft.com/office/drawing/2014/main" id="{B6807A0F-2414-20B1-AFA6-D17F30778944}"/>
+                <a16:creationId xmlns:a16="http://schemas.microsoft.com/office/drawing/2014/main" id="{3E5746B8-FAFA-3356-0687-81453DA10B55}"/>
               </a:ext>
             </a:extLst>
           </p:cNvPr>
@@ -3655,15 +3852,14 @@
         </p:nvPicPr>
         <p:blipFill>
           <a:blip r:embed="rId2"/>
-          <a:srcRect b="6924"/>
           <a:stretch>
             <a:fillRect/>
           </a:stretch>
         </p:blipFill>
         <p:spPr>
           <a:xfrm>
-            <a:off x="5735782" y="3168762"/>
-            <a:ext cx="6003637" cy="3347493"/>
+            <a:off x="3779366" y="2297610"/>
+            <a:ext cx="8782768" cy="4795340"/>
           </a:xfrm>
           <a:prstGeom prst="rect">
             <a:avLst/>
@@ -3703,6 +3899,36 @@
           <a:chExt cx="0" cy="0"/>
         </a:xfrm>
       </p:grpSpPr>
+      <p:pic>
+        <p:nvPicPr>
+          <p:cNvPr id="5" name="Image 4">
+            <a:extLst>
+              <a:ext uri="{FF2B5EF4-FFF2-40B4-BE49-F238E27FC236}">
+                <a16:creationId xmlns:a16="http://schemas.microsoft.com/office/drawing/2014/main" id="{6BC1669F-0186-F76E-6300-33DC9385D228}"/>
+              </a:ext>
+            </a:extLst>
+          </p:cNvPr>
+          <p:cNvPicPr>
+            <a:picLocks noChangeAspect="1"/>
+          </p:cNvPicPr>
+          <p:nvPr/>
+        </p:nvPicPr>
+        <p:blipFill>
+          <a:blip r:embed="rId3"/>
+          <a:stretch>
+            <a:fillRect/>
+          </a:stretch>
+        </p:blipFill>
+        <p:spPr>
+          <a:xfrm>
+            <a:off x="-934412" y="136525"/>
+            <a:ext cx="13908423" cy="7593918"/>
+          </a:xfrm>
+          <a:prstGeom prst="rect">
+            <a:avLst/>
+          </a:prstGeom>
+        </p:spPr>
+      </p:pic>
       <p:sp>
         <p:nvSpPr>
           <p:cNvPr id="2" name="Rectangle 1"/>
@@ -3711,28 +3937,23 @@
         </p:nvSpPr>
         <p:spPr>
           <a:xfrm>
-            <a:off x="0" y="0"/>
+            <a:off x="305" y="7112"/>
             <a:ext cx="12191695" cy="1371600"/>
           </a:xfrm>
           <a:prstGeom prst="rect">
             <a:avLst/>
           </a:prstGeom>
-          <a:solidFill>
-            <a:srgbClr val="FFFFFF"/>
-          </a:solidFill>
-          <a:ln>
-            <a:noFill/>
-          </a:ln>
+          <a:ln/>
         </p:spPr>
         <p:style>
-          <a:lnRef idx="1">
-            <a:schemeClr val="accent1"/>
+          <a:lnRef idx="0">
+            <a:schemeClr val="dk1"/>
           </a:lnRef>
           <a:fillRef idx="3">
-            <a:schemeClr val="accent1"/>
+            <a:schemeClr val="dk1"/>
           </a:fillRef>
-          <a:effectRef idx="2">
-            <a:schemeClr val="accent1"/>
+          <a:effectRef idx="3">
+            <a:schemeClr val="dk1"/>
           </a:effectRef>
           <a:fontRef idx="minor">
             <a:schemeClr val="lt1"/>
@@ -3799,8 +4020,8 @@
         </p:nvSpPr>
         <p:spPr>
           <a:xfrm>
-            <a:off x="731520" y="320040"/>
-            <a:ext cx="10698480" cy="492443"/>
+            <a:off x="582336" y="347308"/>
+            <a:ext cx="11027022" cy="492443"/>
           </a:xfrm>
           <a:prstGeom prst="rect">
             <a:avLst/>
@@ -3822,16 +4043,20 @@
               </a:defRPr>
             </a:pPr>
             <a:r>
-              <a:rPr dirty="0"/>
-              <a:t>Choix du </a:t>
-            </a:r>
-            <a:r>
-              <a:rPr dirty="0" err="1"/>
-              <a:t>Modèle</a:t>
-            </a:r>
-            <a:r>
-              <a:rPr dirty="0"/>
-              <a:t> Final</a:t>
+              <a:rPr lang="fr-FR" dirty="0">
+                <a:solidFill>
+                  <a:schemeClr val="bg1"/>
+                </a:solidFill>
+              </a:rPr>
+              <a:t>7 - Interprétation des résultats </a:t>
+            </a:r>
+            <a:r>
+              <a:rPr dirty="0">
+                <a:solidFill>
+                  <a:schemeClr val="bg1"/>
+                </a:solidFill>
+              </a:rPr>
+              <a:t>&amp; Feature Importance</a:t>
             </a:r>
           </a:p>
         </p:txBody>
@@ -3841,7 +4066,7 @@
           <p:cNvPr id="6" name="Espace réservé du pied de page 5">
             <a:extLst>
               <a:ext uri="{FF2B5EF4-FFF2-40B4-BE49-F238E27FC236}">
-                <a16:creationId xmlns:a16="http://schemas.microsoft.com/office/drawing/2014/main" id="{4221D419-74FD-651D-E247-CC66EBD758E3}"/>
+                <a16:creationId xmlns:a16="http://schemas.microsoft.com/office/drawing/2014/main" id="{9EAA2C0B-0343-0C8E-0A7E-F63A3CB11035}"/>
               </a:ext>
             </a:extLst>
           </p:cNvPr>
@@ -3869,7 +4094,7 @@
           <p:cNvPr id="7" name="Espace réservé du numéro de diapositive 6">
             <a:extLst>
               <a:ext uri="{FF2B5EF4-FFF2-40B4-BE49-F238E27FC236}">
-                <a16:creationId xmlns:a16="http://schemas.microsoft.com/office/drawing/2014/main" id="{5572EEE3-396E-42BC-E034-236DA427562C}"/>
+                <a16:creationId xmlns:a16="http://schemas.microsoft.com/office/drawing/2014/main" id="{71E62298-ADC2-9685-A94A-56FA7803F027}"/>
               </a:ext>
             </a:extLst>
           </p:cNvPr>
@@ -3893,6 +4118,608 @@
           </a:p>
         </p:txBody>
       </p:sp>
+      <p:graphicFrame>
+        <p:nvGraphicFramePr>
+          <p:cNvPr id="11" name="Table 3">
+            <a:extLst>
+              <a:ext uri="{FF2B5EF4-FFF2-40B4-BE49-F238E27FC236}">
+                <a16:creationId xmlns:a16="http://schemas.microsoft.com/office/drawing/2014/main" id="{4E68AB54-D8CB-5878-00E6-0C8EBA95283F}"/>
+              </a:ext>
+            </a:extLst>
+          </p:cNvPr>
+          <p:cNvGraphicFramePr>
+            <a:graphicFrameLocks noGrp="1"/>
+          </p:cNvGraphicFramePr>
+          <p:nvPr>
+            <p:extLst>
+              <p:ext uri="{D42A27DB-BD31-4B8C-83A1-F6EECF244321}">
+                <p14:modId xmlns:p14="http://schemas.microsoft.com/office/powerpoint/2010/main" val="3679717561"/>
+              </p:ext>
+            </p:extLst>
+          </p:nvPr>
+        </p:nvGraphicFramePr>
+        <p:xfrm>
+          <a:off x="582337" y="4691415"/>
+          <a:ext cx="11027022" cy="1461168"/>
+        </p:xfrm>
+        <a:graphic>
+          <a:graphicData uri="http://schemas.openxmlformats.org/drawingml/2006/table">
+            <a:tbl>
+              <a:tblPr firstRow="1" bandRow="1">
+                <a:tableStyleId>{5C22544A-7EE6-4342-B048-85BDC9FD1C3A}</a:tableStyleId>
+              </a:tblPr>
+              <a:tblGrid>
+                <a:gridCol w="7676705">
+                  <a:extLst>
+                    <a:ext uri="{9D8B030D-6E8A-4147-A177-3AD203B41FA5}">
+                      <a16:colId xmlns:a16="http://schemas.microsoft.com/office/drawing/2014/main" val="20000"/>
+                    </a:ext>
+                  </a:extLst>
+                </a:gridCol>
+                <a:gridCol w="3350317">
+                  <a:extLst>
+                    <a:ext uri="{9D8B030D-6E8A-4147-A177-3AD203B41FA5}">
+                      <a16:colId xmlns:a16="http://schemas.microsoft.com/office/drawing/2014/main" val="1402259042"/>
+                    </a:ext>
+                  </a:extLst>
+                </a:gridCol>
+              </a:tblGrid>
+              <a:tr h="311304">
+                <a:tc>
+                  <a:txBody>
+                    <a:bodyPr/>
+                    <a:lstStyle/>
+                    <a:p>
+                      <a:pPr algn="ctr">
+                        <a:defRPr sz="1300" b="1">
+                          <a:solidFill>
+                            <a:srgbClr val="F8FAFC"/>
+                          </a:solidFill>
+                          <a:latin typeface="Verdana"/>
+                        </a:defRPr>
+                      </a:pPr>
+                      <a:r>
+                        <a:rPr lang="fr-FR" dirty="0"/>
+                        <a:t>Nom complet  de la feature</a:t>
+                      </a:r>
+                      <a:endParaRPr dirty="0"/>
+                    </a:p>
+                  </a:txBody>
+                  <a:tcPr anchor="ctr"/>
+                </a:tc>
+                <a:tc>
+                  <a:txBody>
+                    <a:bodyPr/>
+                    <a:lstStyle/>
+                    <a:p>
+                      <a:pPr algn="ctr">
+                        <a:defRPr sz="1300" b="1">
+                          <a:solidFill>
+                            <a:srgbClr val="F8FAFC"/>
+                          </a:solidFill>
+                          <a:latin typeface="Verdana"/>
+                        </a:defRPr>
+                      </a:pPr>
+                      <a:r>
+                        <a:rPr lang="fr-FR" dirty="0"/>
+                        <a:t>Importance %</a:t>
+                      </a:r>
+                      <a:endParaRPr dirty="0"/>
+                    </a:p>
+                  </a:txBody>
+                  <a:tcPr anchor="ctr"/>
+                </a:tc>
+                <a:extLst>
+                  <a:ext uri="{0D108BD9-81ED-4DB2-BD59-A6C34878D82A}">
+                    <a16:rowId xmlns:a16="http://schemas.microsoft.com/office/drawing/2014/main" val="10000"/>
+                  </a:ext>
+                </a:extLst>
+              </a:tr>
+              <a:tr h="271808">
+                <a:tc>
+                  <a:txBody>
+                    <a:bodyPr/>
+                    <a:lstStyle/>
+                    <a:p>
+                      <a:pPr algn="l">
+                        <a:defRPr sz="1200" b="1">
+                          <a:solidFill>
+                            <a:srgbClr val="1E293B"/>
+                          </a:solidFill>
+                          <a:latin typeface="Verdana"/>
+                        </a:defRPr>
+                      </a:pPr>
+                      <a:r>
+                        <a:rPr lang="fr-FR" sz="1200" b="1" kern="1200" dirty="0" err="1">
+                          <a:solidFill>
+                            <a:srgbClr val="1E293B"/>
+                          </a:solidFill>
+                          <a:latin typeface="Verdana"/>
+                          <a:ea typeface="+mn-ea"/>
+                          <a:cs typeface="+mn-cs"/>
+                        </a:rPr>
+                        <a:t>PropertyGFATotal</a:t>
+                      </a:r>
+                      <a:endParaRPr sz="1200" b="1" kern="1200" dirty="0">
+                        <a:solidFill>
+                          <a:srgbClr val="1E293B"/>
+                        </a:solidFill>
+                        <a:latin typeface="Verdana"/>
+                        <a:ea typeface="+mn-ea"/>
+                        <a:cs typeface="+mn-cs"/>
+                      </a:endParaRPr>
+                    </a:p>
+                  </a:txBody>
+                  <a:tcPr anchor="ctr"/>
+                </a:tc>
+                <a:tc>
+                  <a:txBody>
+                    <a:bodyPr/>
+                    <a:lstStyle/>
+                    <a:p>
+                      <a:pPr marL="0" algn="l" defTabSz="457200" rtl="0" eaLnBrk="1" latinLnBrk="0" hangingPunct="1">
+                        <a:defRPr sz="1200">
+                          <a:solidFill>
+                            <a:srgbClr val="1E293B"/>
+                          </a:solidFill>
+                          <a:latin typeface="Verdana"/>
+                        </a:defRPr>
+                      </a:pPr>
+                      <a:r>
+                        <a:rPr lang="fr-FR" sz="1200" b="1" kern="1200" dirty="0">
+                          <a:solidFill>
+                            <a:srgbClr val="1E293B"/>
+                          </a:solidFill>
+                          <a:latin typeface="Verdana"/>
+                          <a:ea typeface="+mn-ea"/>
+                          <a:cs typeface="+mn-cs"/>
+                        </a:rPr>
+                        <a:t>81.9 %</a:t>
+                      </a:r>
+                      <a:endParaRPr sz="1200" b="1" kern="1200" dirty="0">
+                        <a:solidFill>
+                          <a:srgbClr val="1E293B"/>
+                        </a:solidFill>
+                        <a:latin typeface="Verdana"/>
+                        <a:ea typeface="+mn-ea"/>
+                        <a:cs typeface="+mn-cs"/>
+                      </a:endParaRPr>
+                    </a:p>
+                  </a:txBody>
+                  <a:tcPr anchor="ctr"/>
+                </a:tc>
+                <a:extLst>
+                  <a:ext uri="{0D108BD9-81ED-4DB2-BD59-A6C34878D82A}">
+                    <a16:rowId xmlns:a16="http://schemas.microsoft.com/office/drawing/2014/main" val="10001"/>
+                  </a:ext>
+                </a:extLst>
+              </a:tr>
+              <a:tr h="291848">
+                <a:tc>
+                  <a:txBody>
+                    <a:bodyPr/>
+                    <a:lstStyle/>
+                    <a:p>
+                      <a:pPr algn="l">
+                        <a:defRPr sz="1200" b="1">
+                          <a:solidFill>
+                            <a:srgbClr val="1E293B"/>
+                          </a:solidFill>
+                          <a:latin typeface="Verdana"/>
+                        </a:defRPr>
+                      </a:pPr>
+                      <a:r>
+                        <a:rPr lang="fr-FR" sz="1200" b="1" kern="1200" dirty="0" err="1">
+                          <a:solidFill>
+                            <a:srgbClr val="1E293B"/>
+                          </a:solidFill>
+                          <a:latin typeface="Verdana"/>
+                          <a:ea typeface="+mn-ea"/>
+                          <a:cs typeface="+mn-cs"/>
+                        </a:rPr>
+                        <a:t>PropertyGFABuilding</a:t>
+                      </a:r>
+                      <a:r>
+                        <a:rPr lang="fr-FR" sz="1200" b="1" kern="1200" dirty="0">
+                          <a:solidFill>
+                            <a:srgbClr val="1E293B"/>
+                          </a:solidFill>
+                          <a:latin typeface="Verdana"/>
+                          <a:ea typeface="+mn-ea"/>
+                          <a:cs typeface="+mn-cs"/>
+                        </a:rPr>
+                        <a:t>(s)</a:t>
+                      </a:r>
+                      <a:endParaRPr sz="1200" b="1" kern="1200" dirty="0">
+                        <a:solidFill>
+                          <a:srgbClr val="1E293B"/>
+                        </a:solidFill>
+                        <a:latin typeface="Verdana"/>
+                        <a:ea typeface="+mn-ea"/>
+                        <a:cs typeface="+mn-cs"/>
+                      </a:endParaRPr>
+                    </a:p>
+                  </a:txBody>
+                  <a:tcPr anchor="ctr"/>
+                </a:tc>
+                <a:tc>
+                  <a:txBody>
+                    <a:bodyPr/>
+                    <a:lstStyle/>
+                    <a:p>
+                      <a:pPr algn="l">
+                        <a:defRPr sz="1200">
+                          <a:solidFill>
+                            <a:srgbClr val="1E293B"/>
+                          </a:solidFill>
+                          <a:latin typeface="Verdana"/>
+                        </a:defRPr>
+                      </a:pPr>
+                      <a:r>
+                        <a:rPr lang="fr-FR" sz="1200" b="1" kern="1200" dirty="0">
+                          <a:solidFill>
+                            <a:srgbClr val="1E293B"/>
+                          </a:solidFill>
+                          <a:latin typeface="Verdana"/>
+                          <a:ea typeface="+mn-ea"/>
+                          <a:cs typeface="+mn-cs"/>
+                        </a:rPr>
+                        <a:t>9.6 %</a:t>
+                      </a:r>
+                      <a:endParaRPr sz="1200" b="1" kern="1200" dirty="0">
+                        <a:solidFill>
+                          <a:srgbClr val="1E293B"/>
+                        </a:solidFill>
+                        <a:latin typeface="Verdana"/>
+                        <a:ea typeface="+mn-ea"/>
+                        <a:cs typeface="+mn-cs"/>
+                      </a:endParaRPr>
+                    </a:p>
+                  </a:txBody>
+                  <a:tcPr anchor="ctr"/>
+                </a:tc>
+                <a:extLst>
+                  <a:ext uri="{0D108BD9-81ED-4DB2-BD59-A6C34878D82A}">
+                    <a16:rowId xmlns:a16="http://schemas.microsoft.com/office/drawing/2014/main" val="10002"/>
+                  </a:ext>
+                </a:extLst>
+              </a:tr>
+              <a:tr h="291848">
+                <a:tc>
+                  <a:txBody>
+                    <a:bodyPr/>
+                    <a:lstStyle/>
+                    <a:p>
+                      <a:pPr algn="l">
+                        <a:defRPr sz="1200" b="1">
+                          <a:solidFill>
+                            <a:srgbClr val="1E293B"/>
+                          </a:solidFill>
+                          <a:latin typeface="Verdana"/>
+                        </a:defRPr>
+                      </a:pPr>
+                      <a:r>
+                        <a:rPr lang="fr-FR" sz="1200" b="1" kern="1200">
+                          <a:solidFill>
+                            <a:srgbClr val="1E293B"/>
+                          </a:solidFill>
+                          <a:latin typeface="Verdana"/>
+                          <a:ea typeface="+mn-ea"/>
+                          <a:cs typeface="+mn-cs"/>
+                        </a:rPr>
+                        <a:t>FE2_year_in_activity </a:t>
+                      </a:r>
+                      <a:endParaRPr lang="fr-FR" sz="1200" b="1" kern="1200" dirty="0">
+                        <a:solidFill>
+                          <a:srgbClr val="1E293B"/>
+                        </a:solidFill>
+                        <a:latin typeface="Verdana"/>
+                        <a:ea typeface="+mn-ea"/>
+                        <a:cs typeface="+mn-cs"/>
+                      </a:endParaRPr>
+                    </a:p>
+                  </a:txBody>
+                  <a:tcPr anchor="ctr"/>
+                </a:tc>
+                <a:tc>
+                  <a:txBody>
+                    <a:bodyPr/>
+                    <a:lstStyle/>
+                    <a:p>
+                      <a:pPr algn="l">
+                        <a:defRPr sz="1200">
+                          <a:solidFill>
+                            <a:srgbClr val="1E293B"/>
+                          </a:solidFill>
+                          <a:latin typeface="Verdana"/>
+                        </a:defRPr>
+                      </a:pPr>
+                      <a:r>
+                        <a:rPr lang="fr-FR" sz="1200" b="1" kern="1200" dirty="0">
+                          <a:solidFill>
+                            <a:srgbClr val="1E293B"/>
+                          </a:solidFill>
+                          <a:latin typeface="Verdana"/>
+                          <a:ea typeface="+mn-ea"/>
+                          <a:cs typeface="+mn-cs"/>
+                        </a:rPr>
+                        <a:t>3.3 %</a:t>
+                      </a:r>
+                      <a:endParaRPr sz="1200" b="1" kern="1200" dirty="0">
+                        <a:solidFill>
+                          <a:srgbClr val="1E293B"/>
+                        </a:solidFill>
+                        <a:latin typeface="Verdana"/>
+                        <a:ea typeface="+mn-ea"/>
+                        <a:cs typeface="+mn-cs"/>
+                      </a:endParaRPr>
+                    </a:p>
+                  </a:txBody>
+                  <a:tcPr anchor="ctr"/>
+                </a:tc>
+                <a:extLst>
+                  <a:ext uri="{0D108BD9-81ED-4DB2-BD59-A6C34878D82A}">
+                    <a16:rowId xmlns:a16="http://schemas.microsoft.com/office/drawing/2014/main" val="3018878549"/>
+                  </a:ext>
+                </a:extLst>
+              </a:tr>
+              <a:tr h="291848">
+                <a:tc>
+                  <a:txBody>
+                    <a:bodyPr/>
+                    <a:lstStyle/>
+                    <a:p>
+                      <a:pPr algn="l">
+                        <a:defRPr sz="1200" b="1">
+                          <a:solidFill>
+                            <a:srgbClr val="1E293B"/>
+                          </a:solidFill>
+                          <a:latin typeface="Verdana"/>
+                        </a:defRPr>
+                      </a:pPr>
+                      <a:r>
+                        <a:rPr lang="fr-FR" sz="1200" b="1" kern="1200" dirty="0">
+                          <a:solidFill>
+                            <a:srgbClr val="1E293B"/>
+                          </a:solidFill>
+                          <a:latin typeface="Verdana"/>
+                          <a:ea typeface="+mn-ea"/>
+                          <a:cs typeface="+mn-cs"/>
+                        </a:rPr>
+                        <a:t>FE3_floor_area</a:t>
+                      </a:r>
+                    </a:p>
+                  </a:txBody>
+                  <a:tcPr anchor="ctr"/>
+                </a:tc>
+                <a:tc>
+                  <a:txBody>
+                    <a:bodyPr/>
+                    <a:lstStyle/>
+                    <a:p>
+                      <a:pPr algn="l">
+                        <a:defRPr sz="1200">
+                          <a:solidFill>
+                            <a:srgbClr val="1E293B"/>
+                          </a:solidFill>
+                          <a:latin typeface="Verdana"/>
+                        </a:defRPr>
+                      </a:pPr>
+                      <a:r>
+                        <a:rPr lang="fr-FR" sz="1200" b="1" kern="1200" dirty="0">
+                          <a:solidFill>
+                            <a:srgbClr val="1E293B"/>
+                          </a:solidFill>
+                          <a:latin typeface="Verdana"/>
+                          <a:ea typeface="+mn-ea"/>
+                          <a:cs typeface="+mn-cs"/>
+                        </a:rPr>
+                        <a:t>2.4 %</a:t>
+                      </a:r>
+                      <a:endParaRPr sz="1200" b="1" kern="1200" dirty="0">
+                        <a:solidFill>
+                          <a:srgbClr val="1E293B"/>
+                        </a:solidFill>
+                        <a:latin typeface="Verdana"/>
+                        <a:ea typeface="+mn-ea"/>
+                        <a:cs typeface="+mn-cs"/>
+                      </a:endParaRPr>
+                    </a:p>
+                  </a:txBody>
+                  <a:tcPr anchor="ctr"/>
+                </a:tc>
+                <a:extLst>
+                  <a:ext uri="{0D108BD9-81ED-4DB2-BD59-A6C34878D82A}">
+                    <a16:rowId xmlns:a16="http://schemas.microsoft.com/office/drawing/2014/main" val="1041525554"/>
+                  </a:ext>
+                </a:extLst>
+              </a:tr>
+            </a:tbl>
+          </a:graphicData>
+        </a:graphic>
+      </p:graphicFrame>
+      <p:sp>
+        <p:nvSpPr>
+          <p:cNvPr id="14" name="Rounded Rectangle 4">
+            <a:extLst>
+              <a:ext uri="{FF2B5EF4-FFF2-40B4-BE49-F238E27FC236}">
+                <a16:creationId xmlns:a16="http://schemas.microsoft.com/office/drawing/2014/main" id="{DE6BE183-514E-F5A1-DF9A-AB0EAEF8ED20}"/>
+              </a:ext>
+            </a:extLst>
+          </p:cNvPr>
+          <p:cNvSpPr/>
+          <p:nvPr/>
+        </p:nvSpPr>
+        <p:spPr>
+          <a:xfrm>
+            <a:off x="582335" y="1825974"/>
+            <a:ext cx="11027021" cy="2415826"/>
+          </a:xfrm>
+          <a:prstGeom prst="roundRect">
+            <a:avLst/>
+          </a:prstGeom>
+          <a:ln/>
+        </p:spPr>
+        <p:style>
+          <a:lnRef idx="2">
+            <a:schemeClr val="accent2"/>
+          </a:lnRef>
+          <a:fillRef idx="1">
+            <a:schemeClr val="lt1"/>
+          </a:fillRef>
+          <a:effectRef idx="0">
+            <a:schemeClr val="accent2"/>
+          </a:effectRef>
+          <a:fontRef idx="minor">
+            <a:schemeClr val="dk1"/>
+          </a:fontRef>
+        </p:style>
+        <p:txBody>
+          <a:bodyPr wrap="square" lIns="274320" tIns="274320" rIns="274320" rtlCol="0" anchor="ctr"/>
+          <a:lstStyle/>
+          <a:p>
+            <a:pPr algn="ctr">
+              <a:spcAft>
+                <a:spcPts val="1000"/>
+              </a:spcAft>
+              <a:defRPr sz="1600" b="1">
+                <a:solidFill>
+                  <a:srgbClr val="1E293B"/>
+                </a:solidFill>
+                <a:latin typeface="Georgia"/>
+              </a:defRPr>
+            </a:pPr>
+            <a:r>
+              <a:rPr lang="fr-FR" dirty="0">
+                <a:solidFill>
+                  <a:schemeClr val="accent2">
+                    <a:lumMod val="75000"/>
+                  </a:schemeClr>
+                </a:solidFill>
+              </a:rPr>
+              <a:t>Interprétation des scores </a:t>
+            </a:r>
+            <a:endParaRPr dirty="0">
+              <a:solidFill>
+                <a:schemeClr val="accent2">
+                  <a:lumMod val="75000"/>
+                </a:schemeClr>
+              </a:solidFill>
+            </a:endParaRPr>
+          </a:p>
+          <a:p>
+            <a:pPr>
+              <a:spcAft>
+                <a:spcPts val="800"/>
+              </a:spcAft>
+              <a:defRPr sz="1200" b="1">
+                <a:solidFill>
+                  <a:srgbClr val="1E293B"/>
+                </a:solidFill>
+                <a:latin typeface="Verdana"/>
+              </a:defRPr>
+            </a:pPr>
+            <a:r>
+              <a:rPr lang="fr-FR" dirty="0"/>
+              <a:t>Le constat </a:t>
+            </a:r>
+            <a:r>
+              <a:rPr dirty="0"/>
+              <a:t>: </a:t>
+            </a:r>
+            <a:endParaRPr lang="fr-FR" dirty="0"/>
+          </a:p>
+          <a:p>
+            <a:pPr>
+              <a:spcAft>
+                <a:spcPts val="800"/>
+              </a:spcAft>
+              <a:defRPr sz="1200" b="1">
+                <a:solidFill>
+                  <a:srgbClr val="1E293B"/>
+                </a:solidFill>
+                <a:latin typeface="Verdana"/>
+              </a:defRPr>
+            </a:pPr>
+            <a:r>
+              <a:rPr lang="fr-FR" b="0" dirty="0">
+                <a:solidFill>
+                  <a:srgbClr val="64748B"/>
+                </a:solidFill>
+              </a:rPr>
+              <a:t>Les modèles qui sont capables de traiter des datasets non linéaires ont eu de meilleurs résultats. </a:t>
+            </a:r>
+            <a:br>
+              <a:rPr lang="fr-FR" b="0" dirty="0">
+                <a:solidFill>
+                  <a:srgbClr val="64748B"/>
+                </a:solidFill>
+              </a:rPr>
+            </a:br>
+            <a:r>
+              <a:rPr lang="fr-FR" b="0" dirty="0">
+                <a:solidFill>
+                  <a:srgbClr val="64748B"/>
+                </a:solidFill>
+              </a:rPr>
+              <a:t>Cependant, même avec le meilleur modèle les scores ne sont pas parfaits.</a:t>
+            </a:r>
+            <a:br>
+              <a:rPr lang="fr-FR" b="0" dirty="0">
+                <a:solidFill>
+                  <a:srgbClr val="64748B"/>
+                </a:solidFill>
+              </a:rPr>
+            </a:br>
+            <a:br>
+              <a:rPr lang="fr-FR" b="0" dirty="0">
+                <a:solidFill>
+                  <a:srgbClr val="64748B"/>
+                </a:solidFill>
+              </a:rPr>
+            </a:br>
+            <a:r>
+              <a:rPr lang="fr-FR" b="0" dirty="0">
+                <a:solidFill>
+                  <a:srgbClr val="64748B"/>
+                </a:solidFill>
+              </a:rPr>
+              <a:t>Quel que soit le modèle , les score R2 sont tous assez proches. </a:t>
+            </a:r>
+            <a:br>
+              <a:rPr lang="fr-FR" b="0" dirty="0">
+                <a:solidFill>
+                  <a:srgbClr val="64748B"/>
+                </a:solidFill>
+              </a:rPr>
+            </a:br>
+            <a:r>
+              <a:rPr lang="fr-FR" b="0" dirty="0">
+                <a:solidFill>
+                  <a:srgbClr val="64748B"/>
+                </a:solidFill>
+              </a:rPr>
+              <a:t>Cela montre que tous les modèles ne font pas d’</a:t>
+            </a:r>
+            <a:r>
+              <a:rPr lang="fr-FR" b="0" dirty="0" err="1">
+                <a:solidFill>
+                  <a:srgbClr val="64748B"/>
+                </a:solidFill>
+              </a:rPr>
+              <a:t>overfitting</a:t>
+            </a:r>
+            <a:r>
+              <a:rPr lang="fr-FR" b="0" dirty="0">
+                <a:solidFill>
+                  <a:srgbClr val="64748B"/>
+                </a:solidFill>
+              </a:rPr>
+              <a:t> (surapprentissage) et que les entraînements, l’apprentissage, les validations croisées, et l’optimisation ne déstabilisent pas les modèles.</a:t>
+            </a:r>
+          </a:p>
+        </p:txBody>
+      </p:sp>
     </p:spTree>
   </p:cSld>
   <p:clrMapOvr>
@@ -3901,7 +4728,7 @@
 </p:sld>
 </file>
 
-<file path=ppt/slides/slide2.xml><?xml version="1.0" encoding="utf-8"?>
+<file path=ppt/slides/slide11.xml><?xml version="1.0" encoding="utf-8"?>
 <p:sld xmlns:a="http://schemas.openxmlformats.org/drawingml/2006/main" xmlns:r="http://schemas.openxmlformats.org/officeDocument/2006/relationships" xmlns:p="http://schemas.openxmlformats.org/presentationml/2006/main">
   <p:cSld>
     <p:bg>
@@ -3926,6 +4753,36 @@
           <a:chExt cx="0" cy="0"/>
         </a:xfrm>
       </p:grpSpPr>
+      <p:pic>
+        <p:nvPicPr>
+          <p:cNvPr id="10" name="Image 9">
+            <a:extLst>
+              <a:ext uri="{FF2B5EF4-FFF2-40B4-BE49-F238E27FC236}">
+                <a16:creationId xmlns:a16="http://schemas.microsoft.com/office/drawing/2014/main" id="{8F8A971E-9B16-A736-312A-F1FE1165804D}"/>
+              </a:ext>
+            </a:extLst>
+          </p:cNvPr>
+          <p:cNvPicPr>
+            <a:picLocks noChangeAspect="1"/>
+          </p:cNvPicPr>
+          <p:nvPr/>
+        </p:nvPicPr>
+        <p:blipFill>
+          <a:blip r:embed="rId2"/>
+          <a:stretch>
+            <a:fillRect/>
+          </a:stretch>
+        </p:blipFill>
+        <p:spPr>
+          <a:xfrm>
+            <a:off x="-873452" y="180681"/>
+            <a:ext cx="13908423" cy="7593918"/>
+          </a:xfrm>
+          <a:prstGeom prst="rect">
+            <a:avLst/>
+          </a:prstGeom>
+        </p:spPr>
+      </p:pic>
       <p:sp>
         <p:nvSpPr>
           <p:cNvPr id="2" name="Rectangle 1"/>
@@ -3940,22 +4797,17 @@
           <a:prstGeom prst="rect">
             <a:avLst/>
           </a:prstGeom>
-          <a:solidFill>
-            <a:srgbClr val="FFFFFF"/>
-          </a:solidFill>
-          <a:ln>
-            <a:noFill/>
-          </a:ln>
+          <a:ln/>
         </p:spPr>
         <p:style>
-          <a:lnRef idx="1">
-            <a:schemeClr val="accent1"/>
+          <a:lnRef idx="0">
+            <a:schemeClr val="dk1"/>
           </a:lnRef>
           <a:fillRef idx="3">
-            <a:schemeClr val="accent1"/>
+            <a:schemeClr val="dk1"/>
           </a:fillRef>
-          <a:effectRef idx="2">
-            <a:schemeClr val="accent1"/>
+          <a:effectRef idx="3">
+            <a:schemeClr val="dk1"/>
           </a:effectRef>
           <a:fontRef idx="minor">
             <a:schemeClr val="lt1"/>
@@ -4022,6 +4874,929 @@
         </p:nvSpPr>
         <p:spPr>
           <a:xfrm>
+            <a:off x="731520" y="320040"/>
+            <a:ext cx="10698480" cy="492443"/>
+          </a:xfrm>
+          <a:prstGeom prst="rect">
+            <a:avLst/>
+          </a:prstGeom>
+          <a:noFill/>
+        </p:spPr>
+        <p:txBody>
+          <a:bodyPr wrap="square">
+            <a:spAutoFit/>
+          </a:bodyPr>
+          <a:lstStyle/>
+          <a:p>
+            <a:pPr algn="l">
+              <a:defRPr sz="2600" b="1">
+                <a:solidFill>
+                  <a:srgbClr val="0F172A"/>
+                </a:solidFill>
+                <a:latin typeface="Georgia"/>
+              </a:defRPr>
+            </a:pPr>
+            <a:r>
+              <a:rPr lang="fr-FR" dirty="0">
+                <a:solidFill>
+                  <a:schemeClr val="bg1"/>
+                </a:solidFill>
+              </a:rPr>
+              <a:t>8 - </a:t>
+            </a:r>
+            <a:r>
+              <a:rPr dirty="0">
+                <a:solidFill>
+                  <a:schemeClr val="bg1"/>
+                </a:solidFill>
+              </a:rPr>
+              <a:t>Choix du </a:t>
+            </a:r>
+            <a:r>
+              <a:rPr lang="fr-FR" dirty="0">
+                <a:solidFill>
+                  <a:schemeClr val="bg1"/>
+                </a:solidFill>
+              </a:rPr>
+              <a:t>m</a:t>
+            </a:r>
+            <a:r>
+              <a:rPr dirty="0" err="1">
+                <a:solidFill>
+                  <a:schemeClr val="bg1"/>
+                </a:solidFill>
+              </a:rPr>
+              <a:t>odèle</a:t>
+            </a:r>
+            <a:r>
+              <a:rPr lang="fr-FR" dirty="0">
+                <a:solidFill>
+                  <a:schemeClr val="bg1"/>
+                </a:solidFill>
+              </a:rPr>
+              <a:t> a déployer</a:t>
+            </a:r>
+            <a:endParaRPr dirty="0">
+              <a:solidFill>
+                <a:schemeClr val="bg1"/>
+              </a:solidFill>
+            </a:endParaRPr>
+          </a:p>
+        </p:txBody>
+      </p:sp>
+      <p:sp>
+        <p:nvSpPr>
+          <p:cNvPr id="6" name="Espace réservé du pied de page 5">
+            <a:extLst>
+              <a:ext uri="{FF2B5EF4-FFF2-40B4-BE49-F238E27FC236}">
+                <a16:creationId xmlns:a16="http://schemas.microsoft.com/office/drawing/2014/main" id="{4221D419-74FD-651D-E247-CC66EBD758E3}"/>
+              </a:ext>
+            </a:extLst>
+          </p:cNvPr>
+          <p:cNvSpPr>
+            <a:spLocks noGrp="1"/>
+          </p:cNvSpPr>
+          <p:nvPr>
+            <p:ph type="ftr" sz="quarter" idx="11"/>
+          </p:nvPr>
+        </p:nvSpPr>
+        <p:spPr/>
+        <p:txBody>
+          <a:bodyPr/>
+          <a:lstStyle/>
+          <a:p>
+            <a:r>
+              <a:rPr lang="en-US"/>
+              <a:t>Modélisation Prédictive (Machine Learning)</a:t>
+            </a:r>
+          </a:p>
+        </p:txBody>
+      </p:sp>
+      <p:sp>
+        <p:nvSpPr>
+          <p:cNvPr id="7" name="Espace réservé du numéro de diapositive 6">
+            <a:extLst>
+              <a:ext uri="{FF2B5EF4-FFF2-40B4-BE49-F238E27FC236}">
+                <a16:creationId xmlns:a16="http://schemas.microsoft.com/office/drawing/2014/main" id="{5572EEE3-396E-42BC-E034-236DA427562C}"/>
+              </a:ext>
+            </a:extLst>
+          </p:cNvPr>
+          <p:cNvSpPr>
+            <a:spLocks noGrp="1"/>
+          </p:cNvSpPr>
+          <p:nvPr>
+            <p:ph type="sldNum" sz="quarter" idx="12"/>
+          </p:nvPr>
+        </p:nvSpPr>
+        <p:spPr/>
+        <p:txBody>
+          <a:bodyPr/>
+          <a:lstStyle/>
+          <a:p>
+            <a:fld id="{C1FF6DA9-008F-8B48-92A6-B652298478BF}" type="slidenum">
+              <a:rPr lang="en-US" smtClean="0"/>
+              <a:t>11</a:t>
+            </a:fld>
+            <a:endParaRPr lang="en-US" dirty="0"/>
+          </a:p>
+        </p:txBody>
+      </p:sp>
+      <p:sp>
+        <p:nvSpPr>
+          <p:cNvPr id="5" name="Rounded Rectangle 3">
+            <a:extLst>
+              <a:ext uri="{FF2B5EF4-FFF2-40B4-BE49-F238E27FC236}">
+                <a16:creationId xmlns:a16="http://schemas.microsoft.com/office/drawing/2014/main" id="{9EF0016F-9A61-DCC1-3A3F-DF1C8A2590D8}"/>
+              </a:ext>
+            </a:extLst>
+          </p:cNvPr>
+          <p:cNvSpPr/>
+          <p:nvPr/>
+        </p:nvSpPr>
+        <p:spPr>
+          <a:xfrm>
+            <a:off x="548640" y="1645920"/>
+            <a:ext cx="3474720" cy="2740343"/>
+          </a:xfrm>
+          <a:prstGeom prst="roundRect">
+            <a:avLst/>
+          </a:prstGeom>
+          <a:ln>
+            <a:solidFill>
+              <a:srgbClr val="00B050"/>
+            </a:solidFill>
+          </a:ln>
+        </p:spPr>
+        <p:style>
+          <a:lnRef idx="2">
+            <a:schemeClr val="accent3"/>
+          </a:lnRef>
+          <a:fillRef idx="1">
+            <a:schemeClr val="lt1"/>
+          </a:fillRef>
+          <a:effectRef idx="0">
+            <a:schemeClr val="accent3"/>
+          </a:effectRef>
+          <a:fontRef idx="minor">
+            <a:schemeClr val="dk1"/>
+          </a:fontRef>
+        </p:style>
+        <p:txBody>
+          <a:bodyPr wrap="square" lIns="228600" tIns="228600" rtlCol="0" anchor="ctr"/>
+          <a:lstStyle/>
+          <a:p>
+            <a:pPr algn="ctr">
+              <a:spcAft>
+                <a:spcPts val="1200"/>
+              </a:spcAft>
+              <a:defRPr sz="1600" b="1">
+                <a:solidFill>
+                  <a:srgbClr val="0D9488"/>
+                </a:solidFill>
+                <a:latin typeface="Georgia"/>
+              </a:defRPr>
+            </a:pPr>
+            <a:r>
+              <a:rPr lang="fr-FR" dirty="0">
+                <a:solidFill>
+                  <a:schemeClr val="accent3">
+                    <a:lumMod val="75000"/>
+                  </a:schemeClr>
+                </a:solidFill>
+              </a:rPr>
+              <a:t>Régression Linéaire</a:t>
+            </a:r>
+            <a:endParaRPr dirty="0">
+              <a:solidFill>
+                <a:schemeClr val="accent3">
+                  <a:lumMod val="75000"/>
+                </a:schemeClr>
+              </a:solidFill>
+            </a:endParaRPr>
+          </a:p>
+          <a:p>
+            <a:pPr>
+              <a:spcAft>
+                <a:spcPts val="800"/>
+              </a:spcAft>
+              <a:defRPr sz="1200" b="1">
+                <a:solidFill>
+                  <a:srgbClr val="1E293B"/>
+                </a:solidFill>
+                <a:latin typeface="Verdana"/>
+              </a:defRPr>
+            </a:pPr>
+            <a:r>
+              <a:rPr dirty="0"/>
+              <a:t>• </a:t>
+            </a:r>
+            <a:r>
+              <a:rPr lang="fr-FR" dirty="0"/>
+              <a:t>Les +</a:t>
+            </a:r>
+            <a:r>
+              <a:rPr dirty="0"/>
+              <a:t>:</a:t>
+            </a:r>
+            <a:br>
+              <a:rPr dirty="0"/>
+            </a:br>
+            <a:r>
+              <a:rPr sz="1100" b="0" dirty="0" err="1">
+                <a:solidFill>
+                  <a:srgbClr val="64748B"/>
+                </a:solidFill>
+              </a:rPr>
+              <a:t>Modèle</a:t>
+            </a:r>
+            <a:r>
+              <a:rPr sz="1100" b="0" dirty="0">
+                <a:solidFill>
+                  <a:srgbClr val="64748B"/>
+                </a:solidFill>
+              </a:rPr>
+              <a:t> </a:t>
+            </a:r>
+            <a:r>
+              <a:rPr lang="fr-FR" sz="1100" b="0" dirty="0">
+                <a:solidFill>
+                  <a:srgbClr val="64748B"/>
+                </a:solidFill>
+              </a:rPr>
+              <a:t>"</a:t>
+            </a:r>
+            <a:r>
+              <a:rPr sz="1100" b="0" dirty="0">
+                <a:solidFill>
+                  <a:srgbClr val="64748B"/>
+                </a:solidFill>
+              </a:rPr>
+              <a:t>baseline</a:t>
+            </a:r>
+            <a:r>
+              <a:rPr lang="fr-FR" sz="1100" b="0" dirty="0">
+                <a:solidFill>
+                  <a:srgbClr val="64748B"/>
+                </a:solidFill>
+              </a:rPr>
+              <a:t>"</a:t>
+            </a:r>
+            <a:r>
+              <a:rPr sz="1100" b="0" dirty="0">
+                <a:solidFill>
+                  <a:srgbClr val="64748B"/>
+                </a:solidFill>
+              </a:rPr>
+              <a:t> servant de reference de performance minimal</a:t>
+            </a:r>
+            <a:r>
+              <a:rPr lang="fr-FR" sz="1100" b="0" dirty="0">
+                <a:solidFill>
+                  <a:srgbClr val="64748B"/>
+                </a:solidFill>
+              </a:rPr>
+              <a:t>e</a:t>
+            </a:r>
+            <a:r>
+              <a:rPr sz="1100" b="0" dirty="0">
+                <a:solidFill>
+                  <a:srgbClr val="64748B"/>
+                </a:solidFill>
+              </a:rPr>
+              <a:t>.</a:t>
+            </a:r>
+          </a:p>
+          <a:p>
+            <a:pPr>
+              <a:spcAft>
+                <a:spcPts val="800"/>
+              </a:spcAft>
+              <a:defRPr sz="1200" b="1">
+                <a:solidFill>
+                  <a:srgbClr val="1E293B"/>
+                </a:solidFill>
+                <a:latin typeface="Verdana"/>
+              </a:defRPr>
+            </a:pPr>
+            <a:r>
+              <a:rPr dirty="0"/>
+              <a:t>• </a:t>
+            </a:r>
+            <a:r>
+              <a:rPr lang="fr-FR" dirty="0"/>
+              <a:t>Les -</a:t>
+            </a:r>
+            <a:r>
+              <a:rPr dirty="0"/>
+              <a:t>:</a:t>
+            </a:r>
+            <a:br>
+              <a:rPr dirty="0"/>
+            </a:br>
+            <a:r>
+              <a:rPr lang="fr-FR" sz="1100" b="0" dirty="0">
+                <a:solidFill>
+                  <a:srgbClr val="64748B"/>
+                </a:solidFill>
+              </a:rPr>
+              <a:t>Résultats pas efficients modèle trop simple pour l’utiliser tel quel</a:t>
+            </a:r>
+            <a:endParaRPr sz="1100" b="0" dirty="0">
+              <a:solidFill>
+                <a:srgbClr val="64748B"/>
+              </a:solidFill>
+            </a:endParaRPr>
+          </a:p>
+        </p:txBody>
+      </p:sp>
+      <p:sp>
+        <p:nvSpPr>
+          <p:cNvPr id="8" name="Rounded Rectangle 4">
+            <a:extLst>
+              <a:ext uri="{FF2B5EF4-FFF2-40B4-BE49-F238E27FC236}">
+                <a16:creationId xmlns:a16="http://schemas.microsoft.com/office/drawing/2014/main" id="{CE2E2CAC-7A58-4F9C-782E-5E5BEA3BEFC3}"/>
+              </a:ext>
+            </a:extLst>
+          </p:cNvPr>
+          <p:cNvSpPr/>
+          <p:nvPr/>
+        </p:nvSpPr>
+        <p:spPr>
+          <a:xfrm>
+            <a:off x="8280092" y="3863924"/>
+            <a:ext cx="3474720" cy="2674036"/>
+          </a:xfrm>
+          <a:prstGeom prst="roundRect">
+            <a:avLst/>
+          </a:prstGeom>
+          <a:solidFill>
+            <a:schemeClr val="accent3">
+              <a:lumMod val="40000"/>
+              <a:lumOff val="60000"/>
+            </a:schemeClr>
+          </a:solidFill>
+          <a:ln w="28575">
+            <a:solidFill>
+              <a:schemeClr val="accent3">
+                <a:lumMod val="75000"/>
+              </a:schemeClr>
+            </a:solidFill>
+          </a:ln>
+        </p:spPr>
+        <p:style>
+          <a:lnRef idx="1">
+            <a:schemeClr val="accent3"/>
+          </a:lnRef>
+          <a:fillRef idx="3">
+            <a:schemeClr val="accent3"/>
+          </a:fillRef>
+          <a:effectRef idx="2">
+            <a:schemeClr val="accent3"/>
+          </a:effectRef>
+          <a:fontRef idx="minor">
+            <a:schemeClr val="lt1"/>
+          </a:fontRef>
+        </p:style>
+        <p:txBody>
+          <a:bodyPr wrap="square" lIns="228600" tIns="228600" rtlCol="0" anchor="ctr"/>
+          <a:lstStyle/>
+          <a:p>
+            <a:pPr algn="ctr">
+              <a:spcAft>
+                <a:spcPts val="1200"/>
+              </a:spcAft>
+              <a:defRPr sz="1600" b="1">
+                <a:solidFill>
+                  <a:srgbClr val="D97706"/>
+                </a:solidFill>
+                <a:latin typeface="Georgia"/>
+              </a:defRPr>
+            </a:pPr>
+            <a:r>
+              <a:rPr lang="fr-FR" dirty="0">
+                <a:solidFill>
+                  <a:schemeClr val="tx1"/>
+                </a:solidFill>
+              </a:rPr>
+              <a:t>RandomForest</a:t>
+            </a:r>
+            <a:endParaRPr dirty="0">
+              <a:solidFill>
+                <a:schemeClr val="tx1"/>
+              </a:solidFill>
+            </a:endParaRPr>
+          </a:p>
+          <a:p>
+            <a:pPr>
+              <a:spcAft>
+                <a:spcPts val="800"/>
+              </a:spcAft>
+              <a:defRPr sz="1200" b="1">
+                <a:solidFill>
+                  <a:srgbClr val="1E293B"/>
+                </a:solidFill>
+                <a:latin typeface="Verdana"/>
+              </a:defRPr>
+            </a:pPr>
+            <a:r>
+              <a:rPr dirty="0"/>
+              <a:t>• </a:t>
+            </a:r>
+            <a:r>
+              <a:rPr lang="fr-FR" dirty="0"/>
+              <a:t>Les +</a:t>
+            </a:r>
+            <a:r>
+              <a:rPr dirty="0"/>
+              <a:t>:</a:t>
+            </a:r>
+            <a:br>
+              <a:rPr dirty="0"/>
+            </a:br>
+            <a:r>
+              <a:rPr lang="fr-FR" sz="1100" b="0" dirty="0">
+                <a:solidFill>
+                  <a:srgbClr val="64748B"/>
+                </a:solidFill>
+              </a:rPr>
+              <a:t>Le modèle le plus adaptatif. Valeurs élevées et échelles ont moins d’impact sur les scores </a:t>
+            </a:r>
+            <a:endParaRPr sz="1100" b="0" dirty="0">
+              <a:solidFill>
+                <a:srgbClr val="64748B"/>
+              </a:solidFill>
+            </a:endParaRPr>
+          </a:p>
+          <a:p>
+            <a:pPr>
+              <a:spcAft>
+                <a:spcPts val="800"/>
+              </a:spcAft>
+              <a:defRPr sz="1200" b="1">
+                <a:solidFill>
+                  <a:srgbClr val="1E293B"/>
+                </a:solidFill>
+                <a:latin typeface="Verdana"/>
+              </a:defRPr>
+            </a:pPr>
+            <a:r>
+              <a:rPr dirty="0"/>
+              <a:t>• </a:t>
+            </a:r>
+            <a:r>
+              <a:rPr lang="fr-FR" dirty="0"/>
+              <a:t>Les -</a:t>
+            </a:r>
+            <a:r>
+              <a:rPr dirty="0"/>
+              <a:t> :</a:t>
+            </a:r>
+            <a:br>
+              <a:rPr dirty="0"/>
+            </a:br>
+            <a:r>
+              <a:rPr lang="fr-FR" sz="1100" b="0" dirty="0">
+                <a:solidFill>
+                  <a:srgbClr val="64748B"/>
+                </a:solidFill>
+              </a:rPr>
+              <a:t>Complexe a en comprendre exactement le fonctionnement </a:t>
+            </a:r>
+            <a:endParaRPr sz="1100" b="0" dirty="0">
+              <a:solidFill>
+                <a:srgbClr val="64748B"/>
+              </a:solidFill>
+            </a:endParaRPr>
+          </a:p>
+        </p:txBody>
+      </p:sp>
+      <p:sp>
+        <p:nvSpPr>
+          <p:cNvPr id="9" name="Rounded Rectangle 5">
+            <a:extLst>
+              <a:ext uri="{FF2B5EF4-FFF2-40B4-BE49-F238E27FC236}">
+                <a16:creationId xmlns:a16="http://schemas.microsoft.com/office/drawing/2014/main" id="{960ED744-7733-8B1E-9D0B-3E8012EDB8B3}"/>
+              </a:ext>
+            </a:extLst>
+          </p:cNvPr>
+          <p:cNvSpPr/>
+          <p:nvPr/>
+        </p:nvSpPr>
+        <p:spPr>
+          <a:xfrm>
+            <a:off x="548640" y="4554197"/>
+            <a:ext cx="3474720" cy="2123122"/>
+          </a:xfrm>
+          <a:prstGeom prst="roundRect">
+            <a:avLst/>
+          </a:prstGeom>
+          <a:ln/>
+        </p:spPr>
+        <p:style>
+          <a:lnRef idx="2">
+            <a:schemeClr val="accent5"/>
+          </a:lnRef>
+          <a:fillRef idx="1">
+            <a:schemeClr val="lt1"/>
+          </a:fillRef>
+          <a:effectRef idx="0">
+            <a:schemeClr val="accent5"/>
+          </a:effectRef>
+          <a:fontRef idx="minor">
+            <a:schemeClr val="dk1"/>
+          </a:fontRef>
+        </p:style>
+        <p:txBody>
+          <a:bodyPr wrap="square" lIns="228600" tIns="228600" rtlCol="0" anchor="ctr"/>
+          <a:lstStyle/>
+          <a:p>
+            <a:pPr algn="ctr">
+              <a:spcAft>
+                <a:spcPts val="1200"/>
+              </a:spcAft>
+              <a:defRPr sz="1600" b="1">
+                <a:solidFill>
+                  <a:srgbClr val="2563EB"/>
+                </a:solidFill>
+                <a:latin typeface="Georgia"/>
+              </a:defRPr>
+            </a:pPr>
+            <a:r>
+              <a:rPr dirty="0"/>
+              <a:t> </a:t>
+            </a:r>
+            <a:r>
+              <a:rPr lang="fr-FR" dirty="0">
+                <a:solidFill>
+                  <a:schemeClr val="tx2">
+                    <a:lumMod val="60000"/>
+                    <a:lumOff val="40000"/>
+                  </a:schemeClr>
+                </a:solidFill>
+              </a:rPr>
+              <a:t>SVR</a:t>
+            </a:r>
+            <a:endParaRPr dirty="0">
+              <a:solidFill>
+                <a:schemeClr val="tx2">
+                  <a:lumMod val="60000"/>
+                  <a:lumOff val="40000"/>
+                </a:schemeClr>
+              </a:solidFill>
+            </a:endParaRPr>
+          </a:p>
+          <a:p>
+            <a:pPr>
+              <a:spcAft>
+                <a:spcPts val="800"/>
+              </a:spcAft>
+              <a:defRPr sz="1200" b="1">
+                <a:solidFill>
+                  <a:srgbClr val="1E293B"/>
+                </a:solidFill>
+                <a:latin typeface="Verdana"/>
+              </a:defRPr>
+            </a:pPr>
+            <a:r>
+              <a:rPr dirty="0"/>
+              <a:t>• </a:t>
+            </a:r>
+            <a:r>
+              <a:rPr lang="fr-FR" dirty="0"/>
+              <a:t>les +</a:t>
+            </a:r>
+            <a:r>
+              <a:rPr dirty="0"/>
+              <a:t>:</a:t>
+            </a:r>
+            <a:br>
+              <a:rPr dirty="0"/>
+            </a:br>
+            <a:r>
+              <a:rPr sz="1100" b="0" dirty="0">
+                <a:solidFill>
+                  <a:srgbClr val="64748B"/>
+                </a:solidFill>
+              </a:rPr>
+              <a:t>P</a:t>
+            </a:r>
+            <a:r>
+              <a:rPr lang="fr-FR" sz="1100" b="0" dirty="0">
+                <a:solidFill>
+                  <a:srgbClr val="64748B"/>
+                </a:solidFill>
+              </a:rPr>
+              <a:t>lus robuste sur les résultats (plus de stabilité)</a:t>
+            </a:r>
+            <a:endParaRPr sz="1100" b="0" dirty="0">
+              <a:solidFill>
+                <a:srgbClr val="64748B"/>
+              </a:solidFill>
+            </a:endParaRPr>
+          </a:p>
+          <a:p>
+            <a:pPr>
+              <a:spcAft>
+                <a:spcPts val="800"/>
+              </a:spcAft>
+              <a:defRPr sz="1200" b="1">
+                <a:solidFill>
+                  <a:srgbClr val="1E293B"/>
+                </a:solidFill>
+                <a:latin typeface="Verdana"/>
+              </a:defRPr>
+            </a:pPr>
+            <a:r>
+              <a:rPr dirty="0"/>
+              <a:t>• </a:t>
+            </a:r>
+            <a:r>
+              <a:rPr lang="fr-FR" dirty="0"/>
+              <a:t>les -</a:t>
+            </a:r>
+            <a:r>
+              <a:rPr dirty="0"/>
+              <a:t> :</a:t>
+            </a:r>
+            <a:br>
+              <a:rPr dirty="0"/>
+            </a:br>
+            <a:r>
+              <a:rPr sz="1100" b="0" dirty="0">
+                <a:solidFill>
+                  <a:srgbClr val="64748B"/>
+                </a:solidFill>
+              </a:rPr>
+              <a:t>M</a:t>
+            </a:r>
+            <a:r>
+              <a:rPr lang="fr-FR" sz="1100" b="0" dirty="0">
+                <a:solidFill>
+                  <a:srgbClr val="64748B"/>
+                </a:solidFill>
+              </a:rPr>
+              <a:t>oins précis que la randomForest</a:t>
+            </a:r>
+          </a:p>
+        </p:txBody>
+      </p:sp>
+      <p:sp>
+        <p:nvSpPr>
+          <p:cNvPr id="11" name="Rounded Rectangle 4">
+            <a:extLst>
+              <a:ext uri="{FF2B5EF4-FFF2-40B4-BE49-F238E27FC236}">
+                <a16:creationId xmlns:a16="http://schemas.microsoft.com/office/drawing/2014/main" id="{83F44CB1-A0F2-BA9C-9926-B918A701DE95}"/>
+              </a:ext>
+            </a:extLst>
+          </p:cNvPr>
+          <p:cNvSpPr/>
+          <p:nvPr/>
+        </p:nvSpPr>
+        <p:spPr>
+          <a:xfrm>
+            <a:off x="8686800" y="3016091"/>
+            <a:ext cx="2993871" cy="671404"/>
+          </a:xfrm>
+          <a:prstGeom prst="roundRect">
+            <a:avLst/>
+          </a:prstGeom>
+          <a:solidFill>
+            <a:schemeClr val="accent3">
+              <a:lumMod val="40000"/>
+              <a:lumOff val="60000"/>
+            </a:schemeClr>
+          </a:solidFill>
+          <a:ln w="28575">
+            <a:solidFill>
+              <a:schemeClr val="accent3">
+                <a:lumMod val="75000"/>
+              </a:schemeClr>
+            </a:solidFill>
+          </a:ln>
+        </p:spPr>
+        <p:style>
+          <a:lnRef idx="1">
+            <a:schemeClr val="accent3"/>
+          </a:lnRef>
+          <a:fillRef idx="3">
+            <a:schemeClr val="accent3"/>
+          </a:fillRef>
+          <a:effectRef idx="2">
+            <a:schemeClr val="accent3"/>
+          </a:effectRef>
+          <a:fontRef idx="minor">
+            <a:schemeClr val="lt1"/>
+          </a:fontRef>
+        </p:style>
+        <p:txBody>
+          <a:bodyPr wrap="square" lIns="228600" tIns="228600" rtlCol="0" anchor="t"/>
+          <a:lstStyle/>
+          <a:p>
+            <a:pPr algn="ctr">
+              <a:spcAft>
+                <a:spcPts val="1200"/>
+              </a:spcAft>
+              <a:defRPr sz="1600" b="1">
+                <a:solidFill>
+                  <a:srgbClr val="D97706"/>
+                </a:solidFill>
+                <a:latin typeface="Georgia"/>
+              </a:defRPr>
+            </a:pPr>
+            <a:r>
+              <a:rPr lang="fr-FR" dirty="0">
+                <a:solidFill>
+                  <a:schemeClr val="tx1"/>
+                </a:solidFill>
+              </a:rPr>
+              <a:t>Modèle a déployer </a:t>
+            </a:r>
+            <a:endParaRPr dirty="0">
+              <a:solidFill>
+                <a:schemeClr val="tx1"/>
+              </a:solidFill>
+            </a:endParaRPr>
+          </a:p>
+        </p:txBody>
+      </p:sp>
+    </p:spTree>
+  </p:cSld>
+  <p:clrMapOvr>
+    <a:masterClrMapping/>
+  </p:clrMapOvr>
+</p:sld>
+</file>
+
+<file path=ppt/slides/slide2.xml><?xml version="1.0" encoding="utf-8"?>
+<p:sld xmlns:a="http://schemas.openxmlformats.org/drawingml/2006/main" xmlns:r="http://schemas.openxmlformats.org/officeDocument/2006/relationships" xmlns:p="http://schemas.openxmlformats.org/presentationml/2006/main">
+  <p:cSld>
+    <p:bg>
+      <p:bgPr>
+        <a:solidFill>
+          <a:srgbClr val="FAFAFC"/>
+        </a:solidFill>
+        <a:effectLst/>
+      </p:bgPr>
+    </p:bg>
+    <p:spTree>
+      <p:nvGrpSpPr>
+        <p:cNvPr id="1" name="">
+          <a:extLst>
+            <a:ext uri="{FF2B5EF4-FFF2-40B4-BE49-F238E27FC236}">
+              <a16:creationId xmlns:a16="http://schemas.microsoft.com/office/drawing/2014/main" id="{743FC790-E08B-13F3-FF3A-E10E7068940C}"/>
+            </a:ext>
+          </a:extLst>
+        </p:cNvPr>
+        <p:cNvGrpSpPr/>
+        <p:nvPr/>
+      </p:nvGrpSpPr>
+      <p:grpSpPr>
+        <a:xfrm>
+          <a:off x="0" y="0"/>
+          <a:ext cx="0" cy="0"/>
+          <a:chOff x="0" y="0"/>
+          <a:chExt cx="0" cy="0"/>
+        </a:xfrm>
+      </p:grpSpPr>
+      <p:pic>
+        <p:nvPicPr>
+          <p:cNvPr id="5" name="Image 4">
+            <a:extLst>
+              <a:ext uri="{FF2B5EF4-FFF2-40B4-BE49-F238E27FC236}">
+                <a16:creationId xmlns:a16="http://schemas.microsoft.com/office/drawing/2014/main" id="{F6F7E633-5FF9-A072-AFA9-9B211748DF59}"/>
+              </a:ext>
+            </a:extLst>
+          </p:cNvPr>
+          <p:cNvPicPr>
+            <a:picLocks noChangeAspect="1"/>
+          </p:cNvPicPr>
+          <p:nvPr/>
+        </p:nvPicPr>
+        <p:blipFill>
+          <a:blip r:embed="rId2"/>
+          <a:stretch>
+            <a:fillRect/>
+          </a:stretch>
+        </p:blipFill>
+        <p:spPr>
+          <a:xfrm>
+            <a:off x="2433631" y="228846"/>
+            <a:ext cx="13908423" cy="7593918"/>
+          </a:xfrm>
+          <a:prstGeom prst="rect">
+            <a:avLst/>
+          </a:prstGeom>
+        </p:spPr>
+      </p:pic>
+      <p:sp>
+        <p:nvSpPr>
+          <p:cNvPr id="2" name="Rectangle 1">
+            <a:extLst>
+              <a:ext uri="{FF2B5EF4-FFF2-40B4-BE49-F238E27FC236}">
+                <a16:creationId xmlns:a16="http://schemas.microsoft.com/office/drawing/2014/main" id="{F5F59151-E702-E33E-2D99-61FD4450F563}"/>
+              </a:ext>
+            </a:extLst>
+          </p:cNvPr>
+          <p:cNvSpPr/>
+          <p:nvPr/>
+        </p:nvSpPr>
+        <p:spPr>
+          <a:xfrm>
+            <a:off x="0" y="0"/>
+            <a:ext cx="12191695" cy="1371600"/>
+          </a:xfrm>
+          <a:prstGeom prst="rect">
+            <a:avLst/>
+          </a:prstGeom>
+          <a:ln/>
+        </p:spPr>
+        <p:style>
+          <a:lnRef idx="0">
+            <a:schemeClr val="dk1"/>
+          </a:lnRef>
+          <a:fillRef idx="3">
+            <a:schemeClr val="dk1"/>
+          </a:fillRef>
+          <a:effectRef idx="3">
+            <a:schemeClr val="dk1"/>
+          </a:effectRef>
+          <a:fontRef idx="minor">
+            <a:schemeClr val="lt1"/>
+          </a:fontRef>
+        </p:style>
+        <p:txBody>
+          <a:bodyPr rtlCol="0" anchor="ctr"/>
+          <a:lstStyle/>
+          <a:p>
+            <a:pPr algn="ctr"/>
+            <a:endParaRPr/>
+          </a:p>
+        </p:txBody>
+      </p:sp>
+      <p:sp>
+        <p:nvSpPr>
+          <p:cNvPr id="3" name="Rectangle 2">
+            <a:extLst>
+              <a:ext uri="{FF2B5EF4-FFF2-40B4-BE49-F238E27FC236}">
+                <a16:creationId xmlns:a16="http://schemas.microsoft.com/office/drawing/2014/main" id="{920F5F91-4B7B-D716-8B16-6742ADE33DED}"/>
+              </a:ext>
+            </a:extLst>
+          </p:cNvPr>
+          <p:cNvSpPr/>
+          <p:nvPr/>
+        </p:nvSpPr>
+        <p:spPr>
+          <a:xfrm>
+            <a:off x="0" y="1353312"/>
+            <a:ext cx="12191695" cy="25400"/>
+          </a:xfrm>
+          <a:prstGeom prst="rect">
+            <a:avLst/>
+          </a:prstGeom>
+          <a:solidFill>
+            <a:srgbClr val="0284C7"/>
+          </a:solidFill>
+          <a:ln>
+            <a:noFill/>
+          </a:ln>
+        </p:spPr>
+        <p:style>
+          <a:lnRef idx="1">
+            <a:schemeClr val="accent1"/>
+          </a:lnRef>
+          <a:fillRef idx="3">
+            <a:schemeClr val="accent1"/>
+          </a:fillRef>
+          <a:effectRef idx="2">
+            <a:schemeClr val="accent1"/>
+          </a:effectRef>
+          <a:fontRef idx="minor">
+            <a:schemeClr val="lt1"/>
+          </a:fontRef>
+        </p:style>
+        <p:txBody>
+          <a:bodyPr rtlCol="0" anchor="ctr"/>
+          <a:lstStyle/>
+          <a:p>
+            <a:pPr algn="ctr"/>
+            <a:endParaRPr/>
+          </a:p>
+        </p:txBody>
+      </p:sp>
+      <p:sp>
+        <p:nvSpPr>
+          <p:cNvPr id="4" name="TextBox 3">
+            <a:extLst>
+              <a:ext uri="{FF2B5EF4-FFF2-40B4-BE49-F238E27FC236}">
+                <a16:creationId xmlns:a16="http://schemas.microsoft.com/office/drawing/2014/main" id="{1E865480-6882-76BF-67EB-B244947FC245}"/>
+              </a:ext>
+            </a:extLst>
+          </p:cNvPr>
+          <p:cNvSpPr txBox="1"/>
+          <p:nvPr/>
+        </p:nvSpPr>
+        <p:spPr>
+          <a:xfrm>
             <a:off x="892079" y="338512"/>
             <a:ext cx="10407535" cy="492443"/>
           </a:xfrm>
@@ -4029,6 +5804,9 @@
             <a:avLst/>
           </a:prstGeom>
           <a:noFill/>
+          <a:ln>
+            <a:noFill/>
+          </a:ln>
         </p:spPr>
         <p:txBody>
           <a:bodyPr wrap="square">
@@ -4045,18 +5823,662 @@
               </a:defRPr>
             </a:pPr>
             <a:r>
-              <a:rPr lang="fr-FR" dirty="0"/>
-              <a:t>Environnement</a:t>
-            </a:r>
-            <a:r>
-              <a:rPr dirty="0"/>
+              <a:rPr lang="fr-FR" dirty="0">
+                <a:solidFill>
+                  <a:schemeClr val="bg1"/>
+                </a:solidFill>
+              </a:rPr>
+              <a:t>SOMMAIRE</a:t>
+            </a:r>
+            <a:endParaRPr dirty="0">
+              <a:solidFill>
+                <a:schemeClr val="bg1"/>
+              </a:solidFill>
+            </a:endParaRPr>
+          </a:p>
+        </p:txBody>
+      </p:sp>
+      <p:sp>
+        <p:nvSpPr>
+          <p:cNvPr id="6" name="Espace réservé du pied de page 5">
+            <a:extLst>
+              <a:ext uri="{FF2B5EF4-FFF2-40B4-BE49-F238E27FC236}">
+                <a16:creationId xmlns:a16="http://schemas.microsoft.com/office/drawing/2014/main" id="{D0DAE181-E165-9991-77B9-0CA3BAFD2D15}"/>
+              </a:ext>
+            </a:extLst>
+          </p:cNvPr>
+          <p:cNvSpPr>
+            <a:spLocks noGrp="1"/>
+          </p:cNvSpPr>
+          <p:nvPr>
+            <p:ph type="ftr" sz="quarter" idx="11"/>
+          </p:nvPr>
+        </p:nvSpPr>
+        <p:spPr/>
+        <p:txBody>
+          <a:bodyPr/>
+          <a:lstStyle/>
+          <a:p>
+            <a:r>
+              <a:rPr lang="en-US" dirty="0" err="1"/>
+              <a:t>Modélisation</a:t>
+            </a:r>
+            <a:r>
+              <a:rPr lang="en-US" dirty="0"/>
               <a:t> </a:t>
             </a:r>
             <a:r>
-              <a:rPr lang="fr-FR" dirty="0"/>
+              <a:rPr lang="en-US" dirty="0" err="1"/>
+              <a:t>Prédictive</a:t>
+            </a:r>
+            <a:r>
+              <a:rPr lang="en-US" dirty="0"/>
+              <a:t> (Machine Learning)</a:t>
+            </a:r>
+          </a:p>
+        </p:txBody>
+      </p:sp>
+      <p:sp>
+        <p:nvSpPr>
+          <p:cNvPr id="7" name="Espace réservé du numéro de diapositive 6">
+            <a:extLst>
+              <a:ext uri="{FF2B5EF4-FFF2-40B4-BE49-F238E27FC236}">
+                <a16:creationId xmlns:a16="http://schemas.microsoft.com/office/drawing/2014/main" id="{324C9E1C-C930-2A1C-BD29-4F21D08B7658}"/>
+              </a:ext>
+            </a:extLst>
+          </p:cNvPr>
+          <p:cNvSpPr>
+            <a:spLocks noGrp="1"/>
+          </p:cNvSpPr>
+          <p:nvPr>
+            <p:ph type="sldNum" sz="quarter" idx="12"/>
+          </p:nvPr>
+        </p:nvSpPr>
+        <p:spPr/>
+        <p:txBody>
+          <a:bodyPr/>
+          <a:lstStyle/>
+          <a:p>
+            <a:fld id="{C1FF6DA9-008F-8B48-92A6-B652298478BF}" type="slidenum">
+              <a:rPr lang="en-US" smtClean="0"/>
+              <a:t>2</a:t>
+            </a:fld>
+            <a:endParaRPr lang="en-US" dirty="0"/>
+          </a:p>
+        </p:txBody>
+      </p:sp>
+      <p:sp>
+        <p:nvSpPr>
+          <p:cNvPr id="10" name="Rounded Rectangle 4">
+            <a:extLst>
+              <a:ext uri="{FF2B5EF4-FFF2-40B4-BE49-F238E27FC236}">
+                <a16:creationId xmlns:a16="http://schemas.microsoft.com/office/drawing/2014/main" id="{15B85386-FF4A-5A10-85F7-55CE5972FE72}"/>
+              </a:ext>
+            </a:extLst>
+          </p:cNvPr>
+          <p:cNvSpPr/>
+          <p:nvPr/>
+        </p:nvSpPr>
+        <p:spPr>
+          <a:xfrm>
+            <a:off x="572656" y="1710112"/>
+            <a:ext cx="8914244" cy="4517506"/>
+          </a:xfrm>
+          <a:prstGeom prst="roundRect">
+            <a:avLst/>
+          </a:prstGeom>
+          <a:ln/>
+        </p:spPr>
+        <p:style>
+          <a:lnRef idx="2">
+            <a:schemeClr val="accent2"/>
+          </a:lnRef>
+          <a:fillRef idx="1">
+            <a:schemeClr val="lt1"/>
+          </a:fillRef>
+          <a:effectRef idx="0">
+            <a:schemeClr val="accent2"/>
+          </a:effectRef>
+          <a:fontRef idx="minor">
+            <a:schemeClr val="dk1"/>
+          </a:fontRef>
+        </p:style>
+        <p:txBody>
+          <a:bodyPr wrap="square" lIns="274320" tIns="274320" rIns="274320" rtlCol="0" anchor="t"/>
+          <a:lstStyle/>
+          <a:p>
+            <a:pPr marL="228600" indent="-228600">
+              <a:lnSpc>
+                <a:spcPct val="150000"/>
+              </a:lnSpc>
+              <a:spcAft>
+                <a:spcPts val="1000"/>
+              </a:spcAft>
+              <a:buFont typeface="+mj-lt"/>
+              <a:buAutoNum type="arabicPeriod"/>
+              <a:defRPr sz="1600" b="1">
+                <a:solidFill>
+                  <a:srgbClr val="1E293B"/>
+                </a:solidFill>
+                <a:latin typeface="Georgia"/>
+              </a:defRPr>
+            </a:pPr>
+            <a:r>
+              <a:rPr lang="fr-FR" sz="1600" dirty="0">
+                <a:solidFill>
+                  <a:schemeClr val="tx1"/>
+                </a:solidFill>
+              </a:rPr>
+              <a:t>Présentation de l’environnement projet &amp; Gestion documentaire </a:t>
+            </a:r>
+          </a:p>
+          <a:p>
+            <a:pPr marL="228600" indent="-228600">
+              <a:spcAft>
+                <a:spcPts val="1000"/>
+              </a:spcAft>
+              <a:buFont typeface="+mj-lt"/>
+              <a:buAutoNum type="arabicPeriod"/>
+              <a:defRPr sz="1600" b="1">
+                <a:solidFill>
+                  <a:srgbClr val="1E293B"/>
+                </a:solidFill>
+                <a:latin typeface="Georgia"/>
+              </a:defRPr>
+            </a:pPr>
+            <a:r>
+              <a:rPr lang="fr-FR" sz="1600" dirty="0">
+                <a:solidFill>
+                  <a:schemeClr val="tx1"/>
+                </a:solidFill>
+              </a:rPr>
+              <a:t>Audit du dataset , Nettoyage des données  &amp; Analyse Exploratoire (EDA) </a:t>
+            </a:r>
+          </a:p>
+          <a:p>
+            <a:pPr marL="228600" indent="-228600">
+              <a:spcAft>
+                <a:spcPts val="1000"/>
+              </a:spcAft>
+              <a:buFont typeface="+mj-lt"/>
+              <a:buAutoNum type="arabicPeriod"/>
+              <a:defRPr sz="1600" b="1">
+                <a:solidFill>
+                  <a:srgbClr val="1E293B"/>
+                </a:solidFill>
+                <a:latin typeface="Georgia"/>
+              </a:defRPr>
+            </a:pPr>
+            <a:r>
+              <a:rPr lang="fr-FR" sz="1600" dirty="0">
+                <a:solidFill>
+                  <a:schemeClr val="tx1"/>
+                </a:solidFill>
+              </a:rPr>
+              <a:t>Feature Engineering, Encodage &amp; Normalisation</a:t>
+            </a:r>
+          </a:p>
+          <a:p>
+            <a:pPr marL="228600" indent="-228600">
+              <a:spcAft>
+                <a:spcPts val="1000"/>
+              </a:spcAft>
+              <a:buFont typeface="+mj-lt"/>
+              <a:buAutoNum type="arabicPeriod"/>
+              <a:defRPr sz="1600" b="1">
+                <a:solidFill>
+                  <a:srgbClr val="1E293B"/>
+                </a:solidFill>
+                <a:latin typeface="Georgia"/>
+              </a:defRPr>
+            </a:pPr>
+            <a:r>
+              <a:rPr lang="fr-FR" sz="1600" dirty="0">
+                <a:solidFill>
+                  <a:schemeClr val="tx1"/>
+                </a:solidFill>
+              </a:rPr>
+              <a:t>Validation croisée &amp; Entraînement des modèles</a:t>
+            </a:r>
+          </a:p>
+          <a:p>
+            <a:pPr marL="228600" indent="-228600">
+              <a:spcAft>
+                <a:spcPts val="1000"/>
+              </a:spcAft>
+              <a:buFont typeface="+mj-lt"/>
+              <a:buAutoNum type="arabicPeriod"/>
+              <a:defRPr sz="1600" b="1">
+                <a:solidFill>
+                  <a:srgbClr val="1E293B"/>
+                </a:solidFill>
+                <a:latin typeface="Georgia"/>
+              </a:defRPr>
+            </a:pPr>
+            <a:r>
+              <a:rPr lang="fr-FR" sz="1600" dirty="0">
+                <a:solidFill>
+                  <a:schemeClr val="tx1"/>
+                </a:solidFill>
+              </a:rPr>
+              <a:t>Scores et interprétation</a:t>
+            </a:r>
+          </a:p>
+          <a:p>
+            <a:pPr marL="228600" indent="-228600">
+              <a:spcAft>
+                <a:spcPts val="1000"/>
+              </a:spcAft>
+              <a:buFont typeface="+mj-lt"/>
+              <a:buAutoNum type="arabicPeriod"/>
+              <a:defRPr sz="1600" b="1">
+                <a:solidFill>
+                  <a:srgbClr val="1E293B"/>
+                </a:solidFill>
+                <a:latin typeface="Georgia"/>
+              </a:defRPr>
+            </a:pPr>
+            <a:r>
+              <a:rPr lang="fr-FR" sz="1600" dirty="0">
+                <a:solidFill>
+                  <a:schemeClr val="tx1"/>
+                </a:solidFill>
+              </a:rPr>
+              <a:t>Optimisation du meilleur modèle (</a:t>
+            </a:r>
+            <a:r>
+              <a:rPr lang="fr-FR" sz="1600" dirty="0" err="1">
+                <a:solidFill>
+                  <a:schemeClr val="tx1"/>
+                </a:solidFill>
+              </a:rPr>
+              <a:t>Grid</a:t>
+            </a:r>
+            <a:r>
+              <a:rPr lang="fr-FR" sz="1600" dirty="0">
+                <a:solidFill>
+                  <a:schemeClr val="tx1"/>
+                </a:solidFill>
+              </a:rPr>
+              <a:t> </a:t>
+            </a:r>
+            <a:r>
+              <a:rPr lang="fr-FR" sz="1600" dirty="0" err="1">
+                <a:solidFill>
+                  <a:schemeClr val="tx1"/>
+                </a:solidFill>
+              </a:rPr>
+              <a:t>Search</a:t>
+            </a:r>
+            <a:r>
+              <a:rPr lang="fr-FR" sz="1600" dirty="0">
+                <a:solidFill>
+                  <a:schemeClr val="tx1"/>
+                </a:solidFill>
+              </a:rPr>
+              <a:t>)</a:t>
+            </a:r>
+          </a:p>
+          <a:p>
+            <a:pPr marL="228600" indent="-228600">
+              <a:spcAft>
+                <a:spcPts val="1000"/>
+              </a:spcAft>
+              <a:buFont typeface="+mj-lt"/>
+              <a:buAutoNum type="arabicPeriod"/>
+              <a:defRPr sz="1600" b="1">
+                <a:solidFill>
+                  <a:srgbClr val="1E293B"/>
+                </a:solidFill>
+                <a:latin typeface="Georgia"/>
+              </a:defRPr>
+            </a:pPr>
+            <a:r>
+              <a:rPr lang="fr-FR" sz="1600" dirty="0">
+                <a:solidFill>
+                  <a:schemeClr val="tx1"/>
+                </a:solidFill>
+              </a:rPr>
+              <a:t>Nouveaux Scores et Feature importance</a:t>
+            </a:r>
+          </a:p>
+          <a:p>
+            <a:pPr marL="228600" indent="-228600">
+              <a:spcAft>
+                <a:spcPts val="1000"/>
+              </a:spcAft>
+              <a:buFont typeface="+mj-lt"/>
+              <a:buAutoNum type="arabicPeriod"/>
+              <a:defRPr sz="1600" b="1">
+                <a:solidFill>
+                  <a:srgbClr val="1E293B"/>
+                </a:solidFill>
+                <a:latin typeface="Georgia"/>
+              </a:defRPr>
+            </a:pPr>
+            <a:r>
+              <a:rPr lang="fr-FR" sz="1600" dirty="0">
+                <a:solidFill>
+                  <a:schemeClr val="tx1"/>
+                </a:solidFill>
+              </a:rPr>
+              <a:t>Choix du modèle a déployer</a:t>
+            </a:r>
+          </a:p>
+          <a:p>
+            <a:pPr marL="228600" indent="-228600">
+              <a:spcAft>
+                <a:spcPts val="1000"/>
+              </a:spcAft>
+              <a:buFont typeface="+mj-lt"/>
+              <a:buAutoNum type="arabicPeriod"/>
+              <a:defRPr sz="1600" b="1">
+                <a:solidFill>
+                  <a:srgbClr val="1E293B"/>
+                </a:solidFill>
+                <a:latin typeface="Georgia"/>
+              </a:defRPr>
+            </a:pPr>
+            <a:endParaRPr lang="fr-FR" sz="1600" dirty="0">
+              <a:solidFill>
+                <a:schemeClr val="tx1"/>
+              </a:solidFill>
+            </a:endParaRPr>
+          </a:p>
+          <a:p>
+            <a:pPr marL="228600" indent="-228600">
+              <a:spcAft>
+                <a:spcPts val="1000"/>
+              </a:spcAft>
+              <a:buFont typeface="+mj-lt"/>
+              <a:buAutoNum type="arabicPeriod"/>
+              <a:defRPr sz="1600" b="1">
+                <a:solidFill>
+                  <a:srgbClr val="1E293B"/>
+                </a:solidFill>
+                <a:latin typeface="Georgia"/>
+              </a:defRPr>
+            </a:pPr>
+            <a:endParaRPr lang="fr-FR" sz="1600" dirty="0">
+              <a:solidFill>
+                <a:schemeClr val="tx1"/>
+              </a:solidFill>
+            </a:endParaRPr>
+          </a:p>
+          <a:p>
+            <a:pPr marL="228600" indent="-228600">
+              <a:spcAft>
+                <a:spcPts val="1000"/>
+              </a:spcAft>
+              <a:buFont typeface="+mj-lt"/>
+              <a:buAutoNum type="arabicPeriod"/>
+              <a:defRPr sz="1600" b="1">
+                <a:solidFill>
+                  <a:srgbClr val="1E293B"/>
+                </a:solidFill>
+                <a:latin typeface="Georgia"/>
+              </a:defRPr>
+            </a:pPr>
+            <a:endParaRPr lang="fr-FR" sz="1400" dirty="0">
+              <a:solidFill>
+                <a:schemeClr val="tx1"/>
+              </a:solidFill>
+            </a:endParaRPr>
+          </a:p>
+          <a:p>
+            <a:pPr>
+              <a:spcAft>
+                <a:spcPts val="1000"/>
+              </a:spcAft>
+              <a:defRPr sz="1600" b="1">
+                <a:solidFill>
+                  <a:srgbClr val="1E293B"/>
+                </a:solidFill>
+                <a:latin typeface="Georgia"/>
+              </a:defRPr>
+            </a:pPr>
+            <a:endParaRPr lang="fr-FR" sz="1400" dirty="0">
+              <a:solidFill>
+                <a:schemeClr val="tx1"/>
+              </a:solidFill>
+            </a:endParaRPr>
+          </a:p>
+          <a:p>
+            <a:pPr>
+              <a:lnSpc>
+                <a:spcPct val="150000"/>
+              </a:lnSpc>
+              <a:spcAft>
+                <a:spcPts val="1000"/>
+              </a:spcAft>
+              <a:defRPr sz="1600" b="1">
+                <a:solidFill>
+                  <a:srgbClr val="1E293B"/>
+                </a:solidFill>
+                <a:latin typeface="Georgia"/>
+              </a:defRPr>
+            </a:pPr>
+            <a:endParaRPr lang="fr-FR" sz="1400" dirty="0">
+              <a:solidFill>
+                <a:schemeClr val="tx1"/>
+              </a:solidFill>
+            </a:endParaRPr>
+          </a:p>
+        </p:txBody>
+      </p:sp>
+    </p:spTree>
+    <p:extLst>
+      <p:ext uri="{BB962C8B-B14F-4D97-AF65-F5344CB8AC3E}">
+        <p14:creationId xmlns:p14="http://schemas.microsoft.com/office/powerpoint/2010/main" val="3500517614"/>
+      </p:ext>
+    </p:extLst>
+  </p:cSld>
+  <p:clrMapOvr>
+    <a:masterClrMapping/>
+  </p:clrMapOvr>
+</p:sld>
+</file>
+
+<file path=ppt/slides/slide3.xml><?xml version="1.0" encoding="utf-8"?>
+<p:sld xmlns:a="http://schemas.openxmlformats.org/drawingml/2006/main" xmlns:r="http://schemas.openxmlformats.org/officeDocument/2006/relationships" xmlns:p="http://schemas.openxmlformats.org/presentationml/2006/main">
+  <p:cSld>
+    <p:bg>
+      <p:bgPr>
+        <a:solidFill>
+          <a:srgbClr val="FAFAFC"/>
+        </a:solidFill>
+        <a:effectLst/>
+      </p:bgPr>
+    </p:bg>
+    <p:spTree>
+      <p:nvGrpSpPr>
+        <p:cNvPr id="1" name=""/>
+        <p:cNvGrpSpPr/>
+        <p:nvPr/>
+      </p:nvGrpSpPr>
+      <p:grpSpPr>
+        <a:xfrm>
+          <a:off x="0" y="0"/>
+          <a:ext cx="0" cy="0"/>
+          <a:chOff x="0" y="0"/>
+          <a:chExt cx="0" cy="0"/>
+        </a:xfrm>
+      </p:grpSpPr>
+      <p:pic>
+        <p:nvPicPr>
+          <p:cNvPr id="5" name="Image 4">
+            <a:extLst>
+              <a:ext uri="{FF2B5EF4-FFF2-40B4-BE49-F238E27FC236}">
+                <a16:creationId xmlns:a16="http://schemas.microsoft.com/office/drawing/2014/main" id="{5F8FEC10-CDF4-D4D8-7978-25DC3771D8F4}"/>
+              </a:ext>
+            </a:extLst>
+          </p:cNvPr>
+          <p:cNvPicPr>
+            <a:picLocks noChangeAspect="1"/>
+          </p:cNvPicPr>
+          <p:nvPr/>
+        </p:nvPicPr>
+        <p:blipFill>
+          <a:blip r:embed="rId2"/>
+          <a:stretch>
+            <a:fillRect/>
+          </a:stretch>
+        </p:blipFill>
+        <p:spPr>
+          <a:xfrm>
+            <a:off x="-858366" y="331296"/>
+            <a:ext cx="13908423" cy="7593918"/>
+          </a:xfrm>
+          <a:prstGeom prst="rect">
+            <a:avLst/>
+          </a:prstGeom>
+        </p:spPr>
+      </p:pic>
+      <p:sp>
+        <p:nvSpPr>
+          <p:cNvPr id="2" name="Rectangle 1"/>
+          <p:cNvSpPr/>
+          <p:nvPr/>
+        </p:nvSpPr>
+        <p:spPr>
+          <a:xfrm>
+            <a:off x="0" y="0"/>
+            <a:ext cx="12191695" cy="1371600"/>
+          </a:xfrm>
+          <a:prstGeom prst="rect">
+            <a:avLst/>
+          </a:prstGeom>
+          <a:ln/>
+        </p:spPr>
+        <p:style>
+          <a:lnRef idx="0">
+            <a:schemeClr val="dk1"/>
+          </a:lnRef>
+          <a:fillRef idx="3">
+            <a:schemeClr val="dk1"/>
+          </a:fillRef>
+          <a:effectRef idx="3">
+            <a:schemeClr val="dk1"/>
+          </a:effectRef>
+          <a:fontRef idx="minor">
+            <a:schemeClr val="lt1"/>
+          </a:fontRef>
+        </p:style>
+        <p:txBody>
+          <a:bodyPr rtlCol="0" anchor="ctr"/>
+          <a:lstStyle/>
+          <a:p>
+            <a:pPr algn="ctr"/>
+            <a:endParaRPr/>
+          </a:p>
+        </p:txBody>
+      </p:sp>
+      <p:sp>
+        <p:nvSpPr>
+          <p:cNvPr id="3" name="Rectangle 2"/>
+          <p:cNvSpPr/>
+          <p:nvPr/>
+        </p:nvSpPr>
+        <p:spPr>
+          <a:xfrm>
+            <a:off x="0" y="1353312"/>
+            <a:ext cx="12191695" cy="25400"/>
+          </a:xfrm>
+          <a:prstGeom prst="rect">
+            <a:avLst/>
+          </a:prstGeom>
+          <a:solidFill>
+            <a:srgbClr val="0284C7"/>
+          </a:solidFill>
+          <a:ln>
+            <a:noFill/>
+          </a:ln>
+        </p:spPr>
+        <p:style>
+          <a:lnRef idx="1">
+            <a:schemeClr val="accent1"/>
+          </a:lnRef>
+          <a:fillRef idx="3">
+            <a:schemeClr val="accent1"/>
+          </a:fillRef>
+          <a:effectRef idx="2">
+            <a:schemeClr val="accent1"/>
+          </a:effectRef>
+          <a:fontRef idx="minor">
+            <a:schemeClr val="lt1"/>
+          </a:fontRef>
+        </p:style>
+        <p:txBody>
+          <a:bodyPr rtlCol="0" anchor="ctr"/>
+          <a:lstStyle/>
+          <a:p>
+            <a:pPr algn="ctr"/>
+            <a:endParaRPr/>
+          </a:p>
+        </p:txBody>
+      </p:sp>
+      <p:sp>
+        <p:nvSpPr>
+          <p:cNvPr id="4" name="TextBox 3"/>
+          <p:cNvSpPr txBox="1"/>
+          <p:nvPr/>
+        </p:nvSpPr>
+        <p:spPr>
+          <a:xfrm>
+            <a:off x="892079" y="338512"/>
+            <a:ext cx="10407535" cy="492443"/>
+          </a:xfrm>
+          <a:prstGeom prst="rect">
+            <a:avLst/>
+          </a:prstGeom>
+          <a:noFill/>
+          <a:ln>
+            <a:noFill/>
+          </a:ln>
+        </p:spPr>
+        <p:txBody>
+          <a:bodyPr wrap="square">
+            <a:spAutoFit/>
+          </a:bodyPr>
+          <a:lstStyle/>
+          <a:p>
+            <a:pPr algn="l">
+              <a:defRPr sz="2600" b="1">
+                <a:solidFill>
+                  <a:srgbClr val="0F172A"/>
+                </a:solidFill>
+                <a:latin typeface="Georgia"/>
+              </a:defRPr>
+            </a:pPr>
+            <a:r>
+              <a:rPr lang="fr-FR" dirty="0">
+                <a:solidFill>
+                  <a:schemeClr val="bg1"/>
+                </a:solidFill>
+              </a:rPr>
+              <a:t>1 - Environnement</a:t>
+            </a:r>
+            <a:r>
+              <a:rPr dirty="0">
+                <a:solidFill>
+                  <a:schemeClr val="bg1"/>
+                </a:solidFill>
+              </a:rPr>
+              <a:t> </a:t>
+            </a:r>
+            <a:r>
+              <a:rPr lang="fr-FR" dirty="0">
+                <a:solidFill>
+                  <a:schemeClr val="bg1"/>
+                </a:solidFill>
+              </a:rPr>
               <a:t>technique et gestion documentaire</a:t>
             </a:r>
-            <a:endParaRPr dirty="0"/>
+            <a:endParaRPr dirty="0">
+              <a:solidFill>
+                <a:schemeClr val="bg1"/>
+              </a:solidFill>
+            </a:endParaRPr>
           </a:p>
         </p:txBody>
       </p:sp>
@@ -4123,7 +6545,7 @@
           <a:p>
             <a:fld id="{C1FF6DA9-008F-8B48-92A6-B652298478BF}" type="slidenum">
               <a:rPr lang="en-US" smtClean="0"/>
-              <a:t>2</a:t>
+              <a:t>3</a:t>
             </a:fld>
             <a:endParaRPr lang="en-US" dirty="0"/>
           </a:p>
@@ -4181,10 +6603,22 @@
               </a:defRPr>
             </a:pPr>
             <a:r>
-              <a:rPr lang="fr-FR" dirty="0"/>
+              <a:rPr lang="fr-FR" dirty="0">
+                <a:solidFill>
+                  <a:schemeClr val="accent1">
+                    <a:lumMod val="75000"/>
+                  </a:schemeClr>
+                </a:solidFill>
+              </a:rPr>
               <a:t>Gestion documentaire</a:t>
             </a:r>
-            <a:endParaRPr dirty="0"/>
+            <a:endParaRPr dirty="0">
+              <a:solidFill>
+                <a:schemeClr val="accent1">
+                  <a:lumMod val="75000"/>
+                </a:schemeClr>
+              </a:solidFill>
+            </a:endParaRPr>
           </a:p>
           <a:p>
             <a:pPr>
@@ -4249,23 +6683,7 @@
                   <a:srgbClr val="64748B"/>
                 </a:solidFill>
               </a:rPr>
-              <a:t>Utilisé pour stocker les datasets traités (nettoyés et prêt pour l’</a:t>
-            </a:r>
-            <a:r>
-              <a:rPr lang="fr-FR" b="0" dirty="0" err="1">
-                <a:solidFill>
-                  <a:srgbClr val="64748B"/>
-                </a:solidFill>
-              </a:rPr>
-              <a:t>entraînnement</a:t>
-            </a:r>
-            <a:r>
-              <a:rPr lang="fr-FR" b="0" dirty="0">
-                <a:solidFill>
-                  <a:srgbClr val="64748B"/>
-                </a:solidFill>
-              </a:rPr>
-              <a:t> des modèles)</a:t>
+              <a:t>Utilisé pour stocker les datasets traités (nettoyés et prêt pour l’entraînement des modèles)</a:t>
             </a:r>
             <a:r>
               <a:rPr b="0" dirty="0">
@@ -4399,10 +6817,22 @@
               </a:defRPr>
             </a:pPr>
             <a:r>
-              <a:rPr lang="fr-FR" dirty="0"/>
+              <a:rPr lang="fr-FR" dirty="0">
+                <a:solidFill>
+                  <a:schemeClr val="accent2">
+                    <a:lumMod val="75000"/>
+                  </a:schemeClr>
+                </a:solidFill>
+              </a:rPr>
               <a:t>Environnement Technique</a:t>
             </a:r>
-            <a:endParaRPr dirty="0"/>
+            <a:endParaRPr dirty="0">
+              <a:solidFill>
+                <a:schemeClr val="accent2">
+                  <a:lumMod val="75000"/>
+                </a:schemeClr>
+              </a:solidFill>
+            </a:endParaRPr>
           </a:p>
           <a:p>
             <a:pPr>
@@ -4430,15 +6860,7 @@
                   <a:srgbClr val="64748B"/>
                 </a:solidFill>
               </a:rPr>
-              <a:t>Utilisé travailler sur les documents de prototypage des </a:t>
-            </a:r>
-            <a:r>
-              <a:rPr lang="fr-FR" b="0" dirty="0" err="1">
-                <a:solidFill>
-                  <a:srgbClr val="64748B"/>
-                </a:solidFill>
-              </a:rPr>
-              <a:t>modeles</a:t>
+              <a:t>Utilisé travailler sur les documents de prototypage des modèles</a:t>
             </a:r>
             <a:r>
               <a:rPr lang="fr-FR" dirty="0">
@@ -4542,10 +6964,22 @@
               </a:defRPr>
             </a:pPr>
             <a:r>
-              <a:rPr lang="fr-FR" dirty="0"/>
+              <a:rPr lang="fr-FR" dirty="0">
+                <a:solidFill>
+                  <a:schemeClr val="accent6">
+                    <a:lumMod val="75000"/>
+                  </a:schemeClr>
+                </a:solidFill>
+              </a:rPr>
               <a:t>GIT Hub &lt;&gt; VS Code </a:t>
             </a:r>
-            <a:endParaRPr dirty="0"/>
+            <a:endParaRPr dirty="0">
+              <a:solidFill>
+                <a:schemeClr val="accent6">
+                  <a:lumMod val="75000"/>
+                </a:schemeClr>
+              </a:solidFill>
+            </a:endParaRPr>
           </a:p>
           <a:p>
             <a:pPr>
@@ -4627,12 +7061,20 @@
               </a:defRPr>
             </a:pPr>
             <a:r>
-              <a:rPr lang="fr-FR" dirty="0"/>
+              <a:rPr lang="fr-FR" dirty="0">
+                <a:solidFill>
+                  <a:schemeClr val="accent3">
+                    <a:lumMod val="75000"/>
+                  </a:schemeClr>
+                </a:solidFill>
+              </a:rPr>
               <a:t>Code et prototypage</a:t>
             </a:r>
             <a:endParaRPr b="0" dirty="0">
               <a:solidFill>
-                <a:srgbClr val="64748B"/>
+                <a:schemeClr val="accent3">
+                  <a:lumMod val="75000"/>
+                </a:schemeClr>
               </a:solidFill>
             </a:endParaRPr>
           </a:p>
@@ -4662,23 +7104,7 @@
                   <a:srgbClr val="64748B"/>
                 </a:solidFill>
               </a:rPr>
-              <a:t>Utilisé Document dans lequel se trouvent les algorithmes de </a:t>
-            </a:r>
-            <a:r>
-              <a:rPr lang="fr-FR" b="0" dirty="0" err="1">
-                <a:solidFill>
-                  <a:srgbClr val="64748B"/>
-                </a:solidFill>
-              </a:rPr>
-              <a:t>nottoyage</a:t>
-            </a:r>
-            <a:r>
-              <a:rPr lang="fr-FR" b="0" dirty="0">
-                <a:solidFill>
-                  <a:srgbClr val="64748B"/>
-                </a:solidFill>
-              </a:rPr>
-              <a:t> et la création de la première Feature (FE1)</a:t>
+              <a:t> Document dans lequel se trouvent les algorithmes de nettoyage et la création de la première Feature (FE1)</a:t>
             </a:r>
           </a:p>
           <a:p>
@@ -4742,7 +7168,7 @@
 </p:sld>
 </file>
 
-<file path=ppt/slides/slide3.xml><?xml version="1.0" encoding="utf-8"?>
+<file path=ppt/slides/slide4.xml><?xml version="1.0" encoding="utf-8"?>
 <p:sld xmlns:a="http://schemas.openxmlformats.org/drawingml/2006/main" xmlns:r="http://schemas.openxmlformats.org/officeDocument/2006/relationships" xmlns:p="http://schemas.openxmlformats.org/presentationml/2006/main">
   <p:cSld>
     <p:bg>
@@ -4773,6 +7199,36 @@
           <a:chExt cx="0" cy="0"/>
         </a:xfrm>
       </p:grpSpPr>
+      <p:pic>
+        <p:nvPicPr>
+          <p:cNvPr id="5" name="Image 4">
+            <a:extLst>
+              <a:ext uri="{FF2B5EF4-FFF2-40B4-BE49-F238E27FC236}">
+                <a16:creationId xmlns:a16="http://schemas.microsoft.com/office/drawing/2014/main" id="{8E7265C7-7A91-F4E3-CEB3-F1122BE18A82}"/>
+              </a:ext>
+            </a:extLst>
+          </p:cNvPr>
+          <p:cNvPicPr>
+            <a:picLocks noChangeAspect="1"/>
+          </p:cNvPicPr>
+          <p:nvPr/>
+        </p:nvPicPr>
+        <p:blipFill>
+          <a:blip r:embed="rId2"/>
+          <a:stretch>
+            <a:fillRect/>
+          </a:stretch>
+        </p:blipFill>
+        <p:spPr>
+          <a:xfrm>
+            <a:off x="-872653" y="207965"/>
+            <a:ext cx="13908423" cy="7593918"/>
+          </a:xfrm>
+          <a:prstGeom prst="rect">
+            <a:avLst/>
+          </a:prstGeom>
+        </p:spPr>
+      </p:pic>
       <p:sp>
         <p:nvSpPr>
           <p:cNvPr id="2" name="Rectangle 1">
@@ -4793,22 +7249,17 @@
           <a:prstGeom prst="rect">
             <a:avLst/>
           </a:prstGeom>
-          <a:solidFill>
-            <a:srgbClr val="FFFFFF"/>
-          </a:solidFill>
-          <a:ln>
-            <a:noFill/>
-          </a:ln>
+          <a:ln/>
         </p:spPr>
         <p:style>
-          <a:lnRef idx="1">
-            <a:schemeClr val="accent1"/>
+          <a:lnRef idx="0">
+            <a:schemeClr val="dk1"/>
           </a:lnRef>
           <a:fillRef idx="3">
-            <a:schemeClr val="accent1"/>
+            <a:schemeClr val="dk1"/>
           </a:fillRef>
-          <a:effectRef idx="2">
-            <a:schemeClr val="accent1"/>
+          <a:effectRef idx="3">
+            <a:schemeClr val="dk1"/>
           </a:effectRef>
           <a:fontRef idx="minor">
             <a:schemeClr val="lt1"/>
@@ -4910,18 +7361,34 @@
               </a:defRPr>
             </a:pPr>
             <a:r>
-              <a:rPr lang="fr-FR" dirty="0"/>
-              <a:t>Audit du </a:t>
-            </a:r>
-            <a:r>
-              <a:rPr lang="fr-FR" dirty="0" err="1"/>
+              <a:rPr lang="fr-FR" dirty="0">
+                <a:solidFill>
+                  <a:schemeClr val="bg1"/>
+                </a:solidFill>
+              </a:rPr>
+              <a:t>2 - Audit du </a:t>
+            </a:r>
+            <a:r>
+              <a:rPr lang="fr-FR" dirty="0" err="1">
+                <a:solidFill>
+                  <a:schemeClr val="bg1"/>
+                </a:solidFill>
+              </a:rPr>
               <a:t>DataSet</a:t>
             </a:r>
             <a:r>
-              <a:rPr lang="fr-FR" dirty="0"/>
+              <a:rPr lang="fr-FR" dirty="0">
+                <a:solidFill>
+                  <a:schemeClr val="bg1"/>
+                </a:solidFill>
+              </a:rPr>
               <a:t> &amp; Nettoyage des données</a:t>
             </a:r>
-            <a:endParaRPr dirty="0"/>
+            <a:endParaRPr dirty="0">
+              <a:solidFill>
+                <a:schemeClr val="bg1"/>
+              </a:solidFill>
+            </a:endParaRPr>
           </a:p>
         </p:txBody>
       </p:sp>
@@ -4976,9 +7443,9 @@
           <a:p>
             <a:fld id="{C1FF6DA9-008F-8B48-92A6-B652298478BF}" type="slidenum">
               <a:rPr lang="en-US" smtClean="0"/>
-              <a:t>3</a:t>
+              <a:t>4</a:t>
             </a:fld>
-            <a:endParaRPr lang="en-US"/>
+            <a:endParaRPr lang="en-US" dirty="0"/>
           </a:p>
         </p:txBody>
       </p:sp>
@@ -4996,30 +7463,37 @@
         </p:nvSpPr>
         <p:spPr>
           <a:xfrm>
-            <a:off x="472440" y="5504688"/>
-            <a:ext cx="5303520" cy="704273"/>
+            <a:off x="6096000" y="5633421"/>
+            <a:ext cx="5726544" cy="704272"/>
           </a:xfrm>
           <a:prstGeom prst="roundRect">
             <a:avLst/>
           </a:prstGeom>
           <a:solidFill>
-            <a:srgbClr val="CCFBF1"/>
+            <a:schemeClr val="accent3">
+              <a:lumMod val="40000"/>
+              <a:lumOff val="60000"/>
+            </a:schemeClr>
           </a:solidFill>
-          <a:ln w="12700">
+          <a:ln w="28575">
             <a:solidFill>
-              <a:srgbClr val="0D9488"/>
+              <a:schemeClr val="accent3">
+                <a:lumMod val="50000"/>
+              </a:schemeClr>
             </a:solidFill>
           </a:ln>
         </p:spPr>
         <p:style>
-          <a:lnRef idx="1">
-            <a:schemeClr val="accent1"/>
+          <a:lnRef idx="2">
+            <a:schemeClr val="accent3">
+              <a:shade val="15000"/>
+            </a:schemeClr>
           </a:lnRef>
-          <a:fillRef idx="3">
-            <a:schemeClr val="accent1"/>
+          <a:fillRef idx="1">
+            <a:schemeClr val="accent3"/>
           </a:fillRef>
-          <a:effectRef idx="2">
-            <a:schemeClr val="accent1"/>
+          <a:effectRef idx="0">
+            <a:schemeClr val="accent3"/>
           </a:effectRef>
           <a:fontRef idx="minor">
             <a:schemeClr val="lt1"/>
@@ -5029,7 +7503,7 @@
           <a:bodyPr wrap="square" lIns="228600" tIns="228600" rtlCol="0" anchor="t"/>
           <a:lstStyle/>
           <a:p>
-            <a:pPr algn="ctr">
+            <a:pPr>
               <a:spcAft>
                 <a:spcPts val="400"/>
               </a:spcAft>
@@ -5042,19 +7516,31 @@
             </a:pPr>
             <a:r>
               <a:rPr lang="fr-FR" dirty="0"/>
-              <a:t>Définition de la </a:t>
+              <a:t>Définition de la v</a:t>
+            </a:r>
+            <a:r>
+              <a:rPr dirty="0" err="1"/>
+              <a:t>ariable</a:t>
             </a:r>
             <a:r>
               <a:rPr dirty="0"/>
-              <a:t>Variable </a:t>
+              <a:t> </a:t>
+            </a:r>
+            <a:r>
+              <a:rPr lang="fr-FR" dirty="0"/>
+              <a:t>c</a:t>
             </a:r>
             <a:r>
               <a:rPr dirty="0" err="1"/>
-              <a:t>Cible</a:t>
+              <a:t>ible</a:t>
             </a:r>
             <a:r>
               <a:rPr dirty="0"/>
-              <a:t> (</a:t>
+              <a:t> </a:t>
+            </a:r>
+            <a:r>
+              <a:rPr lang="fr-FR" dirty="0"/>
+              <a:t> :  </a:t>
             </a:r>
             <a:r>
               <a:rPr dirty="0" err="1"/>
@@ -5064,11 +7550,6 @@
               <a:rPr lang="fr-FR" dirty="0"/>
               <a:t>e</a:t>
             </a:r>
-            <a:r>
-              <a:rPr dirty="0"/>
-              <a:t>)</a:t>
-            </a:r>
-            <a:endParaRPr lang="fr-FR" dirty="0"/>
           </a:p>
         </p:txBody>
       </p:sp>
@@ -5086,8 +7567,8 @@
         </p:nvSpPr>
         <p:spPr>
           <a:xfrm>
-            <a:off x="472440" y="1693949"/>
-            <a:ext cx="5303520" cy="3467794"/>
+            <a:off x="472440" y="1693948"/>
+            <a:ext cx="5303520" cy="4643745"/>
           </a:xfrm>
           <a:prstGeom prst="roundRect">
             <a:avLst/>
@@ -5124,10 +7605,22 @@
               </a:defRPr>
             </a:pPr>
             <a:r>
-              <a:rPr lang="fr-FR" dirty="0"/>
+              <a:rPr lang="fr-FR" dirty="0">
+                <a:solidFill>
+                  <a:schemeClr val="accent2">
+                    <a:lumMod val="75000"/>
+                  </a:schemeClr>
+                </a:solidFill>
+              </a:rPr>
               <a:t>Audit du dataset d’origine </a:t>
             </a:r>
-            <a:endParaRPr dirty="0"/>
+            <a:endParaRPr dirty="0">
+              <a:solidFill>
+                <a:schemeClr val="accent2">
+                  <a:lumMod val="75000"/>
+                </a:schemeClr>
+              </a:solidFill>
+            </a:endParaRPr>
           </a:p>
           <a:p>
             <a:pPr>
@@ -5143,36 +7636,102 @@
             </a:pPr>
             <a:r>
               <a:rPr lang="fr-FR" dirty="0"/>
-              <a:t>VS code </a:t>
+              <a:t>Dimensions </a:t>
             </a:r>
             <a:r>
               <a:rPr dirty="0"/>
               <a:t>: </a:t>
             </a:r>
+            <a:endParaRPr lang="fr-FR" dirty="0"/>
+          </a:p>
+          <a:p>
+            <a:pPr>
+              <a:spcAft>
+                <a:spcPts val="800"/>
+              </a:spcAft>
+              <a:defRPr sz="1200" b="1">
+                <a:solidFill>
+                  <a:srgbClr val="1E293B"/>
+                </a:solidFill>
+                <a:latin typeface="Verdana"/>
+              </a:defRPr>
+            </a:pPr>
             <a:r>
               <a:rPr lang="fr-FR" b="0" dirty="0">
                 <a:solidFill>
                   <a:srgbClr val="64748B"/>
                 </a:solidFill>
               </a:rPr>
-              <a:t>Utilisé travailler sur les documents de prototypage des </a:t>
-            </a:r>
-            <a:r>
-              <a:rPr lang="fr-FR" b="0" dirty="0" err="1">
+              <a:t>Les dimensions permettent de savoir quel est le volume total du dataset (nombre de lignes et nombre de colonnes)</a:t>
+            </a:r>
+            <a:r>
+              <a:rPr lang="fr-FR" dirty="0">
                 <a:solidFill>
                   <a:srgbClr val="64748B"/>
                 </a:solidFill>
               </a:rPr>
-              <a:t>modeles</a:t>
-            </a:r>
-            <a:r>
-              <a:rPr lang="fr-FR" dirty="0">
-                <a:solidFill>
-                  <a:srgbClr val="64748B"/>
-                </a:solidFill>
-              </a:rPr>
-              <a:t>.</a:t>
-            </a:r>
+              <a:t>. </a:t>
+            </a:r>
+            <a:r>
+              <a:rPr lang="fr-FR" sz="1100" b="1" dirty="0">
+                <a:solidFill>
+                  <a:srgbClr val="1E293B"/>
+                </a:solidFill>
+                <a:latin typeface="Arial" panose="020B0604020202020204" pitchFamily="34" charset="0"/>
+                <a:cs typeface="Arial" panose="020B0604020202020204" pitchFamily="34" charset="0"/>
+              </a:rPr>
+              <a:t>3376 </a:t>
+            </a:r>
+            <a:r>
+              <a:rPr lang="fr-FR" sz="1100" b="1" dirty="0" err="1">
+                <a:solidFill>
+                  <a:srgbClr val="1E293B"/>
+                </a:solidFill>
+                <a:latin typeface="Arial" panose="020B0604020202020204" pitchFamily="34" charset="0"/>
+                <a:cs typeface="Arial" panose="020B0604020202020204" pitchFamily="34" charset="0"/>
+              </a:rPr>
+              <a:t>rows</a:t>
+            </a:r>
+            <a:r>
+              <a:rPr lang="fr-FR" sz="1100" b="1" dirty="0">
+                <a:solidFill>
+                  <a:srgbClr val="1E293B"/>
+                </a:solidFill>
+                <a:latin typeface="Arial" panose="020B0604020202020204" pitchFamily="34" charset="0"/>
+                <a:cs typeface="Arial" panose="020B0604020202020204" pitchFamily="34" charset="0"/>
+              </a:rPr>
+              <a:t> × 46 </a:t>
+            </a:r>
+            <a:r>
+              <a:rPr lang="fr-FR" sz="1100" b="1" dirty="0" err="1">
+                <a:solidFill>
+                  <a:srgbClr val="1E293B"/>
+                </a:solidFill>
+                <a:latin typeface="Arial" panose="020B0604020202020204" pitchFamily="34" charset="0"/>
+                <a:cs typeface="Arial" panose="020B0604020202020204" pitchFamily="34" charset="0"/>
+              </a:rPr>
+              <a:t>columns</a:t>
+            </a:r>
+            <a:endParaRPr lang="fr-FR" sz="1100" b="1" dirty="0">
+              <a:solidFill>
+                <a:srgbClr val="1E293B"/>
+              </a:solidFill>
+              <a:latin typeface="Arial" panose="020B0604020202020204" pitchFamily="34" charset="0"/>
+              <a:cs typeface="Arial" panose="020B0604020202020204" pitchFamily="34" charset="0"/>
+            </a:endParaRPr>
+          </a:p>
+          <a:p>
+            <a:pPr>
+              <a:spcAft>
+                <a:spcPts val="800"/>
+              </a:spcAft>
+              <a:defRPr sz="1200" b="1">
+                <a:solidFill>
+                  <a:srgbClr val="1E293B"/>
+                </a:solidFill>
+                <a:latin typeface="Verdana"/>
+              </a:defRPr>
+            </a:pPr>
             <a:endParaRPr b="0" dirty="0">
               <a:solidFill>
                 <a:srgbClr val="64748B"/>
@@ -5193,20 +7752,150 @@
             </a:pPr>
             <a:r>
               <a:rPr lang="fr-FR" dirty="0"/>
-              <a:t>Git hub</a:t>
+              <a:t>Types de variables</a:t>
             </a:r>
             <a:r>
               <a:rPr dirty="0"/>
               <a:t>: </a:t>
             </a:r>
+            <a:endParaRPr lang="fr-FR" dirty="0"/>
+          </a:p>
+          <a:p>
+            <a:pPr>
+              <a:spcAft>
+                <a:spcPts val="800"/>
+              </a:spcAft>
+              <a:defRPr sz="1200" b="1">
+                <a:solidFill>
+                  <a:srgbClr val="1E293B"/>
+                </a:solidFill>
+                <a:latin typeface="Verdana"/>
+              </a:defRPr>
+            </a:pPr>
             <a:r>
               <a:rPr lang="fr-FR" b="0" dirty="0">
                 <a:solidFill>
                   <a:srgbClr val="64748B"/>
                 </a:solidFill>
               </a:rPr>
-              <a:t>Utilisé pour héberger les documents (datasets et documents de prototypage) sur une plateforme partagée en ligne. </a:t>
-            </a:r>
+              <a:t>Identification des différents types de variables (notamment les variables numériques et catégories).</a:t>
+            </a:r>
+          </a:p>
+          <a:p>
+            <a:pPr>
+              <a:spcAft>
+                <a:spcPts val="800"/>
+              </a:spcAft>
+              <a:defRPr sz="1200" b="1">
+                <a:solidFill>
+                  <a:srgbClr val="1E293B"/>
+                </a:solidFill>
+                <a:latin typeface="Verdana"/>
+              </a:defRPr>
+            </a:pPr>
+            <a:r>
+              <a:rPr lang="fr-FR" b="0" dirty="0">
+                <a:solidFill>
+                  <a:srgbClr val="64748B"/>
+                </a:solidFill>
+              </a:rPr>
+              <a:t>Si ce sont des catégories , il faut aussi vérifier qu’elles ne soient pas ordinales.</a:t>
+            </a:r>
+          </a:p>
+          <a:p>
+            <a:pPr>
+              <a:spcAft>
+                <a:spcPts val="800"/>
+              </a:spcAft>
+              <a:defRPr sz="1200" b="1">
+                <a:solidFill>
+                  <a:srgbClr val="1E293B"/>
+                </a:solidFill>
+                <a:latin typeface="Verdana"/>
+              </a:defRPr>
+            </a:pPr>
+            <a:endParaRPr lang="fr-FR" b="0" dirty="0">
+              <a:solidFill>
+                <a:srgbClr val="64748B"/>
+              </a:solidFill>
+            </a:endParaRPr>
+          </a:p>
+          <a:p>
+            <a:pPr>
+              <a:spcAft>
+                <a:spcPts val="800"/>
+              </a:spcAft>
+              <a:defRPr sz="1200" b="1">
+                <a:solidFill>
+                  <a:srgbClr val="1E293B"/>
+                </a:solidFill>
+                <a:latin typeface="Verdana"/>
+              </a:defRPr>
+            </a:pPr>
+            <a:r>
+              <a:rPr lang="fr-FR" dirty="0"/>
+              <a:t>Identification des </a:t>
+            </a:r>
+            <a:r>
+              <a:rPr lang="fr-FR" dirty="0" err="1"/>
+              <a:t>nulls</a:t>
+            </a:r>
+            <a:r>
+              <a:rPr lang="fr-FR" dirty="0"/>
+              <a:t> et valeurs aberrantes:</a:t>
+            </a:r>
+          </a:p>
+          <a:p>
+            <a:pPr>
+              <a:spcAft>
+                <a:spcPts val="800"/>
+              </a:spcAft>
+              <a:defRPr sz="1200" b="1">
+                <a:solidFill>
+                  <a:srgbClr val="1E293B"/>
+                </a:solidFill>
+                <a:latin typeface="Verdana"/>
+              </a:defRPr>
+            </a:pPr>
+            <a:r>
+              <a:rPr lang="fr-FR" b="0" dirty="0">
+                <a:solidFill>
+                  <a:srgbClr val="64748B"/>
+                </a:solidFill>
+              </a:rPr>
+              <a:t>Les valeurs nulles (vides) ou valeurs qui sortent de l’ordinaire sont a identifier en prévision d’un traitement</a:t>
+            </a:r>
+          </a:p>
+          <a:p>
+            <a:pPr>
+              <a:spcAft>
+                <a:spcPts val="800"/>
+              </a:spcAft>
+              <a:defRPr sz="1200" b="1">
+                <a:solidFill>
+                  <a:srgbClr val="1E293B"/>
+                </a:solidFill>
+                <a:latin typeface="Verdana"/>
+              </a:defRPr>
+            </a:pPr>
+            <a:endParaRPr lang="fr-FR" b="0" dirty="0">
+              <a:solidFill>
+                <a:srgbClr val="64748B"/>
+              </a:solidFill>
+            </a:endParaRPr>
+          </a:p>
+          <a:p>
+            <a:pPr>
+              <a:spcAft>
+                <a:spcPts val="800"/>
+              </a:spcAft>
+              <a:defRPr sz="1200" b="1">
+                <a:solidFill>
+                  <a:srgbClr val="1E293B"/>
+                </a:solidFill>
+                <a:latin typeface="Verdana"/>
+              </a:defRPr>
+            </a:pPr>
             <a:endParaRPr b="0" dirty="0">
               <a:solidFill>
                 <a:srgbClr val="64748B"/>
@@ -5229,8 +7918,8 @@
         </p:nvSpPr>
         <p:spPr>
           <a:xfrm>
-            <a:off x="6096000" y="1691640"/>
-            <a:ext cx="5726544" cy="4517321"/>
+            <a:off x="6096000" y="1691641"/>
+            <a:ext cx="5726544" cy="3813048"/>
           </a:xfrm>
           <a:prstGeom prst="roundRect">
             <a:avLst/>
@@ -5239,13 +7928,13 @@
         </p:spPr>
         <p:style>
           <a:lnRef idx="2">
-            <a:schemeClr val="accent2"/>
+            <a:schemeClr val="accent3"/>
           </a:lnRef>
           <a:fillRef idx="1">
             <a:schemeClr val="lt1"/>
           </a:fillRef>
           <a:effectRef idx="0">
-            <a:schemeClr val="accent2"/>
+            <a:schemeClr val="accent3"/>
           </a:effectRef>
           <a:fontRef idx="minor">
             <a:schemeClr val="dk1"/>
@@ -5267,10 +7956,22 @@
               </a:defRPr>
             </a:pPr>
             <a:r>
-              <a:rPr lang="fr-FR" dirty="0"/>
+              <a:rPr lang="fr-FR" dirty="0">
+                <a:solidFill>
+                  <a:schemeClr val="accent3">
+                    <a:lumMod val="75000"/>
+                  </a:schemeClr>
+                </a:solidFill>
+              </a:rPr>
               <a:t>Création d’un dataset « allégé »</a:t>
             </a:r>
-            <a:endParaRPr dirty="0"/>
+            <a:endParaRPr dirty="0">
+              <a:solidFill>
+                <a:schemeClr val="accent3">
+                  <a:lumMod val="75000"/>
+                </a:schemeClr>
+              </a:solidFill>
+            </a:endParaRPr>
           </a:p>
           <a:p>
             <a:pPr>
@@ -5290,37 +7991,20 @@
             </a:r>
             <a:r>
               <a:rPr dirty="0"/>
-              <a:t>: </a:t>
-            </a:r>
-            <a:r>
-              <a:rPr lang="fr-FR" b="0" dirty="0">
+              <a:t>:</a:t>
+            </a:r>
+            <a:endParaRPr lang="fr-FR" dirty="0"/>
+          </a:p>
+          <a:p>
+            <a:r>
+              <a:rPr lang="fr-FR" sz="1200" dirty="0">
                 <a:solidFill>
                   <a:srgbClr val="64748B"/>
                 </a:solidFill>
-              </a:rPr>
-              <a:t>Utilisé travailler sur les documents de prototypage des </a:t>
-            </a:r>
-            <a:r>
-              <a:rPr lang="fr-FR" b="0" dirty="0" err="1">
-                <a:solidFill>
-                  <a:srgbClr val="64748B"/>
-                </a:solidFill>
-              </a:rPr>
-              <a:t>modeles</a:t>
-            </a:r>
-            <a:r>
-              <a:rPr lang="fr-FR" dirty="0">
-                <a:solidFill>
-                  <a:srgbClr val="64748B"/>
-                </a:solidFill>
-              </a:rPr>
-              <a:t>.</a:t>
-            </a:r>
-            <a:endParaRPr b="0" dirty="0">
-              <a:solidFill>
-                <a:srgbClr val="64748B"/>
-              </a:solidFill>
-            </a:endParaRPr>
+                <a:latin typeface="Verdana"/>
+              </a:rPr>
+              <a:t>Nettoyage des colonnes qui ne seront pas utilisées pour l’entrainement des modèles, ni pour la création de nouvelles variables. </a:t>
+            </a:r>
           </a:p>
           <a:p>
             <a:pPr>
@@ -5334,6 +8018,24 @@
                 <a:latin typeface="Verdana"/>
               </a:defRPr>
             </a:pPr>
+            <a:endParaRPr lang="fr-FR" sz="900" b="0" dirty="0">
+              <a:solidFill>
+                <a:srgbClr val="64748B"/>
+              </a:solidFill>
+            </a:endParaRPr>
+          </a:p>
+          <a:p>
+            <a:pPr>
+              <a:spcAft>
+                <a:spcPts val="800"/>
+              </a:spcAft>
+              <a:defRPr sz="1200" b="1">
+                <a:solidFill>
+                  <a:srgbClr val="1E293B"/>
+                </a:solidFill>
+                <a:latin typeface="Verdana"/>
+              </a:defRPr>
+            </a:pPr>
             <a:r>
               <a:rPr lang="fr-FR" dirty="0"/>
               <a:t>Gestion des valeurs vides / aberrantes </a:t>
@@ -5342,14 +8044,169 @@
               <a:rPr dirty="0"/>
               <a:t>: </a:t>
             </a:r>
+            <a:endParaRPr lang="fr-FR" dirty="0"/>
+          </a:p>
+          <a:p>
+            <a:pPr>
+              <a:spcAft>
+                <a:spcPts val="800"/>
+              </a:spcAft>
+              <a:defRPr sz="1200" b="1">
+                <a:solidFill>
+                  <a:srgbClr val="1E293B"/>
+                </a:solidFill>
+                <a:latin typeface="Verdana"/>
+              </a:defRPr>
+            </a:pPr>
             <a:r>
               <a:rPr lang="fr-FR" b="0" dirty="0">
                 <a:solidFill>
                   <a:srgbClr val="64748B"/>
                 </a:solidFill>
               </a:rPr>
-              <a:t>Utilisé pour héberger les documents (datasets et documents de prototypage) sur une plateforme partagée en ligne. </a:t>
-            </a:r>
+              <a:t>Applications d’algorithmes pour traiter les valeurs nulles et aberrantes. </a:t>
+            </a:r>
+            <a:r>
+              <a:rPr lang="fr-FR" sz="1100" b="1" dirty="0">
+                <a:solidFill>
+                  <a:srgbClr val="1E293B"/>
+                </a:solidFill>
+                <a:latin typeface="Arial" panose="020B0604020202020204" pitchFamily="34" charset="0"/>
+                <a:cs typeface="Arial" panose="020B0604020202020204" pitchFamily="34" charset="0"/>
+              </a:rPr>
+              <a:t>Les valeurs vides sur le dataset allégé étaient 17  (toutes réparties sur 3 lignes).</a:t>
+            </a:r>
+          </a:p>
+          <a:p>
+            <a:pPr>
+              <a:spcAft>
+                <a:spcPts val="800"/>
+              </a:spcAft>
+              <a:defRPr sz="1200" b="1">
+                <a:solidFill>
+                  <a:srgbClr val="1E293B"/>
+                </a:solidFill>
+                <a:latin typeface="Verdana"/>
+              </a:defRPr>
+            </a:pPr>
+            <a:endParaRPr lang="fr-FR" sz="1050" b="0" dirty="0">
+              <a:solidFill>
+                <a:srgbClr val="64748B"/>
+              </a:solidFill>
+            </a:endParaRPr>
+          </a:p>
+          <a:p>
+            <a:pPr>
+              <a:spcAft>
+                <a:spcPts val="800"/>
+              </a:spcAft>
+              <a:defRPr sz="1200" b="1">
+                <a:solidFill>
+                  <a:srgbClr val="1E293B"/>
+                </a:solidFill>
+                <a:latin typeface="Verdana"/>
+              </a:defRPr>
+            </a:pPr>
+            <a:r>
+              <a:rPr lang="fr-FR" dirty="0"/>
+              <a:t>Gestion des bâtiments résidentiels  :</a:t>
+            </a:r>
+          </a:p>
+          <a:p>
+            <a:pPr>
+              <a:spcAft>
+                <a:spcPts val="800"/>
+              </a:spcAft>
+              <a:defRPr sz="1200" b="1">
+                <a:solidFill>
+                  <a:srgbClr val="1E293B"/>
+                </a:solidFill>
+                <a:latin typeface="Verdana"/>
+              </a:defRPr>
+            </a:pPr>
+            <a:r>
+              <a:rPr lang="fr-FR" b="0" dirty="0">
+                <a:solidFill>
+                  <a:srgbClr val="64748B"/>
+                </a:solidFill>
+              </a:rPr>
+              <a:t>Suppression des lignes qui sont en rapport avec les bâtiments résidentiels</a:t>
+            </a:r>
+          </a:p>
+          <a:p>
+            <a:pPr>
+              <a:spcAft>
+                <a:spcPts val="800"/>
+              </a:spcAft>
+              <a:defRPr sz="1200" b="1">
+                <a:solidFill>
+                  <a:srgbClr val="1E293B"/>
+                </a:solidFill>
+                <a:latin typeface="Verdana"/>
+              </a:defRPr>
+            </a:pPr>
+            <a:r>
+              <a:rPr lang="fr-FR" sz="1100" b="1" dirty="0">
+                <a:latin typeface="Arial" panose="020B0604020202020204" pitchFamily="34" charset="0"/>
+                <a:cs typeface="Arial" panose="020B0604020202020204" pitchFamily="34" charset="0"/>
+              </a:rPr>
+              <a:t>'</a:t>
+            </a:r>
+            <a:r>
+              <a:rPr lang="fr-FR" sz="1100" b="1" dirty="0" err="1">
+                <a:latin typeface="Arial" panose="020B0604020202020204" pitchFamily="34" charset="0"/>
+                <a:cs typeface="Arial" panose="020B0604020202020204" pitchFamily="34" charset="0"/>
+              </a:rPr>
+              <a:t>Multifamily</a:t>
+            </a:r>
+            <a:r>
+              <a:rPr lang="fr-FR" sz="1100" b="1" dirty="0">
+                <a:latin typeface="Arial" panose="020B0604020202020204" pitchFamily="34" charset="0"/>
+                <a:cs typeface="Arial" panose="020B0604020202020204" pitchFamily="34" charset="0"/>
+              </a:rPr>
+              <a:t> LR (1-4)', '</a:t>
+            </a:r>
+            <a:r>
+              <a:rPr lang="fr-FR" sz="1100" b="1" dirty="0" err="1">
+                <a:latin typeface="Arial" panose="020B0604020202020204" pitchFamily="34" charset="0"/>
+                <a:cs typeface="Arial" panose="020B0604020202020204" pitchFamily="34" charset="0"/>
+              </a:rPr>
+              <a:t>Multifamily</a:t>
+            </a:r>
+            <a:r>
+              <a:rPr lang="fr-FR" sz="1100" b="1" dirty="0">
+                <a:latin typeface="Arial" panose="020B0604020202020204" pitchFamily="34" charset="0"/>
+                <a:cs typeface="Arial" panose="020B0604020202020204" pitchFamily="34" charset="0"/>
+              </a:rPr>
+              <a:t> MR (5-9)', '</a:t>
+            </a:r>
+            <a:r>
+              <a:rPr lang="fr-FR" sz="1100" b="1" dirty="0" err="1">
+                <a:latin typeface="Arial" panose="020B0604020202020204" pitchFamily="34" charset="0"/>
+                <a:cs typeface="Arial" panose="020B0604020202020204" pitchFamily="34" charset="0"/>
+              </a:rPr>
+              <a:t>Multifamily</a:t>
+            </a:r>
+            <a:r>
+              <a:rPr lang="fr-FR" sz="1100" b="1" dirty="0">
+                <a:latin typeface="Arial" panose="020B0604020202020204" pitchFamily="34" charset="0"/>
+                <a:cs typeface="Arial" panose="020B0604020202020204" pitchFamily="34" charset="0"/>
+              </a:rPr>
+              <a:t> HR (10+)'</a:t>
+            </a:r>
+          </a:p>
+          <a:p>
+            <a:pPr>
+              <a:spcAft>
+                <a:spcPts val="800"/>
+              </a:spcAft>
+              <a:defRPr sz="1200" b="1">
+                <a:solidFill>
+                  <a:srgbClr val="1E293B"/>
+                </a:solidFill>
+                <a:latin typeface="Verdana"/>
+              </a:defRPr>
+            </a:pPr>
             <a:endParaRPr b="0" dirty="0">
               <a:solidFill>
                 <a:srgbClr val="64748B"/>
@@ -5364,372 +8221,6 @@
         <p14:creationId xmlns:p14="http://schemas.microsoft.com/office/powerpoint/2010/main" val="2078663233"/>
       </p:ext>
     </p:extLst>
-  </p:cSld>
-  <p:clrMapOvr>
-    <a:masterClrMapping/>
-  </p:clrMapOvr>
-</p:sld>
-</file>
-
-<file path=ppt/slides/slide4.xml><?xml version="1.0" encoding="utf-8"?>
-<p:sld xmlns:a="http://schemas.openxmlformats.org/drawingml/2006/main" xmlns:r="http://schemas.openxmlformats.org/officeDocument/2006/relationships" xmlns:p="http://schemas.openxmlformats.org/presentationml/2006/main">
-  <p:cSld>
-    <p:bg>
-      <p:bgPr>
-        <a:solidFill>
-          <a:srgbClr val="FAFAFC"/>
-        </a:solidFill>
-        <a:effectLst/>
-      </p:bgPr>
-    </p:bg>
-    <p:spTree>
-      <p:nvGrpSpPr>
-        <p:cNvPr id="1" name=""/>
-        <p:cNvGrpSpPr/>
-        <p:nvPr/>
-      </p:nvGrpSpPr>
-      <p:grpSpPr>
-        <a:xfrm>
-          <a:off x="0" y="0"/>
-          <a:ext cx="0" cy="0"/>
-          <a:chOff x="0" y="0"/>
-          <a:chExt cx="0" cy="0"/>
-        </a:xfrm>
-      </p:grpSpPr>
-      <p:sp>
-        <p:nvSpPr>
-          <p:cNvPr id="2" name="Rectangle 1"/>
-          <p:cNvSpPr/>
-          <p:nvPr/>
-        </p:nvSpPr>
-        <p:spPr>
-          <a:xfrm>
-            <a:off x="0" y="0"/>
-            <a:ext cx="12191695" cy="1371600"/>
-          </a:xfrm>
-          <a:prstGeom prst="rect">
-            <a:avLst/>
-          </a:prstGeom>
-          <a:solidFill>
-            <a:srgbClr val="FFFFFF"/>
-          </a:solidFill>
-          <a:ln>
-            <a:noFill/>
-          </a:ln>
-        </p:spPr>
-        <p:style>
-          <a:lnRef idx="1">
-            <a:schemeClr val="accent1"/>
-          </a:lnRef>
-          <a:fillRef idx="3">
-            <a:schemeClr val="accent1"/>
-          </a:fillRef>
-          <a:effectRef idx="2">
-            <a:schemeClr val="accent1"/>
-          </a:effectRef>
-          <a:fontRef idx="minor">
-            <a:schemeClr val="lt1"/>
-          </a:fontRef>
-        </p:style>
-        <p:txBody>
-          <a:bodyPr rtlCol="0" anchor="ctr"/>
-          <a:lstStyle/>
-          <a:p>
-            <a:pPr algn="ctr"/>
-            <a:endParaRPr/>
-          </a:p>
-        </p:txBody>
-      </p:sp>
-      <p:sp>
-        <p:nvSpPr>
-          <p:cNvPr id="3" name="Rectangle 2"/>
-          <p:cNvSpPr/>
-          <p:nvPr/>
-        </p:nvSpPr>
-        <p:spPr>
-          <a:xfrm>
-            <a:off x="0" y="1353312"/>
-            <a:ext cx="12191695" cy="25400"/>
-          </a:xfrm>
-          <a:prstGeom prst="rect">
-            <a:avLst/>
-          </a:prstGeom>
-          <a:solidFill>
-            <a:srgbClr val="0284C7"/>
-          </a:solidFill>
-          <a:ln>
-            <a:noFill/>
-          </a:ln>
-        </p:spPr>
-        <p:style>
-          <a:lnRef idx="1">
-            <a:schemeClr val="accent1"/>
-          </a:lnRef>
-          <a:fillRef idx="3">
-            <a:schemeClr val="accent1"/>
-          </a:fillRef>
-          <a:effectRef idx="2">
-            <a:schemeClr val="accent1"/>
-          </a:effectRef>
-          <a:fontRef idx="minor">
-            <a:schemeClr val="lt1"/>
-          </a:fontRef>
-        </p:style>
-        <p:txBody>
-          <a:bodyPr rtlCol="0" anchor="ctr"/>
-          <a:lstStyle/>
-          <a:p>
-            <a:pPr algn="ctr"/>
-            <a:endParaRPr/>
-          </a:p>
-        </p:txBody>
-      </p:sp>
-      <p:sp>
-        <p:nvSpPr>
-          <p:cNvPr id="4" name="TextBox 3"/>
-          <p:cNvSpPr txBox="1"/>
-          <p:nvPr/>
-        </p:nvSpPr>
-        <p:spPr>
-          <a:xfrm>
-            <a:off x="731520" y="320040"/>
-            <a:ext cx="10698480" cy="492443"/>
-          </a:xfrm>
-          <a:prstGeom prst="rect">
-            <a:avLst/>
-          </a:prstGeom>
-          <a:noFill/>
-        </p:spPr>
-        <p:txBody>
-          <a:bodyPr wrap="square">
-            <a:spAutoFit/>
-          </a:bodyPr>
-          <a:lstStyle/>
-          <a:p>
-            <a:pPr algn="l">
-              <a:defRPr sz="2600" b="1">
-                <a:solidFill>
-                  <a:srgbClr val="0F172A"/>
-                </a:solidFill>
-                <a:latin typeface="Georgia"/>
-              </a:defRPr>
-            </a:pPr>
-            <a:r>
-              <a:rPr dirty="0" err="1"/>
-              <a:t>Analyse</a:t>
-            </a:r>
-            <a:r>
-              <a:rPr dirty="0"/>
-              <a:t> Descriptive</a:t>
-            </a:r>
-          </a:p>
-        </p:txBody>
-      </p:sp>
-      <p:sp>
-        <p:nvSpPr>
-          <p:cNvPr id="6" name="Espace réservé du pied de page 5">
-            <a:extLst>
-              <a:ext uri="{FF2B5EF4-FFF2-40B4-BE49-F238E27FC236}">
-                <a16:creationId xmlns:a16="http://schemas.microsoft.com/office/drawing/2014/main" id="{6B5088B0-7F11-CF99-4A0B-4F182D40A65F}"/>
-              </a:ext>
-            </a:extLst>
-          </p:cNvPr>
-          <p:cNvSpPr>
-            <a:spLocks noGrp="1"/>
-          </p:cNvSpPr>
-          <p:nvPr>
-            <p:ph type="ftr" sz="quarter" idx="11"/>
-          </p:nvPr>
-        </p:nvSpPr>
-        <p:spPr/>
-        <p:txBody>
-          <a:bodyPr/>
-          <a:lstStyle/>
-          <a:p>
-            <a:r>
-              <a:rPr lang="en-US"/>
-              <a:t>Modélisation Prédictive (Machine Learning)</a:t>
-            </a:r>
-          </a:p>
-        </p:txBody>
-      </p:sp>
-      <p:sp>
-        <p:nvSpPr>
-          <p:cNvPr id="7" name="Espace réservé du numéro de diapositive 6">
-            <a:extLst>
-              <a:ext uri="{FF2B5EF4-FFF2-40B4-BE49-F238E27FC236}">
-                <a16:creationId xmlns:a16="http://schemas.microsoft.com/office/drawing/2014/main" id="{25E1C608-D881-933F-0365-7B072C50A753}"/>
-              </a:ext>
-            </a:extLst>
-          </p:cNvPr>
-          <p:cNvSpPr>
-            <a:spLocks noGrp="1"/>
-          </p:cNvSpPr>
-          <p:nvPr>
-            <p:ph type="sldNum" sz="quarter" idx="12"/>
-          </p:nvPr>
-        </p:nvSpPr>
-        <p:spPr/>
-        <p:txBody>
-          <a:bodyPr/>
-          <a:lstStyle/>
-          <a:p>
-            <a:fld id="{C1FF6DA9-008F-8B48-92A6-B652298478BF}" type="slidenum">
-              <a:rPr lang="en-US" smtClean="0"/>
-              <a:t>4</a:t>
-            </a:fld>
-            <a:endParaRPr lang="en-US"/>
-          </a:p>
-        </p:txBody>
-      </p:sp>
-      <p:sp>
-        <p:nvSpPr>
-          <p:cNvPr id="8" name="Rounded Rectangle 4">
-            <a:extLst>
-              <a:ext uri="{FF2B5EF4-FFF2-40B4-BE49-F238E27FC236}">
-                <a16:creationId xmlns:a16="http://schemas.microsoft.com/office/drawing/2014/main" id="{DB847431-1C1E-E1F8-2D00-E6CEF862DAB3}"/>
-              </a:ext>
-            </a:extLst>
-          </p:cNvPr>
-          <p:cNvSpPr/>
-          <p:nvPr/>
-        </p:nvSpPr>
-        <p:spPr>
-          <a:xfrm>
-            <a:off x="624840" y="1846349"/>
-            <a:ext cx="5303520" cy="3467794"/>
-          </a:xfrm>
-          <a:prstGeom prst="roundRect">
-            <a:avLst/>
-          </a:prstGeom>
-          <a:ln/>
-        </p:spPr>
-        <p:style>
-          <a:lnRef idx="2">
-            <a:schemeClr val="accent2"/>
-          </a:lnRef>
-          <a:fillRef idx="1">
-            <a:schemeClr val="lt1"/>
-          </a:fillRef>
-          <a:effectRef idx="0">
-            <a:schemeClr val="accent2"/>
-          </a:effectRef>
-          <a:fontRef idx="minor">
-            <a:schemeClr val="dk1"/>
-          </a:fontRef>
-        </p:style>
-        <p:txBody>
-          <a:bodyPr wrap="square" lIns="274320" tIns="274320" rIns="274320" rtlCol="0" anchor="ctr"/>
-          <a:lstStyle/>
-          <a:p>
-            <a:pPr algn="ctr">
-              <a:spcAft>
-                <a:spcPts val="1000"/>
-              </a:spcAft>
-              <a:defRPr sz="1600" b="1">
-                <a:solidFill>
-                  <a:srgbClr val="1E293B"/>
-                </a:solidFill>
-                <a:latin typeface="Georgia"/>
-              </a:defRPr>
-            </a:pPr>
-            <a:r>
-              <a:rPr lang="fr-FR" dirty="0"/>
-              <a:t>Audit du dataset d’origine </a:t>
-            </a:r>
-            <a:endParaRPr dirty="0"/>
-          </a:p>
-          <a:p>
-            <a:pPr>
-              <a:spcAft>
-                <a:spcPts val="800"/>
-              </a:spcAft>
-              <a:defRPr sz="1200" b="1">
-                <a:solidFill>
-                  <a:srgbClr val="1E293B"/>
-                </a:solidFill>
-                <a:latin typeface="Verdana"/>
-              </a:defRPr>
-            </a:pPr>
-            <a:r>
-              <a:rPr lang="fr-FR" dirty="0" err="1"/>
-              <a:t>Correlation</a:t>
-            </a:r>
-            <a:r>
-              <a:rPr lang="fr-FR" dirty="0"/>
-              <a:t> et variables en relation</a:t>
-            </a:r>
-            <a:r>
-              <a:rPr dirty="0"/>
-              <a:t>: </a:t>
-            </a:r>
-            <a:r>
-              <a:rPr lang="fr-FR" b="0" dirty="0">
-                <a:solidFill>
-                  <a:srgbClr val="64748B"/>
-                </a:solidFill>
-              </a:rPr>
-              <a:t>Utilisé travailler sur les documents de prototypage des </a:t>
-            </a:r>
-            <a:r>
-              <a:rPr lang="fr-FR" b="0" dirty="0" err="1">
-                <a:solidFill>
-                  <a:srgbClr val="64748B"/>
-                </a:solidFill>
-              </a:rPr>
-              <a:t>modeles</a:t>
-            </a:r>
-            <a:r>
-              <a:rPr lang="fr-FR" dirty="0">
-                <a:solidFill>
-                  <a:srgbClr val="64748B"/>
-                </a:solidFill>
-              </a:rPr>
-              <a:t>.</a:t>
-            </a:r>
-            <a:endParaRPr b="0" dirty="0">
-              <a:solidFill>
-                <a:srgbClr val="64748B"/>
-              </a:solidFill>
-            </a:endParaRPr>
-          </a:p>
-          <a:p>
-            <a:pPr>
-              <a:spcAft>
-                <a:spcPts val="800"/>
-              </a:spcAft>
-              <a:defRPr sz="1200" b="1">
-                <a:solidFill>
-                  <a:srgbClr val="1E293B"/>
-                </a:solidFill>
-                <a:latin typeface="Verdana"/>
-              </a:defRPr>
-            </a:pPr>
-            <a:r>
-              <a:rPr lang="fr-FR" dirty="0"/>
-              <a:t>Git hub</a:t>
-            </a:r>
-            <a:r>
-              <a:rPr dirty="0"/>
-              <a:t>: </a:t>
-            </a:r>
-            <a:r>
-              <a:rPr lang="fr-FR" b="0" dirty="0">
-                <a:solidFill>
-                  <a:srgbClr val="64748B"/>
-                </a:solidFill>
-              </a:rPr>
-              <a:t>Utilisé pour héberger les documents (datasets et documents de prototypage) sur une plateforme partagée en ligne. </a:t>
-            </a:r>
-            <a:endParaRPr b="0" dirty="0">
-              <a:solidFill>
-                <a:srgbClr val="64748B"/>
-              </a:solidFill>
-            </a:endParaRPr>
-          </a:p>
-        </p:txBody>
-      </p:sp>
-    </p:spTree>
   </p:cSld>
   <p:clrMapOvr>
     <a:masterClrMapping/>
@@ -5762,6 +8253,36 @@
           <a:chExt cx="0" cy="0"/>
         </a:xfrm>
       </p:grpSpPr>
+      <p:pic>
+        <p:nvPicPr>
+          <p:cNvPr id="10" name="Image 9">
+            <a:extLst>
+              <a:ext uri="{FF2B5EF4-FFF2-40B4-BE49-F238E27FC236}">
+                <a16:creationId xmlns:a16="http://schemas.microsoft.com/office/drawing/2014/main" id="{20884154-09B5-1D8B-2179-183A6913127C}"/>
+              </a:ext>
+            </a:extLst>
+          </p:cNvPr>
+          <p:cNvPicPr>
+            <a:picLocks noChangeAspect="1"/>
+          </p:cNvPicPr>
+          <p:nvPr/>
+        </p:nvPicPr>
+        <p:blipFill>
+          <a:blip r:embed="rId2"/>
+          <a:stretch>
+            <a:fillRect/>
+          </a:stretch>
+        </p:blipFill>
+        <p:spPr>
+          <a:xfrm>
+            <a:off x="-873452" y="270522"/>
+            <a:ext cx="13908423" cy="7593918"/>
+          </a:xfrm>
+          <a:prstGeom prst="rect">
+            <a:avLst/>
+          </a:prstGeom>
+        </p:spPr>
+      </p:pic>
       <p:sp>
         <p:nvSpPr>
           <p:cNvPr id="2" name="Rectangle 1"/>
@@ -5776,22 +8297,17 @@
           <a:prstGeom prst="rect">
             <a:avLst/>
           </a:prstGeom>
-          <a:solidFill>
-            <a:srgbClr val="FFFFFF"/>
-          </a:solidFill>
-          <a:ln>
-            <a:noFill/>
-          </a:ln>
+          <a:ln/>
         </p:spPr>
         <p:style>
-          <a:lnRef idx="1">
-            <a:schemeClr val="accent1"/>
+          <a:lnRef idx="0">
+            <a:schemeClr val="dk1"/>
           </a:lnRef>
           <a:fillRef idx="3">
-            <a:schemeClr val="accent1"/>
+            <a:schemeClr val="dk1"/>
           </a:fillRef>
-          <a:effectRef idx="2">
-            <a:schemeClr val="accent1"/>
+          <a:effectRef idx="3">
+            <a:schemeClr val="dk1"/>
           </a:effectRef>
           <a:fontRef idx="minor">
             <a:schemeClr val="lt1"/>
@@ -5802,7 +8318,11 @@
           <a:lstStyle/>
           <a:p>
             <a:pPr algn="ctr"/>
-            <a:endParaRPr/>
+            <a:endParaRPr>
+              <a:solidFill>
+                <a:schemeClr val="bg1"/>
+              </a:solidFill>
+            </a:endParaRPr>
           </a:p>
         </p:txBody>
       </p:sp>
@@ -5881,34 +8401,1274 @@
               </a:defRPr>
             </a:pPr>
             <a:r>
-              <a:rPr dirty="0" err="1"/>
+              <a:rPr lang="fr-FR" dirty="0">
+                <a:solidFill>
+                  <a:schemeClr val="bg1"/>
+                </a:solidFill>
+              </a:rPr>
+              <a:t>2 - </a:t>
+            </a:r>
+            <a:r>
+              <a:rPr dirty="0" err="1">
+                <a:solidFill>
+                  <a:schemeClr val="bg1"/>
+                </a:solidFill>
+              </a:rPr>
+              <a:t>Analyse</a:t>
+            </a:r>
+            <a:r>
+              <a:rPr dirty="0">
+                <a:solidFill>
+                  <a:schemeClr val="bg1"/>
+                </a:solidFill>
+              </a:rPr>
+              <a:t> </a:t>
+            </a:r>
+            <a:r>
+              <a:rPr lang="fr-FR" dirty="0">
+                <a:solidFill>
+                  <a:schemeClr val="bg1"/>
+                </a:solidFill>
+              </a:rPr>
+              <a:t>Exploratoire (EDA)</a:t>
+            </a:r>
+            <a:endParaRPr dirty="0">
+              <a:solidFill>
+                <a:schemeClr val="bg1"/>
+              </a:solidFill>
+            </a:endParaRPr>
+          </a:p>
+        </p:txBody>
+      </p:sp>
+      <p:sp>
+        <p:nvSpPr>
+          <p:cNvPr id="6" name="Espace réservé du pied de page 5">
+            <a:extLst>
+              <a:ext uri="{FF2B5EF4-FFF2-40B4-BE49-F238E27FC236}">
+                <a16:creationId xmlns:a16="http://schemas.microsoft.com/office/drawing/2014/main" id="{6B5088B0-7F11-CF99-4A0B-4F182D40A65F}"/>
+              </a:ext>
+            </a:extLst>
+          </p:cNvPr>
+          <p:cNvSpPr>
+            <a:spLocks noGrp="1"/>
+          </p:cNvSpPr>
+          <p:nvPr>
+            <p:ph type="ftr" sz="quarter" idx="11"/>
+          </p:nvPr>
+        </p:nvSpPr>
+        <p:spPr/>
+        <p:txBody>
+          <a:bodyPr/>
+          <a:lstStyle/>
+          <a:p>
+            <a:r>
+              <a:rPr lang="en-US"/>
+              <a:t>Modélisation Prédictive (Machine Learning)</a:t>
+            </a:r>
+          </a:p>
+        </p:txBody>
+      </p:sp>
+      <p:sp>
+        <p:nvSpPr>
+          <p:cNvPr id="7" name="Espace réservé du numéro de diapositive 6">
+            <a:extLst>
+              <a:ext uri="{FF2B5EF4-FFF2-40B4-BE49-F238E27FC236}">
+                <a16:creationId xmlns:a16="http://schemas.microsoft.com/office/drawing/2014/main" id="{25E1C608-D881-933F-0365-7B072C50A753}"/>
+              </a:ext>
+            </a:extLst>
+          </p:cNvPr>
+          <p:cNvSpPr>
+            <a:spLocks noGrp="1"/>
+          </p:cNvSpPr>
+          <p:nvPr>
+            <p:ph type="sldNum" sz="quarter" idx="12"/>
+          </p:nvPr>
+        </p:nvSpPr>
+        <p:spPr/>
+        <p:txBody>
+          <a:bodyPr/>
+          <a:lstStyle/>
+          <a:p>
+            <a:fld id="{C1FF6DA9-008F-8B48-92A6-B652298478BF}" type="slidenum">
+              <a:rPr lang="en-US" smtClean="0"/>
+              <a:t>5</a:t>
+            </a:fld>
+            <a:endParaRPr lang="en-US"/>
+          </a:p>
+        </p:txBody>
+      </p:sp>
+      <p:sp>
+        <p:nvSpPr>
+          <p:cNvPr id="8" name="Rounded Rectangle 4">
+            <a:extLst>
+              <a:ext uri="{FF2B5EF4-FFF2-40B4-BE49-F238E27FC236}">
+                <a16:creationId xmlns:a16="http://schemas.microsoft.com/office/drawing/2014/main" id="{DB847431-1C1E-E1F8-2D00-E6CEF862DAB3}"/>
+              </a:ext>
+            </a:extLst>
+          </p:cNvPr>
+          <p:cNvSpPr/>
+          <p:nvPr/>
+        </p:nvSpPr>
+        <p:spPr>
+          <a:xfrm>
+            <a:off x="624840" y="1846349"/>
+            <a:ext cx="5303520" cy="4442264"/>
+          </a:xfrm>
+          <a:prstGeom prst="roundRect">
+            <a:avLst/>
+          </a:prstGeom>
+          <a:ln/>
+        </p:spPr>
+        <p:style>
+          <a:lnRef idx="2">
+            <a:schemeClr val="accent2"/>
+          </a:lnRef>
+          <a:fillRef idx="1">
+            <a:schemeClr val="lt1"/>
+          </a:fillRef>
+          <a:effectRef idx="0">
+            <a:schemeClr val="accent2"/>
+          </a:effectRef>
+          <a:fontRef idx="minor">
+            <a:schemeClr val="dk1"/>
+          </a:fontRef>
+        </p:style>
+        <p:txBody>
+          <a:bodyPr wrap="square" lIns="274320" tIns="274320" rIns="274320" rtlCol="0" anchor="t"/>
+          <a:lstStyle/>
+          <a:p>
+            <a:pPr algn="ctr">
+              <a:spcAft>
+                <a:spcPts val="1000"/>
+              </a:spcAft>
+              <a:defRPr sz="1600" b="1">
+                <a:solidFill>
+                  <a:srgbClr val="1E293B"/>
+                </a:solidFill>
+                <a:latin typeface="Georgia"/>
+              </a:defRPr>
+            </a:pPr>
+            <a:r>
+              <a:rPr lang="fr-FR" dirty="0">
+                <a:solidFill>
+                  <a:schemeClr val="accent2">
+                    <a:lumMod val="75000"/>
+                  </a:schemeClr>
+                </a:solidFill>
+              </a:rPr>
+              <a:t>Mise en corrélation</a:t>
+            </a:r>
+            <a:endParaRPr dirty="0">
+              <a:solidFill>
+                <a:schemeClr val="accent2">
+                  <a:lumMod val="75000"/>
+                </a:schemeClr>
+              </a:solidFill>
+            </a:endParaRPr>
+          </a:p>
+          <a:p>
+            <a:pPr>
+              <a:spcAft>
+                <a:spcPts val="800"/>
+              </a:spcAft>
+              <a:defRPr sz="1200" b="1">
+                <a:solidFill>
+                  <a:srgbClr val="1E293B"/>
+                </a:solidFill>
+                <a:latin typeface="Verdana"/>
+              </a:defRPr>
+            </a:pPr>
+            <a:r>
+              <a:rPr lang="fr-FR" b="0" dirty="0">
+                <a:solidFill>
+                  <a:srgbClr val="64748B"/>
+                </a:solidFill>
+              </a:rPr>
+              <a:t>Pour identifier les variables qui sont corrélées , j’ai utilisé une « </a:t>
+            </a:r>
+            <a:r>
+              <a:rPr lang="fr-FR" b="0" dirty="0" err="1">
+                <a:solidFill>
+                  <a:srgbClr val="64748B"/>
+                </a:solidFill>
+              </a:rPr>
+              <a:t>heatmap</a:t>
+            </a:r>
+            <a:r>
+              <a:rPr lang="fr-FR" b="0" dirty="0">
+                <a:solidFill>
+                  <a:srgbClr val="64748B"/>
+                </a:solidFill>
+              </a:rPr>
+              <a:t> » qui permet de voir quelles sont les variables corrélées</a:t>
+            </a:r>
+          </a:p>
+          <a:p>
+            <a:pPr>
+              <a:spcAft>
+                <a:spcPts val="800"/>
+              </a:spcAft>
+              <a:defRPr sz="1200" b="1">
+                <a:solidFill>
+                  <a:srgbClr val="1E293B"/>
+                </a:solidFill>
+                <a:latin typeface="Verdana"/>
+              </a:defRPr>
+            </a:pPr>
+            <a:endParaRPr lang="fr-FR" dirty="0">
+              <a:solidFill>
+                <a:srgbClr val="64748B"/>
+              </a:solidFill>
+            </a:endParaRPr>
+          </a:p>
+          <a:p>
+            <a:pPr>
+              <a:spcAft>
+                <a:spcPts val="800"/>
+              </a:spcAft>
+              <a:defRPr sz="1200" b="1">
+                <a:solidFill>
+                  <a:srgbClr val="1E293B"/>
+                </a:solidFill>
+                <a:latin typeface="Verdana"/>
+              </a:defRPr>
+            </a:pPr>
+            <a:endParaRPr lang="fr-FR" b="0" dirty="0">
+              <a:solidFill>
+                <a:srgbClr val="64748B"/>
+              </a:solidFill>
+            </a:endParaRPr>
+          </a:p>
+          <a:p>
+            <a:pPr>
+              <a:spcAft>
+                <a:spcPts val="800"/>
+              </a:spcAft>
+              <a:defRPr sz="1200" b="1">
+                <a:solidFill>
+                  <a:srgbClr val="1E293B"/>
+                </a:solidFill>
+                <a:latin typeface="Verdana"/>
+              </a:defRPr>
+            </a:pPr>
+            <a:endParaRPr lang="fr-FR" dirty="0">
+              <a:solidFill>
+                <a:srgbClr val="64748B"/>
+              </a:solidFill>
+            </a:endParaRPr>
+          </a:p>
+          <a:p>
+            <a:pPr>
+              <a:spcAft>
+                <a:spcPts val="800"/>
+              </a:spcAft>
+              <a:defRPr sz="1200" b="1">
+                <a:solidFill>
+                  <a:srgbClr val="1E293B"/>
+                </a:solidFill>
+                <a:latin typeface="Verdana"/>
+              </a:defRPr>
+            </a:pPr>
+            <a:endParaRPr lang="fr-FR" b="0" dirty="0">
+              <a:solidFill>
+                <a:srgbClr val="64748B"/>
+              </a:solidFill>
+            </a:endParaRPr>
+          </a:p>
+          <a:p>
+            <a:pPr>
+              <a:spcAft>
+                <a:spcPts val="800"/>
+              </a:spcAft>
+              <a:defRPr sz="1200" b="1">
+                <a:solidFill>
+                  <a:srgbClr val="1E293B"/>
+                </a:solidFill>
+                <a:latin typeface="Verdana"/>
+              </a:defRPr>
+            </a:pPr>
+            <a:endParaRPr lang="fr-FR" dirty="0">
+              <a:solidFill>
+                <a:srgbClr val="64748B"/>
+              </a:solidFill>
+            </a:endParaRPr>
+          </a:p>
+          <a:p>
+            <a:pPr>
+              <a:spcAft>
+                <a:spcPts val="800"/>
+              </a:spcAft>
+              <a:defRPr sz="1200" b="1">
+                <a:solidFill>
+                  <a:srgbClr val="1E293B"/>
+                </a:solidFill>
+                <a:latin typeface="Verdana"/>
+              </a:defRPr>
+            </a:pPr>
+            <a:endParaRPr lang="fr-FR" b="0" dirty="0">
+              <a:solidFill>
+                <a:srgbClr val="64748B"/>
+              </a:solidFill>
+            </a:endParaRPr>
+          </a:p>
+          <a:p>
+            <a:pPr>
+              <a:spcAft>
+                <a:spcPts val="800"/>
+              </a:spcAft>
+              <a:defRPr sz="1200" b="1">
+                <a:solidFill>
+                  <a:srgbClr val="1E293B"/>
+                </a:solidFill>
+                <a:latin typeface="Verdana"/>
+              </a:defRPr>
+            </a:pPr>
+            <a:endParaRPr lang="fr-FR" b="0" dirty="0">
+              <a:solidFill>
+                <a:srgbClr val="64748B"/>
+              </a:solidFill>
+            </a:endParaRPr>
+          </a:p>
+          <a:p>
+            <a:pPr>
+              <a:spcAft>
+                <a:spcPts val="800"/>
+              </a:spcAft>
+              <a:defRPr sz="1200" b="1">
+                <a:solidFill>
+                  <a:srgbClr val="1E293B"/>
+                </a:solidFill>
+                <a:latin typeface="Verdana"/>
+              </a:defRPr>
+            </a:pPr>
+            <a:endParaRPr b="0" dirty="0">
+              <a:solidFill>
+                <a:srgbClr val="64748B"/>
+              </a:solidFill>
+            </a:endParaRPr>
+          </a:p>
+        </p:txBody>
+      </p:sp>
+      <p:sp>
+        <p:nvSpPr>
+          <p:cNvPr id="5" name="Rounded Rectangle 4">
+            <a:extLst>
+              <a:ext uri="{FF2B5EF4-FFF2-40B4-BE49-F238E27FC236}">
+                <a16:creationId xmlns:a16="http://schemas.microsoft.com/office/drawing/2014/main" id="{7E10C555-B5EE-CC81-A8F9-DAACE4934506}"/>
+              </a:ext>
+            </a:extLst>
+          </p:cNvPr>
+          <p:cNvSpPr/>
+          <p:nvPr/>
+        </p:nvSpPr>
+        <p:spPr>
+          <a:xfrm>
+            <a:off x="6263642" y="1846349"/>
+            <a:ext cx="5303520" cy="4442264"/>
+          </a:xfrm>
+          <a:prstGeom prst="roundRect">
+            <a:avLst/>
+          </a:prstGeom>
+          <a:ln/>
+        </p:spPr>
+        <p:style>
+          <a:lnRef idx="2">
+            <a:schemeClr val="accent1"/>
+          </a:lnRef>
+          <a:fillRef idx="1">
+            <a:schemeClr val="lt1"/>
+          </a:fillRef>
+          <a:effectRef idx="0">
+            <a:schemeClr val="accent1"/>
+          </a:effectRef>
+          <a:fontRef idx="minor">
+            <a:schemeClr val="dk1"/>
+          </a:fontRef>
+        </p:style>
+        <p:txBody>
+          <a:bodyPr wrap="square" lIns="274320" tIns="274320" rIns="274320" rtlCol="0" anchor="ctr"/>
+          <a:lstStyle/>
+          <a:p>
+            <a:pPr algn="ctr">
+              <a:spcAft>
+                <a:spcPts val="1000"/>
+              </a:spcAft>
+              <a:defRPr sz="1600" b="1">
+                <a:solidFill>
+                  <a:srgbClr val="1E293B"/>
+                </a:solidFill>
+                <a:latin typeface="Georgia"/>
+              </a:defRPr>
+            </a:pPr>
+            <a:r>
+              <a:rPr lang="fr-FR" dirty="0">
+                <a:solidFill>
+                  <a:schemeClr val="accent1">
+                    <a:lumMod val="75000"/>
+                  </a:schemeClr>
+                </a:solidFill>
+              </a:rPr>
+              <a:t>Mise en relation</a:t>
+            </a:r>
+          </a:p>
+          <a:p>
+            <a:pPr>
+              <a:spcAft>
+                <a:spcPts val="800"/>
+              </a:spcAft>
+              <a:defRPr sz="1200" b="1">
+                <a:solidFill>
+                  <a:srgbClr val="1E293B"/>
+                </a:solidFill>
+                <a:latin typeface="Verdana"/>
+              </a:defRPr>
+            </a:pPr>
+            <a:r>
+              <a:rPr lang="fr-FR" b="0" dirty="0">
+                <a:solidFill>
+                  <a:srgbClr val="64748B"/>
+                </a:solidFill>
+              </a:rPr>
+              <a:t>Avec la corrélation j’ai pu identifier des variables qui sont en relation. </a:t>
+            </a:r>
+          </a:p>
+          <a:p>
+            <a:pPr>
+              <a:spcAft>
+                <a:spcPts val="800"/>
+              </a:spcAft>
+              <a:defRPr sz="1200" b="1">
+                <a:solidFill>
+                  <a:srgbClr val="1E293B"/>
+                </a:solidFill>
+                <a:latin typeface="Verdana"/>
+              </a:defRPr>
+            </a:pPr>
+            <a:endParaRPr lang="fr-FR" b="0" dirty="0">
+              <a:solidFill>
+                <a:srgbClr val="64748B"/>
+              </a:solidFill>
+            </a:endParaRPr>
+          </a:p>
+          <a:p>
+            <a:pPr>
+              <a:spcAft>
+                <a:spcPts val="800"/>
+              </a:spcAft>
+              <a:defRPr sz="1200" b="1">
+                <a:solidFill>
+                  <a:srgbClr val="1E293B"/>
+                </a:solidFill>
+                <a:latin typeface="Verdana"/>
+              </a:defRPr>
+            </a:pPr>
+            <a:r>
+              <a:rPr lang="fr-FR" sz="1050" dirty="0" err="1">
+                <a:solidFill>
+                  <a:srgbClr val="1E293B"/>
+                </a:solidFill>
+                <a:latin typeface="Verdana"/>
+              </a:rPr>
+              <a:t>SiteEnergyUse</a:t>
+            </a:r>
+            <a:r>
+              <a:rPr lang="fr-FR" sz="1050" dirty="0">
+                <a:solidFill>
+                  <a:srgbClr val="1E293B"/>
+                </a:solidFill>
+                <a:latin typeface="Verdana"/>
+              </a:rPr>
+              <a:t>(</a:t>
+            </a:r>
+            <a:r>
+              <a:rPr lang="fr-FR" sz="1050" dirty="0" err="1">
+                <a:solidFill>
+                  <a:srgbClr val="1E293B"/>
+                </a:solidFill>
+                <a:latin typeface="Verdana"/>
+              </a:rPr>
+              <a:t>kBtu</a:t>
+            </a:r>
+            <a:r>
+              <a:rPr lang="fr-FR" sz="1050" dirty="0">
+                <a:solidFill>
+                  <a:srgbClr val="1E293B"/>
+                </a:solidFill>
+                <a:latin typeface="Verdana"/>
+              </a:rPr>
+              <a:t>) = </a:t>
+            </a:r>
+          </a:p>
+          <a:p>
+            <a:pPr>
+              <a:spcAft>
+                <a:spcPts val="800"/>
+              </a:spcAft>
+              <a:defRPr sz="1200" b="1">
+                <a:solidFill>
+                  <a:srgbClr val="1E293B"/>
+                </a:solidFill>
+                <a:latin typeface="Verdana"/>
+              </a:defRPr>
+            </a:pPr>
+            <a:r>
+              <a:rPr lang="fr-FR" sz="1050" dirty="0" err="1">
+                <a:solidFill>
+                  <a:srgbClr val="1E293B"/>
+                </a:solidFill>
+                <a:latin typeface="Verdana"/>
+              </a:rPr>
+              <a:t>SteamUse</a:t>
+            </a:r>
+            <a:r>
+              <a:rPr lang="fr-FR" sz="1050" dirty="0">
+                <a:solidFill>
+                  <a:srgbClr val="1E293B"/>
+                </a:solidFill>
+                <a:latin typeface="Verdana"/>
+              </a:rPr>
+              <a:t>(</a:t>
+            </a:r>
+            <a:r>
+              <a:rPr lang="fr-FR" sz="1050" dirty="0" err="1">
+                <a:solidFill>
+                  <a:srgbClr val="1E293B"/>
+                </a:solidFill>
+                <a:latin typeface="Verdana"/>
+              </a:rPr>
+              <a:t>kBtu</a:t>
+            </a:r>
+            <a:r>
+              <a:rPr lang="fr-FR" sz="1050" dirty="0">
+                <a:solidFill>
+                  <a:srgbClr val="1E293B"/>
+                </a:solidFill>
+                <a:latin typeface="Verdana"/>
+              </a:rPr>
+              <a:t>) + </a:t>
+            </a:r>
+            <a:r>
+              <a:rPr lang="fr-FR" sz="1050" dirty="0" err="1">
+                <a:solidFill>
+                  <a:srgbClr val="1E293B"/>
+                </a:solidFill>
+                <a:latin typeface="Verdana"/>
+              </a:rPr>
+              <a:t>Electricity</a:t>
+            </a:r>
+            <a:r>
+              <a:rPr lang="fr-FR" sz="1050" dirty="0">
+                <a:solidFill>
+                  <a:srgbClr val="1E293B"/>
+                </a:solidFill>
+                <a:latin typeface="Verdana"/>
+              </a:rPr>
+              <a:t>(</a:t>
+            </a:r>
+            <a:r>
+              <a:rPr lang="fr-FR" sz="1050" dirty="0" err="1">
+                <a:solidFill>
+                  <a:srgbClr val="1E293B"/>
+                </a:solidFill>
+                <a:latin typeface="Verdana"/>
+              </a:rPr>
+              <a:t>kBtu</a:t>
+            </a:r>
+            <a:r>
+              <a:rPr lang="fr-FR" sz="1050" dirty="0">
+                <a:solidFill>
+                  <a:srgbClr val="1E293B"/>
+                </a:solidFill>
+                <a:latin typeface="Verdana"/>
+              </a:rPr>
+              <a:t>) + </a:t>
+            </a:r>
+            <a:r>
+              <a:rPr lang="fr-FR" sz="1050" dirty="0" err="1">
+                <a:solidFill>
+                  <a:srgbClr val="1E293B"/>
+                </a:solidFill>
+                <a:latin typeface="Verdana"/>
+              </a:rPr>
+              <a:t>NaturalGas</a:t>
+            </a:r>
+            <a:r>
+              <a:rPr lang="fr-FR" sz="1050" dirty="0">
+                <a:solidFill>
+                  <a:srgbClr val="1E293B"/>
+                </a:solidFill>
+                <a:latin typeface="Verdana"/>
+              </a:rPr>
+              <a:t>(</a:t>
+            </a:r>
+            <a:r>
+              <a:rPr lang="fr-FR" sz="1050" dirty="0" err="1">
+                <a:solidFill>
+                  <a:srgbClr val="1E293B"/>
+                </a:solidFill>
+                <a:latin typeface="Verdana"/>
+              </a:rPr>
+              <a:t>kBtu</a:t>
+            </a:r>
+            <a:r>
+              <a:rPr lang="fr-FR" sz="1050" dirty="0">
+                <a:solidFill>
+                  <a:srgbClr val="1E293B"/>
+                </a:solidFill>
+                <a:latin typeface="Verdana"/>
+              </a:rPr>
+              <a:t>)</a:t>
+            </a:r>
+          </a:p>
+          <a:p>
+            <a:pPr>
+              <a:spcAft>
+                <a:spcPts val="800"/>
+              </a:spcAft>
+              <a:defRPr sz="1200" b="1">
+                <a:solidFill>
+                  <a:srgbClr val="1E293B"/>
+                </a:solidFill>
+                <a:latin typeface="Verdana"/>
+              </a:defRPr>
+            </a:pPr>
+            <a:r>
+              <a:rPr lang="fr-FR" dirty="0">
+                <a:solidFill>
+                  <a:srgbClr val="64748B"/>
+                </a:solidFill>
+              </a:rPr>
+              <a:t> </a:t>
+            </a:r>
+            <a:endParaRPr lang="fr-FR" b="0" dirty="0">
+              <a:solidFill>
+                <a:srgbClr val="64748B"/>
+              </a:solidFill>
+            </a:endParaRPr>
+          </a:p>
+          <a:p>
+            <a:pPr>
+              <a:spcAft>
+                <a:spcPts val="800"/>
+              </a:spcAft>
+              <a:defRPr sz="1200" b="1">
+                <a:solidFill>
+                  <a:srgbClr val="1E293B"/>
+                </a:solidFill>
+                <a:latin typeface="Verdana"/>
+              </a:defRPr>
+            </a:pPr>
+            <a:r>
+              <a:rPr lang="fr-FR" sz="1050" dirty="0" err="1">
+                <a:solidFill>
+                  <a:srgbClr val="1E293B"/>
+                </a:solidFill>
+                <a:latin typeface="Verdana"/>
+              </a:rPr>
+              <a:t>SiteEUI</a:t>
+            </a:r>
+            <a:r>
+              <a:rPr lang="fr-FR" sz="1050" dirty="0">
+                <a:solidFill>
+                  <a:srgbClr val="1E293B"/>
+                </a:solidFill>
+                <a:latin typeface="Verdana"/>
+              </a:rPr>
+              <a:t>(</a:t>
+            </a:r>
+            <a:r>
+              <a:rPr lang="fr-FR" sz="1050" dirty="0" err="1">
+                <a:solidFill>
+                  <a:srgbClr val="1E293B"/>
+                </a:solidFill>
+                <a:latin typeface="Verdana"/>
+              </a:rPr>
+              <a:t>kBtu</a:t>
+            </a:r>
+            <a:r>
+              <a:rPr lang="fr-FR" sz="1050" dirty="0">
+                <a:solidFill>
+                  <a:srgbClr val="1E293B"/>
+                </a:solidFill>
+                <a:latin typeface="Verdana"/>
+              </a:rPr>
+              <a:t>/</a:t>
+            </a:r>
+            <a:r>
+              <a:rPr lang="fr-FR" sz="1050" dirty="0" err="1">
+                <a:solidFill>
+                  <a:srgbClr val="1E293B"/>
+                </a:solidFill>
+                <a:latin typeface="Verdana"/>
+              </a:rPr>
+              <a:t>sf</a:t>
+            </a:r>
+            <a:r>
+              <a:rPr lang="fr-FR" sz="1050" dirty="0">
+                <a:solidFill>
+                  <a:srgbClr val="1E293B"/>
+                </a:solidFill>
+                <a:latin typeface="Verdana"/>
+              </a:rPr>
+              <a:t>) = </a:t>
+            </a:r>
+          </a:p>
+          <a:p>
+            <a:pPr>
+              <a:spcAft>
+                <a:spcPts val="800"/>
+              </a:spcAft>
+              <a:defRPr sz="1200" b="1">
+                <a:solidFill>
+                  <a:srgbClr val="1E293B"/>
+                </a:solidFill>
+                <a:latin typeface="Verdana"/>
+              </a:defRPr>
+            </a:pPr>
+            <a:r>
+              <a:rPr lang="fr-FR" sz="1050" dirty="0" err="1">
+                <a:solidFill>
+                  <a:srgbClr val="1E293B"/>
+                </a:solidFill>
+                <a:latin typeface="Verdana"/>
+              </a:rPr>
+              <a:t>SiteEnergyUse</a:t>
+            </a:r>
+            <a:r>
+              <a:rPr lang="fr-FR" sz="1050" dirty="0">
+                <a:solidFill>
+                  <a:srgbClr val="1E293B"/>
+                </a:solidFill>
+                <a:latin typeface="Verdana"/>
+              </a:rPr>
+              <a:t>(</a:t>
+            </a:r>
+            <a:r>
+              <a:rPr lang="fr-FR" sz="1050" dirty="0" err="1">
+                <a:solidFill>
+                  <a:srgbClr val="1E293B"/>
+                </a:solidFill>
+                <a:latin typeface="Verdana"/>
+              </a:rPr>
+              <a:t>kBtu</a:t>
+            </a:r>
+            <a:r>
+              <a:rPr lang="fr-FR" sz="1050" dirty="0">
+                <a:solidFill>
+                  <a:srgbClr val="1E293B"/>
+                </a:solidFill>
+                <a:latin typeface="Verdana"/>
+              </a:rPr>
+              <a:t>) / </a:t>
+            </a:r>
+            <a:r>
+              <a:rPr lang="fr-FR" sz="1050" dirty="0" err="1">
+                <a:solidFill>
+                  <a:srgbClr val="1E293B"/>
+                </a:solidFill>
+                <a:latin typeface="Verdana"/>
+              </a:rPr>
+              <a:t>PropertyGFATotal</a:t>
+            </a:r>
+            <a:endParaRPr lang="fr-FR" sz="1050" dirty="0">
+              <a:solidFill>
+                <a:srgbClr val="1E293B"/>
+              </a:solidFill>
+              <a:latin typeface="Verdana"/>
+            </a:endParaRPr>
+          </a:p>
+          <a:p>
+            <a:pPr>
+              <a:spcAft>
+                <a:spcPts val="800"/>
+              </a:spcAft>
+              <a:defRPr sz="1200" b="1">
+                <a:solidFill>
+                  <a:srgbClr val="1E293B"/>
+                </a:solidFill>
+                <a:latin typeface="Verdana"/>
+              </a:defRPr>
+            </a:pPr>
+            <a:endParaRPr lang="fr-FR" sz="1050" dirty="0">
+              <a:solidFill>
+                <a:srgbClr val="1E293B"/>
+              </a:solidFill>
+              <a:latin typeface="Verdana"/>
+            </a:endParaRPr>
+          </a:p>
+          <a:p>
+            <a:pPr>
+              <a:spcAft>
+                <a:spcPts val="800"/>
+              </a:spcAft>
+              <a:defRPr sz="1200" b="1">
+                <a:solidFill>
+                  <a:srgbClr val="1E293B"/>
+                </a:solidFill>
+                <a:latin typeface="Verdana"/>
+              </a:defRPr>
+            </a:pPr>
+            <a:r>
+              <a:rPr lang="fr-FR" sz="1050" dirty="0" err="1">
+                <a:solidFill>
+                  <a:srgbClr val="1E293B"/>
+                </a:solidFill>
+                <a:latin typeface="Verdana"/>
+              </a:rPr>
+              <a:t>PropertyGFATotal</a:t>
+            </a:r>
+            <a:r>
+              <a:rPr lang="fr-FR" sz="1050" dirty="0">
+                <a:solidFill>
+                  <a:srgbClr val="1E293B"/>
+                </a:solidFill>
+                <a:latin typeface="Verdana"/>
+              </a:rPr>
+              <a:t> = </a:t>
+            </a:r>
+          </a:p>
+          <a:p>
+            <a:pPr>
+              <a:spcAft>
+                <a:spcPts val="800"/>
+              </a:spcAft>
+              <a:defRPr sz="1200" b="1">
+                <a:solidFill>
+                  <a:srgbClr val="1E293B"/>
+                </a:solidFill>
+                <a:latin typeface="Verdana"/>
+              </a:defRPr>
+            </a:pPr>
+            <a:r>
+              <a:rPr lang="fr-FR" sz="1050" b="1" dirty="0" err="1">
+                <a:solidFill>
+                  <a:srgbClr val="1E293B"/>
+                </a:solidFill>
+                <a:latin typeface="Verdana"/>
+              </a:rPr>
+              <a:t>PropertyGFAParking</a:t>
+            </a:r>
+            <a:r>
+              <a:rPr lang="fr-FR" sz="1050" b="1" dirty="0">
+                <a:solidFill>
+                  <a:srgbClr val="1E293B"/>
+                </a:solidFill>
+                <a:latin typeface="Verdana"/>
+              </a:rPr>
+              <a:t> + </a:t>
+            </a:r>
+            <a:r>
+              <a:rPr lang="fr-FR" sz="1050" b="1" dirty="0" err="1">
+                <a:solidFill>
+                  <a:srgbClr val="1E293B"/>
+                </a:solidFill>
+                <a:latin typeface="Verdana"/>
+              </a:rPr>
+              <a:t>PropertyGFABuilding</a:t>
+            </a:r>
+            <a:r>
+              <a:rPr lang="fr-FR" sz="1050" b="1" dirty="0">
+                <a:solidFill>
+                  <a:srgbClr val="1E293B"/>
+                </a:solidFill>
+                <a:latin typeface="Verdana"/>
+              </a:rPr>
+              <a:t>(s)</a:t>
+            </a:r>
+          </a:p>
+          <a:p>
+            <a:pPr>
+              <a:spcAft>
+                <a:spcPts val="800"/>
+              </a:spcAft>
+              <a:defRPr sz="1200" b="1">
+                <a:solidFill>
+                  <a:srgbClr val="1E293B"/>
+                </a:solidFill>
+                <a:latin typeface="Verdana"/>
+              </a:defRPr>
+            </a:pPr>
+            <a:endParaRPr lang="fr-FR" sz="1050" dirty="0">
+              <a:solidFill>
+                <a:srgbClr val="1E293B"/>
+              </a:solidFill>
+              <a:latin typeface="Verdana"/>
+            </a:endParaRPr>
+          </a:p>
+          <a:p>
+            <a:pPr>
+              <a:spcAft>
+                <a:spcPts val="800"/>
+              </a:spcAft>
+              <a:defRPr sz="1200" b="1">
+                <a:solidFill>
+                  <a:srgbClr val="1E293B"/>
+                </a:solidFill>
+                <a:latin typeface="Verdana"/>
+              </a:defRPr>
+            </a:pPr>
+            <a:endParaRPr lang="fr-FR" b="0" dirty="0">
+              <a:solidFill>
+                <a:srgbClr val="64748B"/>
+              </a:solidFill>
+            </a:endParaRPr>
+          </a:p>
+        </p:txBody>
+      </p:sp>
+      <p:pic>
+        <p:nvPicPr>
+          <p:cNvPr id="9" name="Image 8">
+            <a:extLst>
+              <a:ext uri="{FF2B5EF4-FFF2-40B4-BE49-F238E27FC236}">
+                <a16:creationId xmlns:a16="http://schemas.microsoft.com/office/drawing/2014/main" id="{78C78FA9-1EE8-0C2B-06F0-FD5A09463DF1}"/>
+              </a:ext>
+            </a:extLst>
+          </p:cNvPr>
+          <p:cNvPicPr>
+            <a:picLocks noChangeAspect="1"/>
+          </p:cNvPicPr>
+          <p:nvPr/>
+        </p:nvPicPr>
+        <p:blipFill>
+          <a:blip r:embed="rId3"/>
+          <a:stretch>
+            <a:fillRect/>
+          </a:stretch>
+        </p:blipFill>
+        <p:spPr>
+          <a:xfrm>
+            <a:off x="1408674" y="3329532"/>
+            <a:ext cx="3488990" cy="2872380"/>
+          </a:xfrm>
+          <a:prstGeom prst="rect">
+            <a:avLst/>
+          </a:prstGeom>
+        </p:spPr>
+      </p:pic>
+    </p:spTree>
+  </p:cSld>
+  <p:clrMapOvr>
+    <a:masterClrMapping/>
+  </p:clrMapOvr>
+</p:sld>
+</file>
+
+<file path=ppt/slides/slide6.xml><?xml version="1.0" encoding="utf-8"?>
+<p:sld xmlns:a="http://schemas.openxmlformats.org/drawingml/2006/main" xmlns:r="http://schemas.openxmlformats.org/officeDocument/2006/relationships" xmlns:p="http://schemas.openxmlformats.org/presentationml/2006/main">
+  <p:cSld>
+    <p:bg>
+      <p:bgPr>
+        <a:solidFill>
+          <a:srgbClr val="FAFAFC"/>
+        </a:solidFill>
+        <a:effectLst/>
+      </p:bgPr>
+    </p:bg>
+    <p:spTree>
+      <p:nvGrpSpPr>
+        <p:cNvPr id="1" name=""/>
+        <p:cNvGrpSpPr/>
+        <p:nvPr/>
+      </p:nvGrpSpPr>
+      <p:grpSpPr>
+        <a:xfrm>
+          <a:off x="0" y="0"/>
+          <a:ext cx="0" cy="0"/>
+          <a:chOff x="0" y="0"/>
+          <a:chExt cx="0" cy="0"/>
+        </a:xfrm>
+      </p:grpSpPr>
+      <p:pic>
+        <p:nvPicPr>
+          <p:cNvPr id="11" name="Image 10">
+            <a:extLst>
+              <a:ext uri="{FF2B5EF4-FFF2-40B4-BE49-F238E27FC236}">
+                <a16:creationId xmlns:a16="http://schemas.microsoft.com/office/drawing/2014/main" id="{1F12AFE6-32C2-7324-83B2-713A9FFB2F80}"/>
+              </a:ext>
+            </a:extLst>
+          </p:cNvPr>
+          <p:cNvPicPr>
+            <a:picLocks noChangeAspect="1"/>
+          </p:cNvPicPr>
+          <p:nvPr/>
+        </p:nvPicPr>
+        <p:blipFill>
+          <a:blip r:embed="rId2"/>
+          <a:stretch>
+            <a:fillRect/>
+          </a:stretch>
+        </p:blipFill>
+        <p:spPr>
+          <a:xfrm>
+            <a:off x="-935796" y="142521"/>
+            <a:ext cx="13908423" cy="7593918"/>
+          </a:xfrm>
+          <a:prstGeom prst="rect">
+            <a:avLst/>
+          </a:prstGeom>
+        </p:spPr>
+      </p:pic>
+      <p:sp>
+        <p:nvSpPr>
+          <p:cNvPr id="10" name="Rounded Rectangle 4">
+            <a:extLst>
+              <a:ext uri="{FF2B5EF4-FFF2-40B4-BE49-F238E27FC236}">
+                <a16:creationId xmlns:a16="http://schemas.microsoft.com/office/drawing/2014/main" id="{94345C7D-2306-2ED8-8013-11CD7317E9C1}"/>
+              </a:ext>
+            </a:extLst>
+          </p:cNvPr>
+          <p:cNvSpPr/>
+          <p:nvPr/>
+        </p:nvSpPr>
+        <p:spPr>
+          <a:xfrm>
+            <a:off x="524396" y="3939480"/>
+            <a:ext cx="10988041" cy="2464668"/>
+          </a:xfrm>
+          <a:prstGeom prst="roundRect">
+            <a:avLst/>
+          </a:prstGeom>
+          <a:ln/>
+        </p:spPr>
+        <p:style>
+          <a:lnRef idx="2">
+            <a:schemeClr val="accent5"/>
+          </a:lnRef>
+          <a:fillRef idx="1">
+            <a:schemeClr val="lt1"/>
+          </a:fillRef>
+          <a:effectRef idx="0">
+            <a:schemeClr val="accent5"/>
+          </a:effectRef>
+          <a:fontRef idx="minor">
+            <a:schemeClr val="dk1"/>
+          </a:fontRef>
+        </p:style>
+        <p:txBody>
+          <a:bodyPr wrap="square" lIns="274320" tIns="274320" rIns="274320" rtlCol="0" anchor="t"/>
+          <a:lstStyle/>
+          <a:p>
+            <a:pPr algn="ctr">
+              <a:spcAft>
+                <a:spcPts val="1000"/>
+              </a:spcAft>
+              <a:defRPr sz="1600" b="1">
+                <a:solidFill>
+                  <a:srgbClr val="1E293B"/>
+                </a:solidFill>
+                <a:latin typeface="Georgia"/>
+              </a:defRPr>
+            </a:pPr>
+            <a:r>
+              <a:rPr lang="fr-FR" dirty="0">
+                <a:solidFill>
+                  <a:schemeClr val="tx2">
+                    <a:lumMod val="60000"/>
+                    <a:lumOff val="40000"/>
+                  </a:schemeClr>
+                </a:solidFill>
+              </a:rPr>
+              <a:t>Création des </a:t>
+            </a:r>
+            <a:r>
+              <a:rPr lang="fr-FR" dirty="0" err="1">
+                <a:solidFill>
+                  <a:schemeClr val="tx2">
+                    <a:lumMod val="60000"/>
+                    <a:lumOff val="40000"/>
+                  </a:schemeClr>
+                </a:solidFill>
+              </a:rPr>
+              <a:t>Features</a:t>
+            </a:r>
+            <a:r>
+              <a:rPr lang="fr-FR" dirty="0">
+                <a:solidFill>
+                  <a:schemeClr val="tx2">
+                    <a:lumMod val="60000"/>
+                    <a:lumOff val="40000"/>
+                  </a:schemeClr>
+                </a:solidFill>
+              </a:rPr>
+              <a:t>  </a:t>
+            </a:r>
+            <a:endParaRPr dirty="0">
+              <a:solidFill>
+                <a:schemeClr val="tx2">
+                  <a:lumMod val="60000"/>
+                  <a:lumOff val="40000"/>
+                </a:schemeClr>
+              </a:solidFill>
+            </a:endParaRPr>
+          </a:p>
+        </p:txBody>
+      </p:sp>
+      <p:sp>
+        <p:nvSpPr>
+          <p:cNvPr id="2" name="Rectangle 1"/>
+          <p:cNvSpPr/>
+          <p:nvPr/>
+        </p:nvSpPr>
+        <p:spPr>
+          <a:xfrm>
+            <a:off x="0" y="0"/>
+            <a:ext cx="12191695" cy="1371600"/>
+          </a:xfrm>
+          <a:prstGeom prst="rect">
+            <a:avLst/>
+          </a:prstGeom>
+          <a:ln/>
+        </p:spPr>
+        <p:style>
+          <a:lnRef idx="0">
+            <a:schemeClr val="dk1"/>
+          </a:lnRef>
+          <a:fillRef idx="3">
+            <a:schemeClr val="dk1"/>
+          </a:fillRef>
+          <a:effectRef idx="3">
+            <a:schemeClr val="dk1"/>
+          </a:effectRef>
+          <a:fontRef idx="minor">
+            <a:schemeClr val="lt1"/>
+          </a:fontRef>
+        </p:style>
+        <p:txBody>
+          <a:bodyPr rtlCol="0" anchor="ctr"/>
+          <a:lstStyle/>
+          <a:p>
+            <a:pPr algn="ctr"/>
+            <a:endParaRPr/>
+          </a:p>
+        </p:txBody>
+      </p:sp>
+      <p:sp>
+        <p:nvSpPr>
+          <p:cNvPr id="3" name="Rectangle 2"/>
+          <p:cNvSpPr/>
+          <p:nvPr/>
+        </p:nvSpPr>
+        <p:spPr>
+          <a:xfrm>
+            <a:off x="0" y="1353312"/>
+            <a:ext cx="12191695" cy="25400"/>
+          </a:xfrm>
+          <a:prstGeom prst="rect">
+            <a:avLst/>
+          </a:prstGeom>
+          <a:solidFill>
+            <a:srgbClr val="0284C7"/>
+          </a:solidFill>
+          <a:ln>
+            <a:noFill/>
+          </a:ln>
+        </p:spPr>
+        <p:style>
+          <a:lnRef idx="1">
+            <a:schemeClr val="accent1"/>
+          </a:lnRef>
+          <a:fillRef idx="3">
+            <a:schemeClr val="accent1"/>
+          </a:fillRef>
+          <a:effectRef idx="2">
+            <a:schemeClr val="accent1"/>
+          </a:effectRef>
+          <a:fontRef idx="minor">
+            <a:schemeClr val="lt1"/>
+          </a:fontRef>
+        </p:style>
+        <p:txBody>
+          <a:bodyPr rtlCol="0" anchor="ctr"/>
+          <a:lstStyle/>
+          <a:p>
+            <a:pPr algn="ctr"/>
+            <a:endParaRPr/>
+          </a:p>
+        </p:txBody>
+      </p:sp>
+      <p:sp>
+        <p:nvSpPr>
+          <p:cNvPr id="4" name="TextBox 3"/>
+          <p:cNvSpPr txBox="1"/>
+          <p:nvPr/>
+        </p:nvSpPr>
+        <p:spPr>
+          <a:xfrm>
+            <a:off x="731520" y="320040"/>
+            <a:ext cx="10698480" cy="492443"/>
+          </a:xfrm>
+          <a:prstGeom prst="rect">
+            <a:avLst/>
+          </a:prstGeom>
+          <a:noFill/>
+        </p:spPr>
+        <p:txBody>
+          <a:bodyPr wrap="square">
+            <a:spAutoFit/>
+          </a:bodyPr>
+          <a:lstStyle/>
+          <a:p>
+            <a:pPr algn="l">
+              <a:defRPr sz="2600" b="1">
+                <a:solidFill>
+                  <a:srgbClr val="0F172A"/>
+                </a:solidFill>
+                <a:latin typeface="Georgia"/>
+              </a:defRPr>
+            </a:pPr>
+            <a:r>
+              <a:rPr lang="fr-FR" dirty="0">
+                <a:solidFill>
+                  <a:schemeClr val="bg1"/>
+                </a:solidFill>
+              </a:rPr>
+              <a:t>3 - </a:t>
+            </a:r>
+            <a:r>
+              <a:rPr dirty="0" err="1">
+                <a:solidFill>
+                  <a:schemeClr val="bg1"/>
+                </a:solidFill>
+              </a:rPr>
               <a:t>Création</a:t>
             </a:r>
             <a:r>
-              <a:rPr dirty="0"/>
+              <a:rPr dirty="0">
+                <a:solidFill>
+                  <a:schemeClr val="bg1"/>
+                </a:solidFill>
+              </a:rPr>
               <a:t> de Variables &amp; </a:t>
             </a:r>
             <a:r>
-              <a:rPr dirty="0" err="1"/>
-              <a:t>Stratégie</a:t>
-            </a:r>
-            <a:r>
-              <a:rPr dirty="0"/>
-              <a:t> </a:t>
-            </a:r>
-            <a:r>
-              <a:rPr dirty="0" err="1"/>
-              <a:t>d'Encodage</a:t>
-            </a:r>
-            <a:r>
-              <a:rPr dirty="0"/>
+              <a:rPr dirty="0" err="1">
+                <a:solidFill>
+                  <a:schemeClr val="bg1"/>
+                </a:solidFill>
+              </a:rPr>
+              <a:t>Encodage</a:t>
+            </a:r>
+            <a:r>
+              <a:rPr dirty="0">
+                <a:solidFill>
+                  <a:schemeClr val="bg1"/>
+                </a:solidFill>
+              </a:rPr>
               <a:t> / </a:t>
             </a:r>
             <a:r>
-              <a:rPr dirty="0" err="1"/>
+              <a:rPr dirty="0" err="1">
+                <a:solidFill>
+                  <a:schemeClr val="bg1"/>
+                </a:solidFill>
+              </a:rPr>
               <a:t>Normalisation</a:t>
             </a:r>
-            <a:endParaRPr dirty="0"/>
+            <a:endParaRPr dirty="0">
+              <a:solidFill>
+                <a:schemeClr val="bg1"/>
+              </a:solidFill>
+            </a:endParaRPr>
           </a:p>
         </p:txBody>
       </p:sp>
@@ -5928,14 +9688,31 @@
             <p:ph type="ftr" sz="quarter" idx="11"/>
           </p:nvPr>
         </p:nvSpPr>
-        <p:spPr/>
+        <p:spPr>
+          <a:xfrm>
+            <a:off x="3124200" y="6393294"/>
+            <a:ext cx="2895600" cy="365125"/>
+          </a:xfrm>
+        </p:spPr>
         <p:txBody>
           <a:bodyPr/>
           <a:lstStyle/>
           <a:p>
             <a:r>
-              <a:rPr lang="en-US"/>
-              <a:t>Modélisation Prédictive (Machine Learning)</a:t>
+              <a:rPr lang="en-US" dirty="0" err="1"/>
+              <a:t>Modélisation</a:t>
+            </a:r>
+            <a:r>
+              <a:rPr lang="en-US" dirty="0"/>
+              <a:t> </a:t>
+            </a:r>
+            <a:r>
+              <a:rPr lang="en-US" dirty="0" err="1"/>
+              <a:t>Prédictive</a:t>
+            </a:r>
+            <a:r>
+              <a:rPr lang="en-US" dirty="0"/>
+              <a:t> (Machine Learning)</a:t>
             </a:r>
           </a:p>
         </p:txBody>
@@ -5956,14 +9733,19 @@
             <p:ph type="sldNum" sz="quarter" idx="12"/>
           </p:nvPr>
         </p:nvSpPr>
-        <p:spPr/>
+        <p:spPr>
+          <a:xfrm>
+            <a:off x="6553200" y="6393294"/>
+            <a:ext cx="2133600" cy="365125"/>
+          </a:xfrm>
+        </p:spPr>
         <p:txBody>
           <a:bodyPr/>
           <a:lstStyle/>
           <a:p>
             <a:fld id="{C1FF6DA9-008F-8B48-92A6-B652298478BF}" type="slidenum">
               <a:rPr lang="en-US" smtClean="0"/>
-              <a:t>5</a:t>
+              <a:t>6</a:t>
             </a:fld>
             <a:endParaRPr lang="en-US"/>
           </a:p>
@@ -5984,14 +9766,14 @@
           <p:nvPr>
             <p:extLst>
               <p:ext uri="{D42A27DB-BD31-4B8C-83A1-F6EECF244321}">
-                <p14:modId xmlns:p14="http://schemas.microsoft.com/office/powerpoint/2010/main" val="1212861616"/>
+                <p14:modId xmlns:p14="http://schemas.microsoft.com/office/powerpoint/2010/main" val="3728796012"/>
               </p:ext>
             </p:extLst>
           </p:nvPr>
         </p:nvGraphicFramePr>
         <p:xfrm>
-          <a:off x="782320" y="1773382"/>
-          <a:ext cx="10647680" cy="1912799"/>
+          <a:off x="1187741" y="4655337"/>
+          <a:ext cx="9816518" cy="1676400"/>
         </p:xfrm>
         <a:graphic>
           <a:graphicData uri="http://schemas.openxmlformats.org/drawingml/2006/table">
@@ -6000,21 +9782,21 @@
                 <a:tableStyleId>{5C22544A-7EE6-4342-B048-85BDC9FD1C3A}</a:tableStyleId>
               </a:tblPr>
               <a:tblGrid>
-                <a:gridCol w="3087716">
+                <a:gridCol w="2846688">
                   <a:extLst>
                     <a:ext uri="{9D8B030D-6E8A-4147-A177-3AD203B41FA5}">
                       <a16:colId xmlns:a16="http://schemas.microsoft.com/office/drawing/2014/main" val="20000"/>
                     </a:ext>
                   </a:extLst>
                 </a:gridCol>
-                <a:gridCol w="1893455">
+                <a:gridCol w="1745652">
                   <a:extLst>
                     <a:ext uri="{9D8B030D-6E8A-4147-A177-3AD203B41FA5}">
                       <a16:colId xmlns:a16="http://schemas.microsoft.com/office/drawing/2014/main" val="1402259042"/>
                     </a:ext>
                   </a:extLst>
                 </a:gridCol>
-                <a:gridCol w="5666509">
+                <a:gridCol w="5224178">
                   <a:extLst>
                     <a:ext uri="{9D8B030D-6E8A-4147-A177-3AD203B41FA5}">
                       <a16:colId xmlns:a16="http://schemas.microsoft.com/office/drawing/2014/main" val="20004"/>
@@ -6022,7 +9804,7 @@
                   </a:extLst>
                 </a:gridCol>
               </a:tblGrid>
-              <a:tr h="560059">
+              <a:tr h="465442">
                 <a:tc>
                   <a:txBody>
                     <a:bodyPr/>
@@ -6095,7 +9877,7 @@
                   </a:ext>
                 </a:extLst>
               </a:tr>
-              <a:tr h="438340">
+              <a:tr h="267388">
                 <a:tc>
                   <a:txBody>
                     <a:bodyPr/>
@@ -6166,7 +9948,7 @@
                   </a:ext>
                 </a:extLst>
               </a:tr>
-              <a:tr h="438340">
+              <a:tr h="436352">
                 <a:tc>
                   <a:txBody>
                     <a:bodyPr/>
@@ -6260,7 +10042,7 @@
                   </a:ext>
                 </a:extLst>
               </a:tr>
-              <a:tr h="438340">
+              <a:tr h="436352">
                 <a:tc>
                   <a:txBody>
                     <a:bodyPr/>
@@ -6357,6 +10139,426 @@
           </a:graphicData>
         </a:graphic>
       </p:graphicFrame>
+      <p:sp>
+        <p:nvSpPr>
+          <p:cNvPr id="5" name="Rounded Rectangle 4">
+            <a:extLst>
+              <a:ext uri="{FF2B5EF4-FFF2-40B4-BE49-F238E27FC236}">
+                <a16:creationId xmlns:a16="http://schemas.microsoft.com/office/drawing/2014/main" id="{B2A816A6-D961-C09A-BEFE-E2E694A82194}"/>
+              </a:ext>
+            </a:extLst>
+          </p:cNvPr>
+          <p:cNvSpPr/>
+          <p:nvPr/>
+        </p:nvSpPr>
+        <p:spPr>
+          <a:xfrm>
+            <a:off x="6126480" y="1599794"/>
+            <a:ext cx="5303520" cy="2267275"/>
+          </a:xfrm>
+          <a:prstGeom prst="roundRect">
+            <a:avLst/>
+          </a:prstGeom>
+          <a:ln/>
+        </p:spPr>
+        <p:style>
+          <a:lnRef idx="2">
+            <a:schemeClr val="accent3"/>
+          </a:lnRef>
+          <a:fillRef idx="1">
+            <a:schemeClr val="lt1"/>
+          </a:fillRef>
+          <a:effectRef idx="0">
+            <a:schemeClr val="accent3"/>
+          </a:effectRef>
+          <a:fontRef idx="minor">
+            <a:schemeClr val="dk1"/>
+          </a:fontRef>
+        </p:style>
+        <p:txBody>
+          <a:bodyPr wrap="square" lIns="274320" tIns="274320" rIns="274320" rtlCol="0" anchor="ctr"/>
+          <a:lstStyle/>
+          <a:p>
+            <a:pPr algn="ctr">
+              <a:spcAft>
+                <a:spcPts val="1000"/>
+              </a:spcAft>
+              <a:defRPr sz="1600" b="1">
+                <a:solidFill>
+                  <a:srgbClr val="1E293B"/>
+                </a:solidFill>
+                <a:latin typeface="Georgia"/>
+              </a:defRPr>
+            </a:pPr>
+            <a:r>
+              <a:rPr lang="fr-FR" dirty="0">
+                <a:solidFill>
+                  <a:schemeClr val="accent3">
+                    <a:lumMod val="75000"/>
+                  </a:schemeClr>
+                </a:solidFill>
+              </a:rPr>
+              <a:t>Normalisation de toutes les variables numériques  </a:t>
+            </a:r>
+          </a:p>
+          <a:p>
+            <a:pPr algn="ctr">
+              <a:spcAft>
+                <a:spcPts val="1000"/>
+              </a:spcAft>
+              <a:defRPr sz="1600" b="1">
+                <a:solidFill>
+                  <a:srgbClr val="1E293B"/>
+                </a:solidFill>
+                <a:latin typeface="Georgia"/>
+              </a:defRPr>
+            </a:pPr>
+            <a:endParaRPr sz="200" dirty="0"/>
+          </a:p>
+          <a:p>
+            <a:pPr>
+              <a:spcAft>
+                <a:spcPts val="800"/>
+              </a:spcAft>
+              <a:defRPr sz="1200" b="1">
+                <a:solidFill>
+                  <a:srgbClr val="1E293B"/>
+                </a:solidFill>
+                <a:latin typeface="Verdana"/>
+              </a:defRPr>
+            </a:pPr>
+            <a:r>
+              <a:rPr lang="fr-FR" b="0" dirty="0">
+                <a:solidFill>
+                  <a:srgbClr val="64748B"/>
+                </a:solidFill>
+              </a:rPr>
+              <a:t>Les variables numériques ont été normalisées avec la </a:t>
+            </a:r>
+            <a:r>
+              <a:rPr lang="fr-FR" b="0" dirty="0" err="1">
+                <a:solidFill>
+                  <a:srgbClr val="64748B"/>
+                </a:solidFill>
+              </a:rPr>
+              <a:t>methode</a:t>
+            </a:r>
+            <a:r>
+              <a:rPr lang="fr-FR" b="0" dirty="0">
+                <a:solidFill>
+                  <a:srgbClr val="64748B"/>
+                </a:solidFill>
+              </a:rPr>
+              <a:t> </a:t>
+            </a:r>
+            <a:r>
+              <a:rPr lang="fr-FR" sz="1200" dirty="0" err="1">
+                <a:solidFill>
+                  <a:srgbClr val="1E293B"/>
+                </a:solidFill>
+                <a:latin typeface="Verdana"/>
+              </a:rPr>
+              <a:t>MinMaxScaler</a:t>
+            </a:r>
+            <a:r>
+              <a:rPr lang="fr-FR" sz="1200" dirty="0">
+                <a:solidFill>
+                  <a:srgbClr val="1E293B"/>
+                </a:solidFill>
+                <a:latin typeface="Verdana"/>
+              </a:rPr>
+              <a:t> </a:t>
+            </a:r>
+          </a:p>
+          <a:p>
+            <a:pPr>
+              <a:spcAft>
+                <a:spcPts val="800"/>
+              </a:spcAft>
+              <a:defRPr sz="1200" b="1">
+                <a:solidFill>
+                  <a:srgbClr val="1E293B"/>
+                </a:solidFill>
+                <a:latin typeface="Verdana"/>
+              </a:defRPr>
+            </a:pPr>
+            <a:endParaRPr lang="fr-FR" sz="800" dirty="0">
+              <a:solidFill>
+                <a:srgbClr val="1E293B"/>
+              </a:solidFill>
+              <a:latin typeface="Verdana"/>
+            </a:endParaRPr>
+          </a:p>
+          <a:p>
+            <a:pPr>
+              <a:spcAft>
+                <a:spcPts val="800"/>
+              </a:spcAft>
+              <a:defRPr sz="1200" b="1">
+                <a:solidFill>
+                  <a:srgbClr val="1E293B"/>
+                </a:solidFill>
+                <a:latin typeface="Verdana"/>
+              </a:defRPr>
+            </a:pPr>
+            <a:r>
+              <a:rPr lang="fr-FR" sz="1200" dirty="0">
+                <a:solidFill>
+                  <a:srgbClr val="1E293B"/>
+                </a:solidFill>
+                <a:latin typeface="Verdana"/>
+              </a:rPr>
+              <a:t>Attention : pour faire le </a:t>
+            </a:r>
+            <a:r>
+              <a:rPr lang="fr-FR" sz="1200" dirty="0" err="1">
+                <a:solidFill>
+                  <a:srgbClr val="1E293B"/>
+                </a:solidFill>
+                <a:latin typeface="Verdana"/>
+              </a:rPr>
+              <a:t>MinMaxScaler</a:t>
+            </a:r>
+            <a:r>
+              <a:rPr lang="fr-FR" sz="1200" dirty="0">
+                <a:solidFill>
+                  <a:srgbClr val="1E293B"/>
+                </a:solidFill>
+                <a:latin typeface="Verdana"/>
+              </a:rPr>
+              <a:t> il faut d’abord </a:t>
+            </a:r>
+            <a:r>
+              <a:rPr lang="fr-FR" sz="1200" dirty="0" err="1">
+                <a:solidFill>
+                  <a:srgbClr val="1E293B"/>
+                </a:solidFill>
+                <a:latin typeface="Verdana"/>
+              </a:rPr>
+              <a:t>spliter</a:t>
+            </a:r>
+            <a:r>
+              <a:rPr lang="fr-FR" sz="1200" dirty="0">
+                <a:solidFill>
+                  <a:srgbClr val="1E293B"/>
+                </a:solidFill>
+                <a:latin typeface="Verdana"/>
+              </a:rPr>
+              <a:t> les datasets X et y</a:t>
+            </a:r>
+          </a:p>
+          <a:p>
+            <a:pPr>
+              <a:spcAft>
+                <a:spcPts val="800"/>
+              </a:spcAft>
+              <a:defRPr sz="1200" b="1">
+                <a:solidFill>
+                  <a:srgbClr val="1E293B"/>
+                </a:solidFill>
+                <a:latin typeface="Verdana"/>
+              </a:defRPr>
+            </a:pPr>
+            <a:endParaRPr lang="fr-FR" sz="1200" dirty="0">
+              <a:solidFill>
+                <a:srgbClr val="1E293B"/>
+              </a:solidFill>
+              <a:latin typeface="Verdana"/>
+            </a:endParaRPr>
+          </a:p>
+          <a:p>
+            <a:pPr>
+              <a:spcAft>
+                <a:spcPts val="800"/>
+              </a:spcAft>
+              <a:defRPr sz="1200" b="1">
+                <a:solidFill>
+                  <a:srgbClr val="1E293B"/>
+                </a:solidFill>
+                <a:latin typeface="Verdana"/>
+              </a:defRPr>
+            </a:pPr>
+            <a:r>
+              <a:rPr lang="fr-FR" b="0" dirty="0">
+                <a:solidFill>
+                  <a:srgbClr val="64748B"/>
+                </a:solidFill>
+              </a:rPr>
+              <a:t> </a:t>
+            </a:r>
+            <a:endParaRPr b="0" dirty="0">
+              <a:solidFill>
+                <a:srgbClr val="64748B"/>
+              </a:solidFill>
+            </a:endParaRPr>
+          </a:p>
+        </p:txBody>
+      </p:sp>
+      <p:sp>
+        <p:nvSpPr>
+          <p:cNvPr id="9" name="Rounded Rectangle 4">
+            <a:extLst>
+              <a:ext uri="{FF2B5EF4-FFF2-40B4-BE49-F238E27FC236}">
+                <a16:creationId xmlns:a16="http://schemas.microsoft.com/office/drawing/2014/main" id="{FAE1A3D8-C2D2-E5C7-9178-E37ED241D997}"/>
+              </a:ext>
+            </a:extLst>
+          </p:cNvPr>
+          <p:cNvSpPr/>
+          <p:nvPr/>
+        </p:nvSpPr>
+        <p:spPr>
+          <a:xfrm>
+            <a:off x="472440" y="1604790"/>
+            <a:ext cx="5303520" cy="2262279"/>
+          </a:xfrm>
+          <a:prstGeom prst="roundRect">
+            <a:avLst/>
+          </a:prstGeom>
+          <a:ln/>
+        </p:spPr>
+        <p:style>
+          <a:lnRef idx="2">
+            <a:schemeClr val="accent6"/>
+          </a:lnRef>
+          <a:fillRef idx="1">
+            <a:schemeClr val="lt1"/>
+          </a:fillRef>
+          <a:effectRef idx="0">
+            <a:schemeClr val="accent6"/>
+          </a:effectRef>
+          <a:fontRef idx="minor">
+            <a:schemeClr val="dk1"/>
+          </a:fontRef>
+        </p:style>
+        <p:txBody>
+          <a:bodyPr wrap="square" lIns="274320" tIns="274320" rIns="274320" rtlCol="0" anchor="t"/>
+          <a:lstStyle/>
+          <a:p>
+            <a:pPr algn="ctr">
+              <a:spcAft>
+                <a:spcPts val="1000"/>
+              </a:spcAft>
+              <a:defRPr sz="1600" b="1">
+                <a:solidFill>
+                  <a:srgbClr val="1E293B"/>
+                </a:solidFill>
+                <a:latin typeface="Georgia"/>
+              </a:defRPr>
+            </a:pPr>
+            <a:r>
+              <a:rPr lang="fr-FR" dirty="0">
+                <a:solidFill>
+                  <a:schemeClr val="accent6">
+                    <a:lumMod val="75000"/>
+                  </a:schemeClr>
+                </a:solidFill>
+              </a:rPr>
+              <a:t>Encodage de la variable catégorielle </a:t>
+            </a:r>
+          </a:p>
+          <a:p>
+            <a:pPr algn="ctr">
+              <a:spcAft>
+                <a:spcPts val="1000"/>
+              </a:spcAft>
+              <a:defRPr sz="1600" b="1">
+                <a:solidFill>
+                  <a:srgbClr val="1E293B"/>
+                </a:solidFill>
+                <a:latin typeface="Georgia"/>
+              </a:defRPr>
+            </a:pPr>
+            <a:endParaRPr sz="1050" dirty="0"/>
+          </a:p>
+          <a:p>
+            <a:pPr>
+              <a:spcAft>
+                <a:spcPts val="800"/>
+              </a:spcAft>
+              <a:defRPr sz="1200" b="1">
+                <a:solidFill>
+                  <a:srgbClr val="1E293B"/>
+                </a:solidFill>
+                <a:latin typeface="Verdana"/>
+              </a:defRPr>
+            </a:pPr>
+            <a:r>
+              <a:rPr lang="fr-FR" b="0" dirty="0">
+                <a:solidFill>
+                  <a:srgbClr val="64748B"/>
+                </a:solidFill>
+              </a:rPr>
+              <a:t>La variable « </a:t>
+            </a:r>
+            <a:r>
+              <a:rPr lang="fr-FR" b="0" dirty="0" err="1">
+                <a:solidFill>
+                  <a:srgbClr val="64748B"/>
+                </a:solidFill>
+              </a:rPr>
+              <a:t>neighborhood</a:t>
+            </a:r>
+            <a:r>
+              <a:rPr lang="fr-FR" b="0" dirty="0">
+                <a:solidFill>
+                  <a:srgbClr val="64748B"/>
+                </a:solidFill>
+              </a:rPr>
+              <a:t> » est une catégorie non ordinale donc j’ai utilisé la librairie </a:t>
+            </a:r>
+            <a:r>
+              <a:rPr lang="fr-FR" sz="1200" b="1" dirty="0" err="1">
+                <a:solidFill>
+                  <a:srgbClr val="1E293B"/>
+                </a:solidFill>
+                <a:latin typeface="Verdana"/>
+              </a:rPr>
+              <a:t>Category_Encoders</a:t>
+            </a:r>
+            <a:r>
+              <a:rPr lang="fr-FR" sz="1200" b="1" dirty="0">
+                <a:solidFill>
+                  <a:srgbClr val="1E293B"/>
+                </a:solidFill>
+                <a:latin typeface="Verdana"/>
+              </a:rPr>
+              <a:t>.</a:t>
+            </a:r>
+            <a:endParaRPr lang="fr-FR" sz="1200" dirty="0">
+              <a:solidFill>
+                <a:srgbClr val="1E293B"/>
+              </a:solidFill>
+              <a:latin typeface="Verdana"/>
+            </a:endParaRPr>
+          </a:p>
+          <a:p>
+            <a:pPr>
+              <a:spcAft>
+                <a:spcPts val="800"/>
+              </a:spcAft>
+              <a:defRPr sz="1200" b="1">
+                <a:solidFill>
+                  <a:srgbClr val="1E293B"/>
+                </a:solidFill>
+                <a:latin typeface="Verdana"/>
+              </a:defRPr>
+            </a:pPr>
+            <a:r>
+              <a:rPr lang="fr-FR" b="0" dirty="0">
+                <a:solidFill>
+                  <a:srgbClr val="64748B"/>
+                </a:solidFill>
+              </a:rPr>
+              <a:t>Ca a pour effet de créer 4 nouvelles colonnes pour l’encodage binaire de chaque catégorie </a:t>
+            </a:r>
+            <a:endParaRPr b="0" dirty="0">
+              <a:solidFill>
+                <a:srgbClr val="64748B"/>
+              </a:solidFill>
+            </a:endParaRPr>
+          </a:p>
+        </p:txBody>
+      </p:sp>
     </p:spTree>
   </p:cSld>
   <p:clrMapOvr>
@@ -6365,7 +10567,7 @@
 </p:sld>
 </file>
 
-<file path=ppt/slides/slide6.xml><?xml version="1.0" encoding="utf-8"?>
+<file path=ppt/slides/slide7.xml><?xml version="1.0" encoding="utf-8"?>
 <p:sld xmlns:a="http://schemas.openxmlformats.org/drawingml/2006/main" xmlns:r="http://schemas.openxmlformats.org/officeDocument/2006/relationships" xmlns:p="http://schemas.openxmlformats.org/presentationml/2006/main">
   <p:cSld>
     <p:bg>
@@ -6390,6 +10592,36 @@
           <a:chExt cx="0" cy="0"/>
         </a:xfrm>
       </p:grpSpPr>
+      <p:pic>
+        <p:nvPicPr>
+          <p:cNvPr id="9" name="Image 8">
+            <a:extLst>
+              <a:ext uri="{FF2B5EF4-FFF2-40B4-BE49-F238E27FC236}">
+                <a16:creationId xmlns:a16="http://schemas.microsoft.com/office/drawing/2014/main" id="{470E9E33-05C0-68E3-7249-6478F7E65A3C}"/>
+              </a:ext>
+            </a:extLst>
+          </p:cNvPr>
+          <p:cNvPicPr>
+            <a:picLocks noChangeAspect="1"/>
+          </p:cNvPicPr>
+          <p:nvPr/>
+        </p:nvPicPr>
+        <p:blipFill>
+          <a:blip r:embed="rId2"/>
+          <a:stretch>
+            <a:fillRect/>
+          </a:stretch>
+        </p:blipFill>
+        <p:spPr>
+          <a:xfrm>
+            <a:off x="1522085" y="202133"/>
+            <a:ext cx="13908423" cy="7593918"/>
+          </a:xfrm>
+          <a:prstGeom prst="rect">
+            <a:avLst/>
+          </a:prstGeom>
+        </p:spPr>
+      </p:pic>
       <p:sp>
         <p:nvSpPr>
           <p:cNvPr id="2" name="Rectangle 1"/>
@@ -6404,22 +10636,17 @@
           <a:prstGeom prst="rect">
             <a:avLst/>
           </a:prstGeom>
-          <a:solidFill>
-            <a:srgbClr val="FFFFFF"/>
-          </a:solidFill>
-          <a:ln>
-            <a:noFill/>
-          </a:ln>
+          <a:ln/>
         </p:spPr>
         <p:style>
-          <a:lnRef idx="1">
-            <a:schemeClr val="accent1"/>
+          <a:lnRef idx="0">
+            <a:schemeClr val="dk1"/>
           </a:lnRef>
           <a:fillRef idx="3">
-            <a:schemeClr val="accent1"/>
+            <a:schemeClr val="dk1"/>
           </a:fillRef>
-          <a:effectRef idx="2">
-            <a:schemeClr val="accent1"/>
+          <a:effectRef idx="3">
+            <a:schemeClr val="dk1"/>
           </a:effectRef>
           <a:fontRef idx="minor">
             <a:schemeClr val="lt1"/>
@@ -6486,8 +10713,8 @@
         </p:nvSpPr>
         <p:spPr>
           <a:xfrm>
-            <a:off x="731520" y="320040"/>
-            <a:ext cx="10698480" cy="492443"/>
+            <a:off x="452581" y="421639"/>
+            <a:ext cx="11060545" cy="492443"/>
           </a:xfrm>
           <a:prstGeom prst="rect">
             <a:avLst/>
@@ -6500,7 +10727,7 @@
           </a:bodyPr>
           <a:lstStyle/>
           <a:p>
-            <a:pPr algn="l">
+            <a:pPr>
               <a:defRPr sz="2600" b="1">
                 <a:solidFill>
                   <a:srgbClr val="0F172A"/>
@@ -6509,22 +10736,34 @@
               </a:defRPr>
             </a:pPr>
             <a:r>
-              <a:rPr dirty="0"/>
-              <a:t>Choix des </a:t>
-            </a:r>
-            <a:r>
-              <a:rPr dirty="0" err="1"/>
-              <a:t>Algorithmes</a:t>
-            </a:r>
-            <a:r>
-              <a:rPr dirty="0"/>
-              <a:t> &amp; Protocole de Validation </a:t>
-            </a:r>
-            <a:r>
-              <a:rPr dirty="0" err="1"/>
-              <a:t>Croisée</a:t>
-            </a:r>
-            <a:endParaRPr dirty="0"/>
+              <a:rPr lang="fr-FR" dirty="0">
+                <a:solidFill>
+                  <a:schemeClr val="bg1"/>
+                </a:solidFill>
+              </a:rPr>
+              <a:t>4 - Validation Croisée </a:t>
+            </a:r>
+            <a:r>
+              <a:rPr dirty="0">
+                <a:solidFill>
+                  <a:schemeClr val="bg1"/>
+                </a:solidFill>
+              </a:rPr>
+              <a:t>&amp;</a:t>
+            </a:r>
+            <a:r>
+              <a:rPr lang="fr-FR" dirty="0">
+                <a:solidFill>
+                  <a:schemeClr val="bg1"/>
+                </a:solidFill>
+              </a:rPr>
+              <a:t> Entraînement des modèles </a:t>
+            </a:r>
+            <a:endParaRPr dirty="0">
+              <a:solidFill>
+                <a:schemeClr val="bg1"/>
+              </a:solidFill>
+            </a:endParaRPr>
           </a:p>
         </p:txBody>
       </p:sp>
@@ -6591,9 +10830,483 @@
           <a:p>
             <a:fld id="{C1FF6DA9-008F-8B48-92A6-B652298478BF}" type="slidenum">
               <a:rPr lang="en-US" smtClean="0"/>
-              <a:t>6</a:t>
+              <a:t>7</a:t>
             </a:fld>
             <a:endParaRPr lang="en-US"/>
+          </a:p>
+        </p:txBody>
+      </p:sp>
+      <p:sp>
+        <p:nvSpPr>
+          <p:cNvPr id="5" name="Rounded Rectangle 4">
+            <a:extLst>
+              <a:ext uri="{FF2B5EF4-FFF2-40B4-BE49-F238E27FC236}">
+                <a16:creationId xmlns:a16="http://schemas.microsoft.com/office/drawing/2014/main" id="{B9B85D28-EB82-7BD4-353A-82183CD7B4DD}"/>
+              </a:ext>
+            </a:extLst>
+          </p:cNvPr>
+          <p:cNvSpPr/>
+          <p:nvPr/>
+        </p:nvSpPr>
+        <p:spPr>
+          <a:xfrm>
+            <a:off x="523937" y="1615774"/>
+            <a:ext cx="5943770" cy="3234897"/>
+          </a:xfrm>
+          <a:prstGeom prst="roundRect">
+            <a:avLst/>
+          </a:prstGeom>
+          <a:ln/>
+        </p:spPr>
+        <p:style>
+          <a:lnRef idx="2">
+            <a:schemeClr val="accent2"/>
+          </a:lnRef>
+          <a:fillRef idx="1">
+            <a:schemeClr val="lt1"/>
+          </a:fillRef>
+          <a:effectRef idx="0">
+            <a:schemeClr val="accent2"/>
+          </a:effectRef>
+          <a:fontRef idx="minor">
+            <a:schemeClr val="dk1"/>
+          </a:fontRef>
+        </p:style>
+        <p:txBody>
+          <a:bodyPr wrap="square" lIns="274320" tIns="274320" rIns="274320" rtlCol="0" anchor="ctr"/>
+          <a:lstStyle/>
+          <a:p>
+            <a:pPr algn="ctr">
+              <a:spcAft>
+                <a:spcPts val="1000"/>
+              </a:spcAft>
+              <a:defRPr sz="1600" b="1">
+                <a:solidFill>
+                  <a:srgbClr val="1E293B"/>
+                </a:solidFill>
+                <a:latin typeface="Georgia"/>
+              </a:defRPr>
+            </a:pPr>
+            <a:r>
+              <a:rPr lang="fr-FR" dirty="0">
+                <a:solidFill>
+                  <a:schemeClr val="accent2">
+                    <a:lumMod val="75000"/>
+                  </a:schemeClr>
+                </a:solidFill>
+              </a:rPr>
+              <a:t>Validation croisée </a:t>
+            </a:r>
+            <a:endParaRPr dirty="0">
+              <a:solidFill>
+                <a:schemeClr val="accent2">
+                  <a:lumMod val="75000"/>
+                </a:schemeClr>
+              </a:solidFill>
+            </a:endParaRPr>
+          </a:p>
+          <a:p>
+            <a:pPr>
+              <a:spcAft>
+                <a:spcPts val="800"/>
+              </a:spcAft>
+              <a:defRPr sz="1200" b="1">
+                <a:solidFill>
+                  <a:srgbClr val="1E293B"/>
+                </a:solidFill>
+                <a:latin typeface="Verdana"/>
+              </a:defRPr>
+            </a:pPr>
+            <a:r>
+              <a:rPr lang="fr-FR" dirty="0"/>
+              <a:t>Avant l’entraînement du modèle</a:t>
+            </a:r>
+            <a:r>
+              <a:rPr dirty="0"/>
+              <a:t>: </a:t>
+            </a:r>
+            <a:endParaRPr lang="fr-FR" dirty="0"/>
+          </a:p>
+          <a:p>
+            <a:pPr>
+              <a:spcAft>
+                <a:spcPts val="800"/>
+              </a:spcAft>
+              <a:defRPr sz="1200" b="1">
+                <a:solidFill>
+                  <a:srgbClr val="1E293B"/>
+                </a:solidFill>
+                <a:latin typeface="Verdana"/>
+              </a:defRPr>
+            </a:pPr>
+            <a:r>
+              <a:rPr lang="fr-FR" b="0" dirty="0">
+                <a:solidFill>
+                  <a:srgbClr val="64748B"/>
+                </a:solidFill>
+              </a:rPr>
+              <a:t>Utilisé travailler sur les documents de prototypage des modèles</a:t>
+            </a:r>
+            <a:r>
+              <a:rPr lang="fr-FR" dirty="0">
+                <a:solidFill>
+                  <a:srgbClr val="64748B"/>
+                </a:solidFill>
+              </a:rPr>
+              <a:t>.</a:t>
+            </a:r>
+            <a:endParaRPr b="0" dirty="0">
+              <a:solidFill>
+                <a:srgbClr val="64748B"/>
+              </a:solidFill>
+            </a:endParaRPr>
+          </a:p>
+          <a:p>
+            <a:pPr>
+              <a:spcAft>
+                <a:spcPts val="800"/>
+              </a:spcAft>
+              <a:defRPr sz="1200" b="1">
+                <a:solidFill>
+                  <a:srgbClr val="1E293B"/>
+                </a:solidFill>
+                <a:latin typeface="Verdana"/>
+              </a:defRPr>
+            </a:pPr>
+            <a:r>
+              <a:rPr lang="fr-FR" dirty="0"/>
+              <a:t>Paramètres </a:t>
+            </a:r>
+            <a:r>
+              <a:rPr dirty="0"/>
+              <a:t>:</a:t>
+            </a:r>
+            <a:r>
+              <a:rPr lang="fr-FR" dirty="0"/>
+              <a:t> </a:t>
+            </a:r>
+          </a:p>
+          <a:p>
+            <a:pPr>
+              <a:spcAft>
+                <a:spcPts val="800"/>
+              </a:spcAft>
+              <a:defRPr sz="1200" b="1">
+                <a:solidFill>
+                  <a:srgbClr val="1E293B"/>
+                </a:solidFill>
+                <a:latin typeface="Verdana"/>
+              </a:defRPr>
+            </a:pPr>
+            <a:r>
+              <a:rPr lang="fr-FR" b="0" dirty="0">
+                <a:solidFill>
+                  <a:srgbClr val="64748B"/>
+                </a:solidFill>
+              </a:rPr>
+              <a:t>1 - Modèle de la validation croisée </a:t>
+            </a:r>
+          </a:p>
+          <a:p>
+            <a:pPr>
+              <a:spcAft>
+                <a:spcPts val="800"/>
+              </a:spcAft>
+              <a:defRPr sz="1200" b="1">
+                <a:solidFill>
+                  <a:srgbClr val="1E293B"/>
+                </a:solidFill>
+                <a:latin typeface="Verdana"/>
+              </a:defRPr>
+            </a:pPr>
+            <a:r>
+              <a:rPr lang="fr-FR" b="0" dirty="0">
+                <a:solidFill>
+                  <a:srgbClr val="64748B"/>
+                </a:solidFill>
+              </a:rPr>
+              <a:t>2 - Cv= 5 (découpe le </a:t>
+            </a:r>
+            <a:r>
+              <a:rPr lang="fr-FR" b="0" dirty="0" err="1">
+                <a:solidFill>
+                  <a:srgbClr val="64748B"/>
+                </a:solidFill>
+              </a:rPr>
+              <a:t>X_train</a:t>
+            </a:r>
+            <a:r>
+              <a:rPr lang="fr-FR" b="0" dirty="0">
+                <a:solidFill>
+                  <a:srgbClr val="64748B"/>
+                </a:solidFill>
+              </a:rPr>
+              <a:t> en 5 parties et fait la validation autant de fois qu’il y a de parties)</a:t>
+            </a:r>
+            <a:endParaRPr lang="fr-FR" dirty="0">
+              <a:solidFill>
+                <a:srgbClr val="64748B"/>
+              </a:solidFill>
+            </a:endParaRPr>
+          </a:p>
+          <a:p>
+            <a:pPr>
+              <a:spcAft>
+                <a:spcPts val="800"/>
+              </a:spcAft>
+              <a:defRPr sz="1200" b="1">
+                <a:solidFill>
+                  <a:srgbClr val="1E293B"/>
+                </a:solidFill>
+                <a:latin typeface="Verdana"/>
+              </a:defRPr>
+            </a:pPr>
+            <a:r>
+              <a:rPr lang="fr-FR" b="0" dirty="0">
+                <a:solidFill>
+                  <a:srgbClr val="64748B"/>
+                </a:solidFill>
+              </a:rPr>
+              <a:t>3 – </a:t>
+            </a:r>
+            <a:r>
+              <a:rPr lang="fr-FR" b="0" dirty="0" err="1">
+                <a:solidFill>
+                  <a:srgbClr val="64748B"/>
+                </a:solidFill>
+              </a:rPr>
+              <a:t>Scoring</a:t>
+            </a:r>
+            <a:r>
+              <a:rPr lang="fr-FR" b="0" dirty="0">
+                <a:solidFill>
+                  <a:srgbClr val="64748B"/>
+                </a:solidFill>
+              </a:rPr>
+              <a:t> Définit les scores que l’on souhaite avoir a la sortie de la validation croisée </a:t>
+            </a:r>
+          </a:p>
+        </p:txBody>
+      </p:sp>
+      <p:sp>
+        <p:nvSpPr>
+          <p:cNvPr id="6" name="Rounded Rectangle 4">
+            <a:extLst>
+              <a:ext uri="{FF2B5EF4-FFF2-40B4-BE49-F238E27FC236}">
+                <a16:creationId xmlns:a16="http://schemas.microsoft.com/office/drawing/2014/main" id="{3F8ECE68-176B-EADF-CAD1-E600EFC60CAA}"/>
+              </a:ext>
+            </a:extLst>
+          </p:cNvPr>
+          <p:cNvSpPr/>
+          <p:nvPr/>
+        </p:nvSpPr>
+        <p:spPr>
+          <a:xfrm>
+            <a:off x="6553200" y="2732024"/>
+            <a:ext cx="5303520" cy="2534137"/>
+          </a:xfrm>
+          <a:prstGeom prst="roundRect">
+            <a:avLst/>
+          </a:prstGeom>
+          <a:ln/>
+        </p:spPr>
+        <p:style>
+          <a:lnRef idx="2">
+            <a:schemeClr val="accent6"/>
+          </a:lnRef>
+          <a:fillRef idx="1">
+            <a:schemeClr val="lt1"/>
+          </a:fillRef>
+          <a:effectRef idx="0">
+            <a:schemeClr val="accent6"/>
+          </a:effectRef>
+          <a:fontRef idx="minor">
+            <a:schemeClr val="dk1"/>
+          </a:fontRef>
+        </p:style>
+        <p:txBody>
+          <a:bodyPr wrap="square" lIns="274320" tIns="274320" rIns="274320" rtlCol="0" anchor="t"/>
+          <a:lstStyle/>
+          <a:p>
+            <a:pPr algn="ctr">
+              <a:spcAft>
+                <a:spcPts val="1000"/>
+              </a:spcAft>
+              <a:defRPr sz="1600" b="1">
+                <a:solidFill>
+                  <a:srgbClr val="1E293B"/>
+                </a:solidFill>
+                <a:latin typeface="Georgia"/>
+              </a:defRPr>
+            </a:pPr>
+            <a:r>
+              <a:rPr lang="fr-FR" sz="1600" b="1" dirty="0">
+                <a:solidFill>
+                  <a:schemeClr val="accent6">
+                    <a:lumMod val="75000"/>
+                  </a:schemeClr>
+                </a:solidFill>
+                <a:latin typeface="Georgia"/>
+              </a:rPr>
+              <a:t>Exemple du cross_validate sur le modèle randomForest</a:t>
+            </a:r>
+            <a:endParaRPr sz="1600" b="1" dirty="0">
+              <a:solidFill>
+                <a:schemeClr val="accent6">
+                  <a:lumMod val="75000"/>
+                </a:schemeClr>
+              </a:solidFill>
+              <a:latin typeface="Georgia"/>
+            </a:endParaRPr>
+          </a:p>
+        </p:txBody>
+      </p:sp>
+      <p:pic>
+        <p:nvPicPr>
+          <p:cNvPr id="10" name="Image 9">
+            <a:extLst>
+              <a:ext uri="{FF2B5EF4-FFF2-40B4-BE49-F238E27FC236}">
+                <a16:creationId xmlns:a16="http://schemas.microsoft.com/office/drawing/2014/main" id="{E8101BED-D35F-9B6A-E144-72394141F479}"/>
+              </a:ext>
+            </a:extLst>
+          </p:cNvPr>
+          <p:cNvPicPr>
+            <a:picLocks noChangeAspect="1"/>
+          </p:cNvPicPr>
+          <p:nvPr/>
+        </p:nvPicPr>
+        <p:blipFill>
+          <a:blip r:embed="rId3"/>
+          <a:stretch>
+            <a:fillRect/>
+          </a:stretch>
+        </p:blipFill>
+        <p:spPr>
+          <a:xfrm>
+            <a:off x="6741857" y="3865430"/>
+            <a:ext cx="4926206" cy="985241"/>
+          </a:xfrm>
+          <a:prstGeom prst="rect">
+            <a:avLst/>
+          </a:prstGeom>
+        </p:spPr>
+      </p:pic>
+      <p:sp>
+        <p:nvSpPr>
+          <p:cNvPr id="11" name="Rounded Rectangle 4">
+            <a:extLst>
+              <a:ext uri="{FF2B5EF4-FFF2-40B4-BE49-F238E27FC236}">
+                <a16:creationId xmlns:a16="http://schemas.microsoft.com/office/drawing/2014/main" id="{D931AC01-E691-BCDE-E873-57FBE69AE2B4}"/>
+              </a:ext>
+            </a:extLst>
+          </p:cNvPr>
+          <p:cNvSpPr/>
+          <p:nvPr/>
+        </p:nvSpPr>
+        <p:spPr>
+          <a:xfrm>
+            <a:off x="523937" y="5018048"/>
+            <a:ext cx="5943770" cy="1340255"/>
+          </a:xfrm>
+          <a:prstGeom prst="roundRect">
+            <a:avLst/>
+          </a:prstGeom>
+          <a:ln/>
+        </p:spPr>
+        <p:style>
+          <a:lnRef idx="2">
+            <a:schemeClr val="accent1"/>
+          </a:lnRef>
+          <a:fillRef idx="1">
+            <a:schemeClr val="lt1"/>
+          </a:fillRef>
+          <a:effectRef idx="0">
+            <a:schemeClr val="accent1"/>
+          </a:effectRef>
+          <a:fontRef idx="minor">
+            <a:schemeClr val="dk1"/>
+          </a:fontRef>
+        </p:style>
+        <p:txBody>
+          <a:bodyPr wrap="square" lIns="274320" tIns="274320" rIns="274320" rtlCol="0" anchor="ctr"/>
+          <a:lstStyle/>
+          <a:p>
+            <a:pPr algn="ctr">
+              <a:spcAft>
+                <a:spcPts val="1000"/>
+              </a:spcAft>
+              <a:defRPr sz="1600" b="1">
+                <a:solidFill>
+                  <a:srgbClr val="1E293B"/>
+                </a:solidFill>
+                <a:latin typeface="Georgia"/>
+              </a:defRPr>
+            </a:pPr>
+            <a:r>
+              <a:rPr lang="fr-FR" dirty="0">
+                <a:solidFill>
+                  <a:schemeClr val="accent1">
+                    <a:lumMod val="75000"/>
+                  </a:schemeClr>
+                </a:solidFill>
+              </a:rPr>
+              <a:t>Entraînement du modèle</a:t>
+            </a:r>
+            <a:endParaRPr dirty="0">
+              <a:solidFill>
+                <a:schemeClr val="accent1">
+                  <a:lumMod val="75000"/>
+                </a:schemeClr>
+              </a:solidFill>
+            </a:endParaRPr>
+          </a:p>
+          <a:p>
+            <a:pPr>
+              <a:spcAft>
+                <a:spcPts val="800"/>
+              </a:spcAft>
+              <a:defRPr sz="1200" b="1">
+                <a:solidFill>
+                  <a:srgbClr val="1E293B"/>
+                </a:solidFill>
+                <a:latin typeface="Verdana"/>
+              </a:defRPr>
+            </a:pPr>
+            <a:r>
+              <a:rPr lang="fr-FR" dirty="0"/>
+              <a:t>Après la validation croisée</a:t>
+            </a:r>
+            <a:r>
+              <a:rPr dirty="0"/>
+              <a:t>: </a:t>
+            </a:r>
+            <a:endParaRPr lang="fr-FR" dirty="0"/>
+          </a:p>
+          <a:p>
+            <a:pPr>
+              <a:spcAft>
+                <a:spcPts val="800"/>
+              </a:spcAft>
+              <a:defRPr sz="1200" b="1">
+                <a:solidFill>
+                  <a:srgbClr val="1E293B"/>
+                </a:solidFill>
+                <a:latin typeface="Verdana"/>
+              </a:defRPr>
+            </a:pPr>
+            <a:r>
+              <a:rPr lang="fr-FR" b="0" dirty="0">
+                <a:solidFill>
+                  <a:srgbClr val="64748B"/>
+                </a:solidFill>
+              </a:rPr>
+              <a:t>Les scores générés peuvent être comparés avec la validation croisée</a:t>
+            </a:r>
+            <a:endParaRPr b="0" dirty="0">
+              <a:solidFill>
+                <a:srgbClr val="64748B"/>
+              </a:solidFill>
+            </a:endParaRPr>
           </a:p>
         </p:txBody>
       </p:sp>
@@ -6605,7 +11318,7 @@
 </p:sld>
 </file>
 
-<file path=ppt/slides/slide7.xml><?xml version="1.0" encoding="utf-8"?>
+<file path=ppt/slides/slide8.xml><?xml version="1.0" encoding="utf-8"?>
 <p:sld xmlns:a="http://schemas.openxmlformats.org/drawingml/2006/main" xmlns:r="http://schemas.openxmlformats.org/officeDocument/2006/relationships" xmlns:p="http://schemas.openxmlformats.org/presentationml/2006/main">
   <p:cSld>
     <p:bg>
@@ -6636,6 +11349,36 @@
           <a:chExt cx="0" cy="0"/>
         </a:xfrm>
       </p:grpSpPr>
+      <p:pic>
+        <p:nvPicPr>
+          <p:cNvPr id="9" name="Image 8">
+            <a:extLst>
+              <a:ext uri="{FF2B5EF4-FFF2-40B4-BE49-F238E27FC236}">
+                <a16:creationId xmlns:a16="http://schemas.microsoft.com/office/drawing/2014/main" id="{7303665B-4065-21FC-6B55-662EEADE24A2}"/>
+              </a:ext>
+            </a:extLst>
+          </p:cNvPr>
+          <p:cNvPicPr>
+            <a:picLocks noChangeAspect="1"/>
+          </p:cNvPicPr>
+          <p:nvPr/>
+        </p:nvPicPr>
+        <p:blipFill>
+          <a:blip r:embed="rId3"/>
+          <a:stretch>
+            <a:fillRect/>
+          </a:stretch>
+        </p:blipFill>
+        <p:spPr>
+          <a:xfrm>
+            <a:off x="-401012" y="150288"/>
+            <a:ext cx="13908423" cy="7593918"/>
+          </a:xfrm>
+          <a:prstGeom prst="rect">
+            <a:avLst/>
+          </a:prstGeom>
+        </p:spPr>
+      </p:pic>
       <p:sp>
         <p:nvSpPr>
           <p:cNvPr id="2" name="Rectangle 1">
@@ -6656,22 +11399,17 @@
           <a:prstGeom prst="rect">
             <a:avLst/>
           </a:prstGeom>
-          <a:solidFill>
-            <a:srgbClr val="FFFFFF"/>
-          </a:solidFill>
-          <a:ln>
-            <a:noFill/>
-          </a:ln>
+          <a:ln/>
         </p:spPr>
         <p:style>
-          <a:lnRef idx="1">
-            <a:schemeClr val="accent1"/>
+          <a:lnRef idx="0">
+            <a:schemeClr val="dk1"/>
           </a:lnRef>
           <a:fillRef idx="3">
-            <a:schemeClr val="accent1"/>
+            <a:schemeClr val="dk1"/>
           </a:fillRef>
-          <a:effectRef idx="2">
-            <a:schemeClr val="accent1"/>
+          <a:effectRef idx="3">
+            <a:schemeClr val="dk1"/>
           </a:effectRef>
           <a:fontRef idx="minor">
             <a:schemeClr val="lt1"/>
@@ -6773,22 +11511,18 @@
               </a:defRPr>
             </a:pPr>
             <a:r>
-              <a:rPr lang="fr-FR" dirty="0"/>
-              <a:t>Scores a l’issue des </a:t>
-            </a:r>
-            <a:r>
-              <a:rPr lang="fr-FR" dirty="0" err="1"/>
-              <a:t>entrainnements</a:t>
-            </a:r>
-            <a:r>
-              <a:rPr lang="fr-FR" dirty="0"/>
-              <a:t> de </a:t>
-            </a:r>
-            <a:r>
-              <a:rPr lang="fr-FR" dirty="0" err="1"/>
-              <a:t>modeles</a:t>
-            </a:r>
-            <a:endParaRPr dirty="0"/>
+              <a:rPr lang="fr-FR" dirty="0">
+                <a:solidFill>
+                  <a:schemeClr val="bg1"/>
+                </a:solidFill>
+              </a:rPr>
+              <a:t>5 - Scores a l’issue des entraînements de modèles</a:t>
+            </a:r>
+            <a:endParaRPr dirty="0">
+              <a:solidFill>
+                <a:schemeClr val="bg1"/>
+              </a:solidFill>
+            </a:endParaRPr>
           </a:p>
         </p:txBody>
       </p:sp>
@@ -6855,7 +11589,7 @@
           <a:p>
             <a:fld id="{C1FF6DA9-008F-8B48-92A6-B652298478BF}" type="slidenum">
               <a:rPr lang="en-US" smtClean="0"/>
-              <a:t>7</a:t>
+              <a:t>8</a:t>
             </a:fld>
             <a:endParaRPr lang="en-US"/>
           </a:p>
@@ -6876,14 +11610,14 @@
           <p:nvPr>
             <p:extLst>
               <p:ext uri="{D42A27DB-BD31-4B8C-83A1-F6EECF244321}">
-                <p14:modId xmlns:p14="http://schemas.microsoft.com/office/powerpoint/2010/main" val="1685089857"/>
+                <p14:modId xmlns:p14="http://schemas.microsoft.com/office/powerpoint/2010/main" val="354446844"/>
               </p:ext>
             </p:extLst>
           </p:nvPr>
         </p:nvGraphicFramePr>
         <p:xfrm>
-          <a:off x="731520" y="2397379"/>
-          <a:ext cx="10461106" cy="2926080"/>
+          <a:off x="312234" y="1490920"/>
+          <a:ext cx="11630720" cy="1491760"/>
         </p:xfrm>
         <a:graphic>
           <a:graphicData uri="http://schemas.openxmlformats.org/drawingml/2006/table">
@@ -6892,35 +11626,35 @@
                 <a:tableStyleId>{5C22544A-7EE6-4342-B048-85BDC9FD1C3A}</a:tableStyleId>
               </a:tblPr>
               <a:tblGrid>
-                <a:gridCol w="2512002">
+                <a:gridCol w="2792859">
                   <a:extLst>
                     <a:ext uri="{9D8B030D-6E8A-4147-A177-3AD203B41FA5}">
                       <a16:colId xmlns:a16="http://schemas.microsoft.com/office/drawing/2014/main" val="20000"/>
                     </a:ext>
                   </a:extLst>
                 </a:gridCol>
-                <a:gridCol w="1570001">
+                <a:gridCol w="1745536">
                   <a:extLst>
                     <a:ext uri="{9D8B030D-6E8A-4147-A177-3AD203B41FA5}">
                       <a16:colId xmlns:a16="http://schemas.microsoft.com/office/drawing/2014/main" val="1402259042"/>
                     </a:ext>
                   </a:extLst>
                 </a:gridCol>
-                <a:gridCol w="1570001">
+                <a:gridCol w="1745536">
                   <a:extLst>
                     <a:ext uri="{9D8B030D-6E8A-4147-A177-3AD203B41FA5}">
                       <a16:colId xmlns:a16="http://schemas.microsoft.com/office/drawing/2014/main" val="20001"/>
                     </a:ext>
                   </a:extLst>
                 </a:gridCol>
-                <a:gridCol w="1570001">
+                <a:gridCol w="1866509">
                   <a:extLst>
                     <a:ext uri="{9D8B030D-6E8A-4147-A177-3AD203B41FA5}">
                       <a16:colId xmlns:a16="http://schemas.microsoft.com/office/drawing/2014/main" val="20002"/>
                     </a:ext>
                   </a:extLst>
                 </a:gridCol>
-                <a:gridCol w="3239101">
+                <a:gridCol w="3480280">
                   <a:extLst>
                     <a:ext uri="{9D8B030D-6E8A-4147-A177-3AD203B41FA5}">
                       <a16:colId xmlns:a16="http://schemas.microsoft.com/office/drawing/2014/main" val="20004"/>
@@ -6928,7 +11662,7 @@
                   </a:extLst>
                 </a:gridCol>
               </a:tblGrid>
-              <a:tr h="585216">
+              <a:tr h="325071">
                 <a:tc>
                   <a:txBody>
                     <a:bodyPr/>
@@ -6976,6 +11710,15 @@
                         <a:rPr dirty="0"/>
                         <a:t>R² Score</a:t>
                       </a:r>
+                      <a:r>
+                        <a:rPr lang="fr-FR" dirty="0"/>
+                        <a:t> </a:t>
+                      </a:r>
+                      <a:r>
+                        <a:rPr lang="fr-FR" dirty="0" err="1"/>
+                        <a:t>predict</a:t>
+                      </a:r>
+                      <a:endParaRPr dirty="0"/>
                     </a:p>
                   </a:txBody>
                   <a:tcPr/>
@@ -6994,8 +11737,18 @@
                         </a:defRPr>
                       </a:pPr>
                       <a:r>
-                        <a:t>RMSE (Val)</a:t>
+                        <a:rPr dirty="0"/>
+                        <a:t>RMSE</a:t>
                       </a:r>
+                      <a:r>
+                        <a:rPr lang="fr-FR" dirty="0"/>
+                        <a:t> </a:t>
+                      </a:r>
+                      <a:r>
+                        <a:rPr lang="fr-FR" dirty="0" err="1"/>
+                        <a:t>predict</a:t>
+                      </a:r>
+                      <a:endParaRPr dirty="0"/>
                     </a:p>
                   </a:txBody>
                   <a:tcPr/>
@@ -7014,8 +11767,14 @@
                         </a:defRPr>
                       </a:pPr>
                       <a:r>
-                        <a:t>MAE (Val)</a:t>
+                        <a:rPr dirty="0"/>
+                        <a:t>MAE </a:t>
                       </a:r>
+                      <a:r>
+                        <a:rPr lang="fr-FR" dirty="0" err="1"/>
+                        <a:t>predict</a:t>
+                      </a:r>
+                      <a:endParaRPr dirty="0"/>
                     </a:p>
                   </a:txBody>
                   <a:tcPr/>
@@ -7046,7 +11805,7 @@
                   </a:ext>
                 </a:extLst>
               </a:tr>
-              <a:tr h="585216">
+              <a:tr h="384418">
                 <a:tc>
                   <a:txBody>
                     <a:bodyPr/>
@@ -7062,19 +11821,16 @@
                       </a:pPr>
                       <a:r>
                         <a:rPr dirty="0"/>
-                        <a:t>Baseline : </a:t>
+                        <a:t>Regression </a:t>
                       </a:r>
                       <a:r>
-                        <a:rPr dirty="0" err="1"/>
-                        <a:t>Régression</a:t>
+                        <a:rPr lang="fr-FR" dirty="0"/>
+                        <a:t>Linéaire</a:t>
                       </a:r>
-                      <a:r>
-                        <a:rPr dirty="0"/>
-                        <a:t> Ridge</a:t>
-                      </a:r>
+                      <a:endParaRPr dirty="0"/>
                     </a:p>
                   </a:txBody>
-                  <a:tcPr/>
+                  <a:tcPr anchor="ctr"/>
                 </a:tc>
                 <a:tc>
                   <a:txBody>
@@ -7090,12 +11846,21 @@
                         </a:defRPr>
                       </a:pPr>
                       <a:r>
-                        <a:rPr dirty="0"/>
-                        <a:t>0.68</a:t>
+                        <a:rPr lang="fr-FR" sz="1200" b="0" i="0" kern="1200" dirty="0">
+                          <a:solidFill>
+                            <a:srgbClr val="1E293B"/>
+                          </a:solidFill>
+                          <a:effectLst/>
+                          <a:latin typeface="Verdana"/>
+                          <a:ea typeface="+mn-ea"/>
+                          <a:cs typeface="+mn-cs"/>
+                        </a:rPr>
+                        <a:t>0.413</a:t>
                       </a:r>
+                      <a:endParaRPr dirty="0"/>
                     </a:p>
                   </a:txBody>
-                  <a:tcPr/>
+                  <a:tcPr anchor="ctr"/>
                 </a:tc>
                 <a:tc>
                   <a:txBody>
@@ -7111,11 +11876,21 @@
                         </a:defRPr>
                       </a:pPr>
                       <a:r>
-                        <a:t>0.58</a:t>
+                        <a:rPr lang="fr-FR" sz="1200" b="0" i="0" kern="1200" dirty="0">
+                          <a:solidFill>
+                            <a:srgbClr val="1E293B"/>
+                          </a:solidFill>
+                          <a:effectLst/>
+                          <a:latin typeface="Verdana"/>
+                          <a:ea typeface="+mn-ea"/>
+                          <a:cs typeface="+mn-cs"/>
+                        </a:rPr>
+                        <a:t>1.007</a:t>
                       </a:r>
+                      <a:endParaRPr dirty="0"/>
                     </a:p>
                   </a:txBody>
-                  <a:tcPr/>
+                  <a:tcPr anchor="ctr"/>
                 </a:tc>
                 <a:tc>
                   <a:txBody>
@@ -7131,11 +11906,21 @@
                         </a:defRPr>
                       </a:pPr>
                       <a:r>
-                        <a:t>0.42</a:t>
+                        <a:rPr lang="fr-FR" sz="1200" b="0" i="0" kern="1200" dirty="0">
+                          <a:solidFill>
+                            <a:srgbClr val="1E293B"/>
+                          </a:solidFill>
+                          <a:effectLst/>
+                          <a:latin typeface="Verdana"/>
+                          <a:ea typeface="+mn-ea"/>
+                          <a:cs typeface="+mn-cs"/>
+                        </a:rPr>
+                        <a:t>0.767</a:t>
                       </a:r>
+                      <a:endParaRPr dirty="0"/>
                     </a:p>
                   </a:txBody>
-                  <a:tcPr/>
+                  <a:tcPr anchor="ctr"/>
                 </a:tc>
                 <a:tc>
                   <a:txBody>
@@ -7151,11 +11936,17 @@
                         </a:defRPr>
                       </a:pPr>
                       <a:r>
-                        <a:t>Modèle de référence</a:t>
+                        <a:rPr dirty="0" err="1"/>
+                        <a:t>Modèl</a:t>
                       </a:r>
+                      <a:r>
+                        <a:rPr lang="fr-FR" dirty="0"/>
+                        <a:t>e trop simple pour le dataset</a:t>
+                      </a:r>
+                      <a:endParaRPr dirty="0"/>
                     </a:p>
                   </a:txBody>
-                  <a:tcPr/>
+                  <a:tcPr anchor="ctr"/>
                 </a:tc>
                 <a:extLst>
                   <a:ext uri="{0D108BD9-81ED-4DB2-BD59-A6C34878D82A}">
@@ -7163,7 +11954,7 @@
                   </a:ext>
                 </a:extLst>
               </a:tr>
-              <a:tr h="585216">
+              <a:tr h="325071">
                 <a:tc>
                   <a:txBody>
                     <a:bodyPr/>
@@ -7178,11 +11969,12 @@
                         </a:defRPr>
                       </a:pPr>
                       <a:r>
-                        <a:t>Random Forest (Défaut)</a:t>
+                        <a:rPr dirty="0"/>
+                        <a:t>Random Forest</a:t>
                       </a:r>
                     </a:p>
                   </a:txBody>
-                  <a:tcPr/>
+                  <a:tcPr anchor="ctr"/>
                 </a:tc>
                 <a:tc>
                   <a:txBody>
@@ -7198,12 +11990,21 @@
                         </a:defRPr>
                       </a:pPr>
                       <a:r>
-                        <a:rPr dirty="0"/>
-                        <a:t>0.81</a:t>
+                        <a:rPr lang="fr-FR" sz="1200" b="0" i="0" kern="1200" dirty="0">
+                          <a:solidFill>
+                            <a:srgbClr val="1E293B"/>
+                          </a:solidFill>
+                          <a:effectLst/>
+                          <a:latin typeface="Verdana"/>
+                          <a:ea typeface="+mn-ea"/>
+                          <a:cs typeface="+mn-cs"/>
+                        </a:rPr>
+                        <a:t>0.565</a:t>
                       </a:r>
+                      <a:endParaRPr dirty="0"/>
                     </a:p>
                   </a:txBody>
-                  <a:tcPr/>
+                  <a:tcPr anchor="ctr"/>
                 </a:tc>
                 <a:tc>
                   <a:txBody>
@@ -7219,11 +12020,21 @@
                         </a:defRPr>
                       </a:pPr>
                       <a:r>
-                        <a:t>0.41</a:t>
+                        <a:rPr lang="fr-FR" sz="1200" b="0" i="0" kern="1200" dirty="0">
+                          <a:solidFill>
+                            <a:srgbClr val="1E293B"/>
+                          </a:solidFill>
+                          <a:effectLst/>
+                          <a:latin typeface="Verdana"/>
+                          <a:ea typeface="+mn-ea"/>
+                          <a:cs typeface="+mn-cs"/>
+                        </a:rPr>
+                        <a:t>0.867</a:t>
                       </a:r>
+                      <a:endParaRPr dirty="0"/>
                     </a:p>
                   </a:txBody>
-                  <a:tcPr/>
+                  <a:tcPr anchor="ctr"/>
                 </a:tc>
                 <a:tc>
                   <a:txBody>
@@ -7239,11 +12050,21 @@
                         </a:defRPr>
                       </a:pPr>
                       <a:r>
-                        <a:t>0.29</a:t>
+                        <a:rPr lang="fr-FR" sz="1200" b="0" i="0" kern="1200" dirty="0">
+                          <a:solidFill>
+                            <a:srgbClr val="1E293B"/>
+                          </a:solidFill>
+                          <a:effectLst/>
+                          <a:latin typeface="Verdana"/>
+                          <a:ea typeface="+mn-ea"/>
+                          <a:cs typeface="+mn-cs"/>
+                        </a:rPr>
+                        <a:t>0.645</a:t>
                       </a:r>
+                      <a:endParaRPr dirty="0"/>
                     </a:p>
                   </a:txBody>
-                  <a:tcPr/>
+                  <a:tcPr anchor="ctr"/>
                 </a:tc>
                 <a:tc>
                   <a:txBody>
@@ -7259,17 +12080,13 @@
                         </a:defRPr>
                       </a:pPr>
                       <a:r>
-                        <a:rPr dirty="0"/>
-                        <a:t>Gain net non-</a:t>
-                      </a:r>
-                      <a:r>
-                        <a:rPr dirty="0" err="1"/>
-                        <a:t>linéaire</a:t>
+                        <a:rPr lang="fr-FR" dirty="0"/>
+                        <a:t>Meilleur modèle (mais résultats moyens)</a:t>
                       </a:r>
                       <a:endParaRPr dirty="0"/>
                     </a:p>
                   </a:txBody>
-                  <a:tcPr/>
+                  <a:tcPr anchor="ctr"/>
                 </a:tc>
                 <a:extLst>
                   <a:ext uri="{0D108BD9-81ED-4DB2-BD59-A6C34878D82A}">
@@ -7277,7 +12094,7 @@
                   </a:ext>
                 </a:extLst>
               </a:tr>
-              <a:tr h="585216">
+              <a:tr h="325071">
                 <a:tc>
                   <a:txBody>
                     <a:bodyPr/>
@@ -7298,7 +12115,7 @@
                       <a:endParaRPr dirty="0"/>
                     </a:p>
                   </a:txBody>
-                  <a:tcPr/>
+                  <a:tcPr anchor="ctr"/>
                 </a:tc>
                 <a:tc>
                   <a:txBody>
@@ -7313,10 +12130,22 @@
                           <a:latin typeface="Verdana"/>
                         </a:defRPr>
                       </a:pPr>
+                      <a:r>
+                        <a:rPr lang="fr-FR" sz="1200" b="0" i="0" kern="1200" dirty="0">
+                          <a:solidFill>
+                            <a:srgbClr val="1E293B"/>
+                          </a:solidFill>
+                          <a:effectLst/>
+                          <a:latin typeface="Verdana"/>
+                          <a:ea typeface="+mn-ea"/>
+                          <a:cs typeface="+mn-cs"/>
+                        </a:rPr>
+                        <a:t>0.516</a:t>
+                      </a:r>
                       <a:endParaRPr dirty="0"/>
                     </a:p>
                   </a:txBody>
-                  <a:tcPr/>
+                  <a:tcPr anchor="ctr"/>
                 </a:tc>
                 <a:tc>
                   <a:txBody>
@@ -7331,10 +12160,22 @@
                           <a:latin typeface="Verdana"/>
                         </a:defRPr>
                       </a:pPr>
-                      <a:endParaRPr/>
+                      <a:r>
+                        <a:rPr lang="fr-FR" sz="1200" b="0" i="0" kern="1200" dirty="0">
+                          <a:solidFill>
+                            <a:srgbClr val="1E293B"/>
+                          </a:solidFill>
+                          <a:effectLst/>
+                          <a:latin typeface="Verdana"/>
+                          <a:ea typeface="+mn-ea"/>
+                          <a:cs typeface="+mn-cs"/>
+                        </a:rPr>
+                        <a:t>0.914</a:t>
+                      </a:r>
+                      <a:endParaRPr dirty="0"/>
                     </a:p>
                   </a:txBody>
-                  <a:tcPr/>
+                  <a:tcPr anchor="ctr"/>
                 </a:tc>
                 <a:tc>
                   <a:txBody>
@@ -7349,10 +12190,22 @@
                           <a:latin typeface="Verdana"/>
                         </a:defRPr>
                       </a:pPr>
-                      <a:endParaRPr/>
+                      <a:r>
+                        <a:rPr lang="fr-FR" sz="1200" b="0" i="0" kern="1200" dirty="0">
+                          <a:solidFill>
+                            <a:srgbClr val="1E293B"/>
+                          </a:solidFill>
+                          <a:effectLst/>
+                          <a:latin typeface="Verdana"/>
+                          <a:ea typeface="+mn-ea"/>
+                          <a:cs typeface="+mn-cs"/>
+                        </a:rPr>
+                        <a:t>0.689</a:t>
+                      </a:r>
+                      <a:endParaRPr dirty="0"/>
                     </a:p>
                   </a:txBody>
-                  <a:tcPr/>
+                  <a:tcPr anchor="ctr"/>
                 </a:tc>
                 <a:tc>
                   <a:txBody>
@@ -7367,10 +12220,14 @@
                           <a:latin typeface="Verdana"/>
                         </a:defRPr>
                       </a:pPr>
+                      <a:r>
+                        <a:rPr lang="fr-FR" dirty="0"/>
+                        <a:t>Meilleurs scores mais pas le meilleur modèle</a:t>
+                      </a:r>
                       <a:endParaRPr dirty="0"/>
                     </a:p>
                   </a:txBody>
-                  <a:tcPr/>
+                  <a:tcPr anchor="ctr"/>
                 </a:tc>
                 <a:extLst>
                   <a:ext uri="{0D108BD9-81ED-4DB2-BD59-A6C34878D82A}">
@@ -7378,169 +12235,41 @@
                   </a:ext>
                 </a:extLst>
               </a:tr>
-              <a:tr h="585216">
-                <a:tc>
-                  <a:txBody>
-                    <a:bodyPr/>
-                    <a:lstStyle/>
-                    <a:p>
-                      <a:pPr>
-                        <a:defRPr sz="1200" b="1">
-                          <a:solidFill>
-                            <a:srgbClr val="0D9488"/>
-                          </a:solidFill>
-                          <a:latin typeface="Verdana"/>
-                        </a:defRPr>
-                      </a:pPr>
-                      <a:r>
-                        <a:rPr dirty="0"/>
-                        <a:t>Random Forest (</a:t>
-                      </a:r>
-                      <a:r>
-                        <a:rPr dirty="0" err="1"/>
-                        <a:t>GridSearch</a:t>
-                      </a:r>
-                      <a:r>
-                        <a:rPr dirty="0"/>
-                        <a:t>)</a:t>
-                      </a:r>
-                    </a:p>
-                  </a:txBody>
-                  <a:tcPr>
-                    <a:solidFill>
-                      <a:schemeClr val="accent3">
-                        <a:lumMod val="40000"/>
-                        <a:lumOff val="60000"/>
-                      </a:schemeClr>
-                    </a:solidFill>
-                  </a:tcPr>
-                </a:tc>
-                <a:tc>
-                  <a:txBody>
-                    <a:bodyPr/>
-                    <a:lstStyle/>
-                    <a:p>
-                      <a:pPr algn="ctr">
-                        <a:defRPr sz="1200" b="1">
-                          <a:solidFill>
-                            <a:srgbClr val="0D9488"/>
-                          </a:solidFill>
-                          <a:latin typeface="Verdana"/>
-                        </a:defRPr>
-                      </a:pPr>
-                      <a:r>
-                        <a:rPr dirty="0"/>
-                        <a:t>0.87</a:t>
-                      </a:r>
-                    </a:p>
-                  </a:txBody>
-                  <a:tcPr>
-                    <a:solidFill>
-                      <a:schemeClr val="accent3">
-                        <a:lumMod val="40000"/>
-                        <a:lumOff val="60000"/>
-                      </a:schemeClr>
-                    </a:solidFill>
-                  </a:tcPr>
-                </a:tc>
-                <a:tc>
-                  <a:txBody>
-                    <a:bodyPr/>
-                    <a:lstStyle/>
-                    <a:p>
-                      <a:pPr algn="ctr">
-                        <a:defRPr sz="1200" b="1">
-                          <a:solidFill>
-                            <a:srgbClr val="0D9488"/>
-                          </a:solidFill>
-                          <a:latin typeface="Verdana"/>
-                        </a:defRPr>
-                      </a:pPr>
-                      <a:r>
-                        <a:rPr dirty="0"/>
-                        <a:t>0.31</a:t>
-                      </a:r>
-                    </a:p>
-                  </a:txBody>
-                  <a:tcPr>
-                    <a:solidFill>
-                      <a:schemeClr val="accent3">
-                        <a:lumMod val="40000"/>
-                        <a:lumOff val="60000"/>
-                      </a:schemeClr>
-                    </a:solidFill>
-                  </a:tcPr>
-                </a:tc>
-                <a:tc>
-                  <a:txBody>
-                    <a:bodyPr/>
-                    <a:lstStyle/>
-                    <a:p>
-                      <a:pPr algn="ctr">
-                        <a:defRPr sz="1200" b="1">
-                          <a:solidFill>
-                            <a:srgbClr val="0D9488"/>
-                          </a:solidFill>
-                          <a:latin typeface="Verdana"/>
-                        </a:defRPr>
-                      </a:pPr>
-                      <a:r>
-                        <a:t>0.21</a:t>
-                      </a:r>
-                    </a:p>
-                  </a:txBody>
-                  <a:tcPr>
-                    <a:solidFill>
-                      <a:schemeClr val="accent3">
-                        <a:lumMod val="40000"/>
-                        <a:lumOff val="60000"/>
-                      </a:schemeClr>
-                    </a:solidFill>
-                  </a:tcPr>
-                </a:tc>
-                <a:tc>
-                  <a:txBody>
-                    <a:bodyPr/>
-                    <a:lstStyle/>
-                    <a:p>
-                      <a:pPr>
-                        <a:defRPr sz="1200" b="1">
-                          <a:solidFill>
-                            <a:srgbClr val="0D9488"/>
-                          </a:solidFill>
-                          <a:latin typeface="Verdana"/>
-                        </a:defRPr>
-                      </a:pPr>
-                      <a:r>
-                        <a:rPr dirty="0"/>
-                        <a:t>Meilleur </a:t>
-                      </a:r>
-                      <a:r>
-                        <a:rPr dirty="0" err="1"/>
-                        <a:t>Modèle</a:t>
-                      </a:r>
-                      <a:endParaRPr dirty="0"/>
-                    </a:p>
-                  </a:txBody>
-                  <a:tcPr>
-                    <a:solidFill>
-                      <a:schemeClr val="accent3">
-                        <a:lumMod val="40000"/>
-                        <a:lumOff val="60000"/>
-                      </a:schemeClr>
-                    </a:solidFill>
-                  </a:tcPr>
-                </a:tc>
-                <a:extLst>
-                  <a:ext uri="{0D108BD9-81ED-4DB2-BD59-A6C34878D82A}">
-                    <a16:rowId xmlns:a16="http://schemas.microsoft.com/office/drawing/2014/main" val="10003"/>
-                  </a:ext>
-                </a:extLst>
-              </a:tr>
             </a:tbl>
           </a:graphicData>
         </a:graphic>
       </p:graphicFrame>
+      <p:pic>
+        <p:nvPicPr>
+          <p:cNvPr id="6" name="Image 5">
+            <a:extLst>
+              <a:ext uri="{FF2B5EF4-FFF2-40B4-BE49-F238E27FC236}">
+                <a16:creationId xmlns:a16="http://schemas.microsoft.com/office/drawing/2014/main" id="{7F939054-B0D6-36F3-9DB2-5BBE5BC4E173}"/>
+              </a:ext>
+            </a:extLst>
+          </p:cNvPr>
+          <p:cNvPicPr>
+            <a:picLocks noChangeAspect="1"/>
+          </p:cNvPicPr>
+          <p:nvPr/>
+        </p:nvPicPr>
+        <p:blipFill>
+          <a:blip r:embed="rId4"/>
+          <a:srcRect l="671" t="1309"/>
+          <a:stretch>
+            <a:fillRect/>
+          </a:stretch>
+        </p:blipFill>
+        <p:spPr>
+          <a:xfrm>
+            <a:off x="988460" y="3111190"/>
+            <a:ext cx="10215080" cy="3153628"/>
+          </a:xfrm>
+          <a:prstGeom prst="rect">
+            <a:avLst/>
+          </a:prstGeom>
+        </p:spPr>
+      </p:pic>
     </p:spTree>
     <p:extLst>
       <p:ext uri="{BB962C8B-B14F-4D97-AF65-F5344CB8AC3E}">
@@ -7554,7 +12283,7 @@
 </p:sld>
 </file>
 
-<file path=ppt/slides/slide8.xml><?xml version="1.0" encoding="utf-8"?>
+<file path=ppt/slides/slide9.xml><?xml version="1.0" encoding="utf-8"?>
 <p:sld xmlns:a="http://schemas.openxmlformats.org/drawingml/2006/main" xmlns:r="http://schemas.openxmlformats.org/officeDocument/2006/relationships" xmlns:p="http://schemas.openxmlformats.org/presentationml/2006/main">
   <p:cSld>
     <p:bg>
@@ -7579,6 +12308,36 @@
           <a:chExt cx="0" cy="0"/>
         </a:xfrm>
       </p:grpSpPr>
+      <p:pic>
+        <p:nvPicPr>
+          <p:cNvPr id="12" name="Image 11">
+            <a:extLst>
+              <a:ext uri="{FF2B5EF4-FFF2-40B4-BE49-F238E27FC236}">
+                <a16:creationId xmlns:a16="http://schemas.microsoft.com/office/drawing/2014/main" id="{D7271C20-9765-CD4C-BD89-07F1F2933D3B}"/>
+              </a:ext>
+            </a:extLst>
+          </p:cNvPr>
+          <p:cNvPicPr>
+            <a:picLocks noChangeAspect="1"/>
+          </p:cNvPicPr>
+          <p:nvPr/>
+        </p:nvPicPr>
+        <p:blipFill>
+          <a:blip r:embed="rId2"/>
+          <a:stretch>
+            <a:fillRect/>
+          </a:stretch>
+        </p:blipFill>
+        <p:spPr>
+          <a:xfrm>
+            <a:off x="-762312" y="255674"/>
+            <a:ext cx="13908423" cy="7593918"/>
+          </a:xfrm>
+          <a:prstGeom prst="rect">
+            <a:avLst/>
+          </a:prstGeom>
+        </p:spPr>
+      </p:pic>
       <p:sp>
         <p:nvSpPr>
           <p:cNvPr id="2" name="Rectangle 1"/>
@@ -7593,22 +12352,17 @@
           <a:prstGeom prst="rect">
             <a:avLst/>
           </a:prstGeom>
-          <a:solidFill>
-            <a:srgbClr val="FFFFFF"/>
-          </a:solidFill>
-          <a:ln>
-            <a:noFill/>
-          </a:ln>
+          <a:ln/>
         </p:spPr>
         <p:style>
-          <a:lnRef idx="1">
-            <a:schemeClr val="accent1"/>
+          <a:lnRef idx="0">
+            <a:schemeClr val="dk1"/>
           </a:lnRef>
           <a:fillRef idx="3">
-            <a:schemeClr val="accent1"/>
+            <a:schemeClr val="dk1"/>
           </a:fillRef>
-          <a:effectRef idx="2">
-            <a:schemeClr val="accent1"/>
+          <a:effectRef idx="3">
+            <a:schemeClr val="dk1"/>
           </a:effectRef>
           <a:fontRef idx="minor">
             <a:schemeClr val="lt1"/>
@@ -7698,19 +12452,59 @@
               </a:defRPr>
             </a:pPr>
             <a:r>
-              <a:rPr dirty="0" err="1"/>
+              <a:rPr lang="fr-FR" dirty="0">
+                <a:solidFill>
+                  <a:schemeClr val="bg1"/>
+                </a:solidFill>
+              </a:rPr>
+              <a:t>6 – </a:t>
+            </a:r>
+            <a:r>
+              <a:rPr dirty="0" err="1">
+                <a:solidFill>
+                  <a:schemeClr val="bg1"/>
+                </a:solidFill>
+              </a:rPr>
               <a:t>Optimisation</a:t>
             </a:r>
             <a:r>
-              <a:rPr dirty="0"/>
-              <a:t> par Grid Search &amp; </a:t>
-            </a:r>
-            <a:r>
-              <a:rPr dirty="0" err="1"/>
-              <a:t>Métriques</a:t>
-            </a:r>
-            <a:r>
-              <a:rPr dirty="0"/>
+              <a:rPr lang="fr-FR" dirty="0">
+                <a:solidFill>
+                  <a:schemeClr val="bg1"/>
+                </a:solidFill>
+              </a:rPr>
+              <a:t> du modèle</a:t>
+            </a:r>
+            <a:r>
+              <a:rPr dirty="0">
+                <a:solidFill>
+                  <a:schemeClr val="bg1"/>
+                </a:solidFill>
+              </a:rPr>
+              <a:t> &amp; M</a:t>
+            </a:r>
+            <a:r>
+              <a:rPr lang="fr-FR" dirty="0">
+                <a:solidFill>
+                  <a:schemeClr val="bg1"/>
+                </a:solidFill>
+              </a:rPr>
+              <a:t>e</a:t>
+            </a:r>
+            <a:r>
+              <a:rPr dirty="0" err="1">
+                <a:solidFill>
+                  <a:schemeClr val="bg1"/>
+                </a:solidFill>
+              </a:rPr>
+              <a:t>triques</a:t>
+            </a:r>
+            <a:r>
+              <a:rPr dirty="0">
+                <a:solidFill>
+                  <a:schemeClr val="bg1"/>
+                </a:solidFill>
+              </a:rPr>
               <a:t> de Performance</a:t>
             </a:r>
           </a:p>
@@ -7767,7 +12561,7 @@
           <a:p>
             <a:fld id="{C1FF6DA9-008F-8B48-92A6-B652298478BF}" type="slidenum">
               <a:rPr lang="en-US" smtClean="0"/>
-              <a:t>8</a:t>
+              <a:t>9</a:t>
             </a:fld>
             <a:endParaRPr lang="en-US"/>
           </a:p>
@@ -7788,14 +12582,14 @@
           <p:nvPr>
             <p:extLst>
               <p:ext uri="{D42A27DB-BD31-4B8C-83A1-F6EECF244321}">
-                <p14:modId xmlns:p14="http://schemas.microsoft.com/office/powerpoint/2010/main" val="713508592"/>
+                <p14:modId xmlns:p14="http://schemas.microsoft.com/office/powerpoint/2010/main" val="773698716"/>
               </p:ext>
             </p:extLst>
           </p:nvPr>
         </p:nvGraphicFramePr>
         <p:xfrm>
-          <a:off x="731520" y="2397379"/>
-          <a:ext cx="10461106" cy="1755648"/>
+          <a:off x="696579" y="4638774"/>
+          <a:ext cx="10798841" cy="1443596"/>
         </p:xfrm>
         <a:graphic>
           <a:graphicData uri="http://schemas.openxmlformats.org/drawingml/2006/table">
@@ -7804,35 +12598,21 @@
                 <a:tableStyleId>{5C22544A-7EE6-4342-B048-85BDC9FD1C3A}</a:tableStyleId>
               </a:tblPr>
               <a:tblGrid>
-                <a:gridCol w="2512002">
+                <a:gridCol w="4453797">
                   <a:extLst>
                     <a:ext uri="{9D8B030D-6E8A-4147-A177-3AD203B41FA5}">
                       <a16:colId xmlns:a16="http://schemas.microsoft.com/office/drawing/2014/main" val="20000"/>
                     </a:ext>
                   </a:extLst>
                 </a:gridCol>
-                <a:gridCol w="1570001">
+                <a:gridCol w="1487009">
                   <a:extLst>
                     <a:ext uri="{9D8B030D-6E8A-4147-A177-3AD203B41FA5}">
                       <a16:colId xmlns:a16="http://schemas.microsoft.com/office/drawing/2014/main" val="1402259042"/>
                     </a:ext>
                   </a:extLst>
                 </a:gridCol>
-                <a:gridCol w="1570001">
-                  <a:extLst>
-                    <a:ext uri="{9D8B030D-6E8A-4147-A177-3AD203B41FA5}">
-                      <a16:colId xmlns:a16="http://schemas.microsoft.com/office/drawing/2014/main" val="20001"/>
-                    </a:ext>
-                  </a:extLst>
-                </a:gridCol>
-                <a:gridCol w="1570001">
-                  <a:extLst>
-                    <a:ext uri="{9D8B030D-6E8A-4147-A177-3AD203B41FA5}">
-                      <a16:colId xmlns:a16="http://schemas.microsoft.com/office/drawing/2014/main" val="20002"/>
-                    </a:ext>
-                  </a:extLst>
-                </a:gridCol>
-                <a:gridCol w="3239101">
+                <a:gridCol w="4858035">
                   <a:extLst>
                     <a:ext uri="{9D8B030D-6E8A-4147-A177-3AD203B41FA5}">
                       <a16:colId xmlns:a16="http://schemas.microsoft.com/office/drawing/2014/main" val="20004"/>
@@ -7840,7 +12620,7 @@
                   </a:extLst>
                 </a:gridCol>
               </a:tblGrid>
-              <a:tr h="585216">
+              <a:tr h="360899">
                 <a:tc>
                   <a:txBody>
                     <a:bodyPr/>
@@ -7863,8 +12643,20 @@
                         <a:t> </a:t>
                       </a:r>
                       <a:r>
-                        <a:rPr dirty="0" err="1"/>
-                        <a:t>Testé</a:t>
+                        <a:rPr lang="fr-FR" dirty="0"/>
+                        <a:t>et optimisations </a:t>
+                      </a:r>
+                      <a:r>
+                        <a:rPr lang="fr-FR" dirty="0" err="1"/>
+                        <a:t>grid</a:t>
+                      </a:r>
+                      <a:r>
+                        <a:rPr lang="fr-FR" dirty="0"/>
+                        <a:t> </a:t>
+                      </a:r>
+                      <a:r>
+                        <a:rPr lang="fr-FR" dirty="0" err="1"/>
+                        <a:t>search</a:t>
                       </a:r>
                       <a:endParaRPr dirty="0"/>
                     </a:p>
@@ -7906,46 +12698,6 @@
                         </a:defRPr>
                       </a:pPr>
                       <a:r>
-                        <a:t>RMSE (Val)</a:t>
-                      </a:r>
-                    </a:p>
-                  </a:txBody>
-                  <a:tcPr/>
-                </a:tc>
-                <a:tc>
-                  <a:txBody>
-                    <a:bodyPr/>
-                    <a:lstStyle/>
-                    <a:p>
-                      <a:pPr algn="ctr">
-                        <a:defRPr sz="1300" b="1">
-                          <a:solidFill>
-                            <a:srgbClr val="F8FAFC"/>
-                          </a:solidFill>
-                          <a:latin typeface="Verdana"/>
-                        </a:defRPr>
-                      </a:pPr>
-                      <a:r>
-                        <a:t>MAE (Val)</a:t>
-                      </a:r>
-                    </a:p>
-                  </a:txBody>
-                  <a:tcPr/>
-                </a:tc>
-                <a:tc>
-                  <a:txBody>
-                    <a:bodyPr/>
-                    <a:lstStyle/>
-                    <a:p>
-                      <a:pPr algn="ctr">
-                        <a:defRPr sz="1300" b="1">
-                          <a:solidFill>
-                            <a:srgbClr val="F8FAFC"/>
-                          </a:solidFill>
-                          <a:latin typeface="Verdana"/>
-                        </a:defRPr>
-                      </a:pPr>
-                      <a:r>
                         <a:rPr lang="fr-FR" dirty="0"/>
                         <a:t>Commentaires</a:t>
                       </a:r>
@@ -7960,7 +12712,7 @@
                   </a:ext>
                 </a:extLst>
               </a:tr>
-              <a:tr h="585216">
+              <a:tr h="360899">
                 <a:tc>
                   <a:txBody>
                     <a:bodyPr/>
@@ -7979,7 +12731,7 @@
                       </a:r>
                     </a:p>
                   </a:txBody>
-                  <a:tcPr/>
+                  <a:tcPr anchor="ctr"/>
                 </a:tc>
                 <a:tc>
                   <a:txBody>
@@ -7995,52 +12747,21 @@
                         </a:defRPr>
                       </a:pPr>
                       <a:r>
-                        <a:rPr dirty="0"/>
-                        <a:t>0.81</a:t>
-                      </a:r>
-                    </a:p>
-                  </a:txBody>
-                  <a:tcPr/>
-                </a:tc>
-                <a:tc>
-                  <a:txBody>
-                    <a:bodyPr/>
-                    <a:lstStyle/>
-                    <a:p>
-                      <a:pPr algn="ctr">
-                        <a:defRPr sz="1200">
+                        <a:rPr lang="fr-FR" sz="1200" b="0" i="0" kern="1200" dirty="0">
                           <a:solidFill>
                             <a:srgbClr val="1E293B"/>
                           </a:solidFill>
+                          <a:effectLst/>
                           <a:latin typeface="Verdana"/>
-                        </a:defRPr>
-                      </a:pPr>
-                      <a:r>
-                        <a:t>0.41</a:t>
+                          <a:ea typeface="+mn-ea"/>
+                          <a:cs typeface="+mn-cs"/>
+                        </a:rPr>
+                        <a:t>0.565</a:t>
                       </a:r>
+                      <a:endParaRPr dirty="0"/>
                     </a:p>
                   </a:txBody>
-                  <a:tcPr/>
-                </a:tc>
-                <a:tc>
-                  <a:txBody>
-                    <a:bodyPr/>
-                    <a:lstStyle/>
-                    <a:p>
-                      <a:pPr algn="ctr">
-                        <a:defRPr sz="1200">
-                          <a:solidFill>
-                            <a:srgbClr val="1E293B"/>
-                          </a:solidFill>
-                          <a:latin typeface="Verdana"/>
-                        </a:defRPr>
-                      </a:pPr>
-                      <a:r>
-                        <a:t>0.29</a:t>
-                      </a:r>
-                    </a:p>
-                  </a:txBody>
-                  <a:tcPr/>
+                  <a:tcPr anchor="ctr"/>
                 </a:tc>
                 <a:tc>
                   <a:txBody>
@@ -8056,17 +12777,13 @@
                         </a:defRPr>
                       </a:pPr>
                       <a:r>
-                        <a:rPr dirty="0"/>
-                        <a:t>Gain net non-</a:t>
-                      </a:r>
-                      <a:r>
-                        <a:rPr dirty="0" err="1"/>
-                        <a:t>linéaire</a:t>
+                        <a:rPr lang="fr-FR" dirty="0"/>
+                        <a:t>Résultats sans aucune optimisation</a:t>
                       </a:r>
                       <a:endParaRPr dirty="0"/>
                     </a:p>
                   </a:txBody>
-                  <a:tcPr/>
+                  <a:tcPr anchor="ctr"/>
                 </a:tc>
                 <a:extLst>
                   <a:ext uri="{0D108BD9-81ED-4DB2-BD59-A6C34878D82A}">
@@ -8074,7 +12791,7 @@
                   </a:ext>
                 </a:extLst>
               </a:tr>
-              <a:tr h="585216">
+              <a:tr h="360899">
                 <a:tc>
                   <a:txBody>
                     <a:bodyPr/>
@@ -8089,20 +12806,25 @@
                         </a:defRPr>
                       </a:pPr>
                       <a:r>
-                        <a:rPr dirty="0"/>
-                        <a:t>Random Forest (</a:t>
+                        <a:rPr lang="fr-FR" dirty="0" err="1"/>
+                        <a:t>Grid</a:t>
                       </a:r>
                       <a:r>
-                        <a:rPr dirty="0" err="1"/>
-                        <a:t>GridSearch</a:t>
+                        <a:rPr lang="fr-FR" dirty="0"/>
+                        <a:t> </a:t>
                       </a:r>
                       <a:r>
-                        <a:rPr dirty="0"/>
-                        <a:t>)</a:t>
+                        <a:rPr lang="fr-FR" dirty="0" err="1"/>
+                        <a:t>Search</a:t>
                       </a:r>
+                      <a:r>
+                        <a:rPr lang="fr-FR" dirty="0"/>
+                        <a:t> (paramètres par défaut)</a:t>
+                      </a:r>
+                      <a:endParaRPr dirty="0"/>
                     </a:p>
                   </a:txBody>
-                  <a:tcPr>
+                  <a:tcPr anchor="ctr">
                     <a:solidFill>
                       <a:schemeClr val="accent3">
                         <a:lumMod val="60000"/>
@@ -8125,12 +12847,98 @@
                         </a:defRPr>
                       </a:pPr>
                       <a:r>
-                        <a:rPr dirty="0"/>
-                        <a:t>0.87</a:t>
+                        <a:rPr lang="fr-FR" sz="1200" b="0" i="0" kern="1200" dirty="0">
+                          <a:solidFill>
+                            <a:srgbClr val="0D9488"/>
+                          </a:solidFill>
+                          <a:effectLst/>
+                          <a:latin typeface="Verdana"/>
+                          <a:ea typeface="+mn-ea"/>
+                          <a:cs typeface="+mn-cs"/>
+                        </a:rPr>
+                        <a:t>0.577</a:t>
                       </a:r>
+                      <a:endParaRPr dirty="0"/>
                     </a:p>
                   </a:txBody>
-                  <a:tcPr>
+                  <a:tcPr anchor="ctr">
+                    <a:solidFill>
+                      <a:schemeClr val="accent3">
+                        <a:lumMod val="60000"/>
+                        <a:lumOff val="40000"/>
+                      </a:schemeClr>
+                    </a:solidFill>
+                  </a:tcPr>
+                </a:tc>
+                <a:tc>
+                  <a:txBody>
+                    <a:bodyPr/>
+                    <a:lstStyle/>
+                    <a:p>
+                      <a:pPr>
+                        <a:defRPr sz="1200" b="1">
+                          <a:solidFill>
+                            <a:srgbClr val="0D9488"/>
+                          </a:solidFill>
+                          <a:latin typeface="Verdana"/>
+                        </a:defRPr>
+                      </a:pPr>
+                      <a:r>
+                        <a:rPr lang="fr-FR" dirty="0"/>
+                        <a:t>Léger gain </a:t>
+                      </a:r>
+                      <a:endParaRPr dirty="0"/>
+                    </a:p>
+                  </a:txBody>
+                  <a:tcPr anchor="ctr">
+                    <a:solidFill>
+                      <a:schemeClr val="accent3">
+                        <a:lumMod val="60000"/>
+                        <a:lumOff val="40000"/>
+                      </a:schemeClr>
+                    </a:solidFill>
+                  </a:tcPr>
+                </a:tc>
+                <a:extLst>
+                  <a:ext uri="{0D108BD9-81ED-4DB2-BD59-A6C34878D82A}">
+                    <a16:rowId xmlns:a16="http://schemas.microsoft.com/office/drawing/2014/main" val="10003"/>
+                  </a:ext>
+                </a:extLst>
+              </a:tr>
+              <a:tr h="360899">
+                <a:tc>
+                  <a:txBody>
+                    <a:bodyPr/>
+                    <a:lstStyle/>
+                    <a:p>
+                      <a:pPr>
+                        <a:defRPr sz="1200" b="1">
+                          <a:solidFill>
+                            <a:srgbClr val="0D9488"/>
+                          </a:solidFill>
+                          <a:latin typeface="Verdana"/>
+                        </a:defRPr>
+                      </a:pPr>
+                      <a:r>
+                        <a:rPr lang="fr-FR" dirty="0" err="1"/>
+                        <a:t>Grid</a:t>
+                      </a:r>
+                      <a:r>
+                        <a:rPr lang="fr-FR" dirty="0"/>
+                        <a:t> </a:t>
+                      </a:r>
+                      <a:r>
+                        <a:rPr lang="fr-FR" dirty="0" err="1"/>
+                        <a:t>Search</a:t>
+                      </a:r>
+                      <a:r>
+                        <a:rPr lang="fr-FR" dirty="0"/>
+                        <a:t> (optimisé)</a:t>
+                      </a:r>
+                      <a:endParaRPr dirty="0"/>
+                    </a:p>
+                  </a:txBody>
+                  <a:tcPr anchor="ctr">
                     <a:solidFill>
                       <a:schemeClr val="accent3">
                         <a:lumMod val="60000"/>
@@ -8153,39 +12961,21 @@
                         </a:defRPr>
                       </a:pPr>
                       <a:r>
-                        <a:rPr dirty="0"/>
-                        <a:t>0.31</a:t>
-                      </a:r>
-                    </a:p>
-                  </a:txBody>
-                  <a:tcPr>
-                    <a:solidFill>
-                      <a:schemeClr val="accent3">
-                        <a:lumMod val="60000"/>
-                        <a:lumOff val="40000"/>
-                      </a:schemeClr>
-                    </a:solidFill>
-                  </a:tcPr>
-                </a:tc>
-                <a:tc>
-                  <a:txBody>
-                    <a:bodyPr/>
-                    <a:lstStyle/>
-                    <a:p>
-                      <a:pPr algn="ctr">
-                        <a:defRPr sz="1200" b="1">
+                        <a:rPr lang="fr-FR" sz="1200" b="0" i="0" kern="1200" dirty="0">
                           <a:solidFill>
                             <a:srgbClr val="0D9488"/>
                           </a:solidFill>
+                          <a:effectLst/>
                           <a:latin typeface="Verdana"/>
-                        </a:defRPr>
-                      </a:pPr>
-                      <a:r>
-                        <a:t>0.21</a:t>
+                          <a:ea typeface="+mn-ea"/>
+                          <a:cs typeface="+mn-cs"/>
+                        </a:rPr>
+                        <a:t>0.579</a:t>
                       </a:r>
+                      <a:endParaRPr dirty="0"/>
                     </a:p>
                   </a:txBody>
-                  <a:tcPr>
+                  <a:tcPr anchor="ctr">
                     <a:solidFill>
                       <a:schemeClr val="accent3">
                         <a:lumMod val="60000"/>
@@ -8208,17 +12998,13 @@
                         </a:defRPr>
                       </a:pPr>
                       <a:r>
-                        <a:rPr dirty="0"/>
-                        <a:t>Meilleur </a:t>
-                      </a:r>
-                      <a:r>
-                        <a:rPr dirty="0" err="1"/>
-                        <a:t>Modèle</a:t>
+                        <a:rPr lang="fr-FR" dirty="0"/>
+                        <a:t>Léger gain également</a:t>
                       </a:r>
                       <a:endParaRPr dirty="0"/>
                     </a:p>
                   </a:txBody>
-                  <a:tcPr>
+                  <a:tcPr anchor="ctr">
                     <a:solidFill>
                       <a:schemeClr val="accent3">
                         <a:lumMod val="60000"/>
@@ -8229,7 +13015,7 @@
                 </a:tc>
                 <a:extLst>
                   <a:ext uri="{0D108BD9-81ED-4DB2-BD59-A6C34878D82A}">
-                    <a16:rowId xmlns:a16="http://schemas.microsoft.com/office/drawing/2014/main" val="10003"/>
+                    <a16:rowId xmlns:a16="http://schemas.microsoft.com/office/drawing/2014/main" val="4008760284"/>
                   </a:ext>
                 </a:extLst>
               </a:tr>
@@ -8237,243 +13023,288 @@
           </a:graphicData>
         </a:graphic>
       </p:graphicFrame>
-    </p:spTree>
-  </p:cSld>
-  <p:clrMapOvr>
-    <a:masterClrMapping/>
-  </p:clrMapOvr>
-</p:sld>
-</file>
-
-<file path=ppt/slides/slide9.xml><?xml version="1.0" encoding="utf-8"?>
-<p:sld xmlns:a="http://schemas.openxmlformats.org/drawingml/2006/main" xmlns:r="http://schemas.openxmlformats.org/officeDocument/2006/relationships" xmlns:p="http://schemas.openxmlformats.org/presentationml/2006/main">
-  <p:cSld>
-    <p:bg>
-      <p:bgPr>
-        <a:solidFill>
-          <a:srgbClr val="FAFAFC"/>
-        </a:solidFill>
-        <a:effectLst/>
-      </p:bgPr>
-    </p:bg>
-    <p:spTree>
-      <p:nvGrpSpPr>
-        <p:cNvPr id="1" name=""/>
-        <p:cNvGrpSpPr/>
-        <p:nvPr/>
-      </p:nvGrpSpPr>
-      <p:grpSpPr>
-        <a:xfrm>
-          <a:off x="0" y="0"/>
-          <a:ext cx="0" cy="0"/>
-          <a:chOff x="0" y="0"/>
-          <a:chExt cx="0" cy="0"/>
-        </a:xfrm>
-      </p:grpSpPr>
-      <p:sp>
-        <p:nvSpPr>
-          <p:cNvPr id="2" name="Rectangle 1"/>
+      <p:sp>
+        <p:nvSpPr>
+          <p:cNvPr id="5" name="Rounded Rectangle 4">
+            <a:extLst>
+              <a:ext uri="{FF2B5EF4-FFF2-40B4-BE49-F238E27FC236}">
+                <a16:creationId xmlns:a16="http://schemas.microsoft.com/office/drawing/2014/main" id="{DB8CB616-CC64-FC93-D9DB-0CEC31682246}"/>
+              </a:ext>
+            </a:extLst>
+          </p:cNvPr>
           <p:cNvSpPr/>
           <p:nvPr/>
         </p:nvSpPr>
         <p:spPr>
           <a:xfrm>
-            <a:off x="0" y="0"/>
-            <a:ext cx="12191695" cy="1371600"/>
+            <a:off x="472440" y="1783080"/>
+            <a:ext cx="5303520" cy="2130829"/>
+          </a:xfrm>
+          <a:prstGeom prst="roundRect">
+            <a:avLst/>
+          </a:prstGeom>
+          <a:ln/>
+        </p:spPr>
+        <p:style>
+          <a:lnRef idx="2">
+            <a:schemeClr val="accent2"/>
+          </a:lnRef>
+          <a:fillRef idx="1">
+            <a:schemeClr val="lt1"/>
+          </a:fillRef>
+          <a:effectRef idx="0">
+            <a:schemeClr val="accent2"/>
+          </a:effectRef>
+          <a:fontRef idx="minor">
+            <a:schemeClr val="dk1"/>
+          </a:fontRef>
+        </p:style>
+        <p:txBody>
+          <a:bodyPr wrap="square" lIns="274320" tIns="274320" rIns="274320" rtlCol="0" anchor="t"/>
+          <a:lstStyle/>
+          <a:p>
+            <a:pPr algn="ctr">
+              <a:spcAft>
+                <a:spcPts val="1000"/>
+              </a:spcAft>
+              <a:defRPr sz="1600" b="1">
+                <a:solidFill>
+                  <a:srgbClr val="1E293B"/>
+                </a:solidFill>
+                <a:latin typeface="Georgia"/>
+              </a:defRPr>
+            </a:pPr>
+            <a:r>
+              <a:rPr lang="fr-FR" dirty="0">
+                <a:solidFill>
+                  <a:schemeClr val="accent2">
+                    <a:lumMod val="75000"/>
+                  </a:schemeClr>
+                </a:solidFill>
+              </a:rPr>
+              <a:t>Paramètres </a:t>
+            </a:r>
+            <a:r>
+              <a:rPr lang="fr-FR" dirty="0" err="1">
+                <a:solidFill>
+                  <a:schemeClr val="accent2">
+                    <a:lumMod val="75000"/>
+                  </a:schemeClr>
+                </a:solidFill>
+              </a:rPr>
+              <a:t>grid</a:t>
+            </a:r>
+            <a:r>
+              <a:rPr lang="fr-FR" dirty="0">
+                <a:solidFill>
+                  <a:schemeClr val="accent2">
+                    <a:lumMod val="75000"/>
+                  </a:schemeClr>
+                </a:solidFill>
+              </a:rPr>
+              <a:t> </a:t>
+            </a:r>
+            <a:r>
+              <a:rPr lang="fr-FR" dirty="0" err="1">
+                <a:solidFill>
+                  <a:schemeClr val="accent2">
+                    <a:lumMod val="75000"/>
+                  </a:schemeClr>
+                </a:solidFill>
+              </a:rPr>
+              <a:t>search</a:t>
+            </a:r>
+            <a:r>
+              <a:rPr lang="fr-FR" dirty="0">
+                <a:solidFill>
+                  <a:schemeClr val="accent2">
+                    <a:lumMod val="75000"/>
+                  </a:schemeClr>
+                </a:solidFill>
+              </a:rPr>
+              <a:t> (défaut)</a:t>
+            </a:r>
+          </a:p>
+          <a:p>
+            <a:pPr algn="ctr">
+              <a:spcAft>
+                <a:spcPts val="1000"/>
+              </a:spcAft>
+              <a:defRPr sz="1600" b="1">
+                <a:solidFill>
+                  <a:srgbClr val="1E293B"/>
+                </a:solidFill>
+                <a:latin typeface="Georgia"/>
+              </a:defRPr>
+            </a:pPr>
+            <a:endParaRPr dirty="0"/>
+          </a:p>
+        </p:txBody>
+      </p:sp>
+      <p:sp>
+        <p:nvSpPr>
+          <p:cNvPr id="9" name="Rounded Rectangle 4">
+            <a:extLst>
+              <a:ext uri="{FF2B5EF4-FFF2-40B4-BE49-F238E27FC236}">
+                <a16:creationId xmlns:a16="http://schemas.microsoft.com/office/drawing/2014/main" id="{4ED312DE-FE0D-13D3-0808-A2A3D337849C}"/>
+              </a:ext>
+            </a:extLst>
+          </p:cNvPr>
+          <p:cNvSpPr/>
+          <p:nvPr/>
+        </p:nvSpPr>
+        <p:spPr>
+          <a:xfrm>
+            <a:off x="6191900" y="1783080"/>
+            <a:ext cx="5303520" cy="2181629"/>
+          </a:xfrm>
+          <a:prstGeom prst="roundRect">
+            <a:avLst/>
+          </a:prstGeom>
+          <a:ln/>
+        </p:spPr>
+        <p:style>
+          <a:lnRef idx="2">
+            <a:schemeClr val="accent3"/>
+          </a:lnRef>
+          <a:fillRef idx="1">
+            <a:schemeClr val="lt1"/>
+          </a:fillRef>
+          <a:effectRef idx="0">
+            <a:schemeClr val="accent3"/>
+          </a:effectRef>
+          <a:fontRef idx="minor">
+            <a:schemeClr val="dk1"/>
+          </a:fontRef>
+        </p:style>
+        <p:txBody>
+          <a:bodyPr wrap="square" lIns="274320" tIns="274320" rIns="274320" rtlCol="0" anchor="t"/>
+          <a:lstStyle/>
+          <a:p>
+            <a:pPr algn="ctr">
+              <a:spcAft>
+                <a:spcPts val="1000"/>
+              </a:spcAft>
+              <a:defRPr sz="1600" b="1">
+                <a:solidFill>
+                  <a:srgbClr val="1E293B"/>
+                </a:solidFill>
+                <a:latin typeface="Georgia"/>
+              </a:defRPr>
+            </a:pPr>
+            <a:r>
+              <a:rPr lang="fr-FR" dirty="0">
+                <a:solidFill>
+                  <a:schemeClr val="accent3">
+                    <a:lumMod val="75000"/>
+                  </a:schemeClr>
+                </a:solidFill>
+              </a:rPr>
+              <a:t>Paramètres </a:t>
+            </a:r>
+            <a:r>
+              <a:rPr lang="fr-FR" dirty="0" err="1">
+                <a:solidFill>
+                  <a:schemeClr val="accent3">
+                    <a:lumMod val="75000"/>
+                  </a:schemeClr>
+                </a:solidFill>
+              </a:rPr>
+              <a:t>grid</a:t>
+            </a:r>
+            <a:r>
+              <a:rPr lang="fr-FR" dirty="0">
+                <a:solidFill>
+                  <a:schemeClr val="accent3">
+                    <a:lumMod val="75000"/>
+                  </a:schemeClr>
+                </a:solidFill>
+              </a:rPr>
+              <a:t> </a:t>
+            </a:r>
+            <a:r>
+              <a:rPr lang="fr-FR" dirty="0" err="1">
+                <a:solidFill>
+                  <a:schemeClr val="accent3">
+                    <a:lumMod val="75000"/>
+                  </a:schemeClr>
+                </a:solidFill>
+              </a:rPr>
+              <a:t>search</a:t>
+            </a:r>
+            <a:r>
+              <a:rPr lang="fr-FR" dirty="0">
+                <a:solidFill>
+                  <a:schemeClr val="accent3">
+                    <a:lumMod val="75000"/>
+                  </a:schemeClr>
+                </a:solidFill>
+              </a:rPr>
+              <a:t> (optimisé)</a:t>
+            </a:r>
+          </a:p>
+        </p:txBody>
+      </p:sp>
+      <p:pic>
+        <p:nvPicPr>
+          <p:cNvPr id="10" name="Image 9">
+            <a:extLst>
+              <a:ext uri="{FF2B5EF4-FFF2-40B4-BE49-F238E27FC236}">
+                <a16:creationId xmlns:a16="http://schemas.microsoft.com/office/drawing/2014/main" id="{71D0940D-29A3-7F95-8EBD-77B430E55336}"/>
+              </a:ext>
+            </a:extLst>
+          </p:cNvPr>
+          <p:cNvPicPr>
+            <a:picLocks noChangeAspect="1"/>
+          </p:cNvPicPr>
+          <p:nvPr/>
+        </p:nvPicPr>
+        <p:blipFill>
+          <a:blip r:embed="rId3"/>
+          <a:stretch>
+            <a:fillRect/>
+          </a:stretch>
+        </p:blipFill>
+        <p:spPr>
+          <a:xfrm>
+            <a:off x="1447800" y="2556575"/>
+            <a:ext cx="3352800" cy="1219200"/>
           </a:xfrm>
           <a:prstGeom prst="rect">
             <a:avLst/>
           </a:prstGeom>
-          <a:solidFill>
-            <a:srgbClr val="FFFFFF"/>
-          </a:solidFill>
-          <a:ln>
-            <a:noFill/>
-          </a:ln>
         </p:spPr>
-        <p:style>
-          <a:lnRef idx="1">
-            <a:schemeClr val="accent1"/>
-          </a:lnRef>
-          <a:fillRef idx="3">
-            <a:schemeClr val="accent1"/>
-          </a:fillRef>
-          <a:effectRef idx="2">
-            <a:schemeClr val="accent1"/>
-          </a:effectRef>
-          <a:fontRef idx="minor">
-            <a:schemeClr val="lt1"/>
-          </a:fontRef>
-        </p:style>
-        <p:txBody>
-          <a:bodyPr rtlCol="0" anchor="ctr"/>
-          <a:lstStyle/>
-          <a:p>
-            <a:pPr algn="ctr"/>
-            <a:endParaRPr/>
-          </a:p>
-        </p:txBody>
-      </p:sp>
-      <p:sp>
-        <p:nvSpPr>
-          <p:cNvPr id="3" name="Rectangle 2"/>
-          <p:cNvSpPr/>
+      </p:pic>
+      <p:pic>
+        <p:nvPicPr>
+          <p:cNvPr id="11" name="Image 10">
+            <a:extLst>
+              <a:ext uri="{FF2B5EF4-FFF2-40B4-BE49-F238E27FC236}">
+                <a16:creationId xmlns:a16="http://schemas.microsoft.com/office/drawing/2014/main" id="{02B748BA-6EE7-4482-9F08-FDB3E80CDC07}"/>
+              </a:ext>
+            </a:extLst>
+          </p:cNvPr>
+          <p:cNvPicPr>
+            <a:picLocks noChangeAspect="1"/>
+          </p:cNvPicPr>
           <p:nvPr/>
-        </p:nvSpPr>
+        </p:nvPicPr>
+        <p:blipFill>
+          <a:blip r:embed="rId4"/>
+          <a:stretch>
+            <a:fillRect/>
+          </a:stretch>
+        </p:blipFill>
         <p:spPr>
           <a:xfrm>
-            <a:off x="0" y="1353312"/>
-            <a:ext cx="12191695" cy="25400"/>
+            <a:off x="7091060" y="2578108"/>
+            <a:ext cx="3505200" cy="1219200"/>
           </a:xfrm>
           <a:prstGeom prst="rect">
             <a:avLst/>
           </a:prstGeom>
-          <a:solidFill>
-            <a:srgbClr val="0284C7"/>
-          </a:solidFill>
-          <a:ln>
-            <a:noFill/>
-          </a:ln>
         </p:spPr>
-        <p:style>
-          <a:lnRef idx="1">
-            <a:schemeClr val="accent1"/>
-          </a:lnRef>
-          <a:fillRef idx="3">
-            <a:schemeClr val="accent1"/>
-          </a:fillRef>
-          <a:effectRef idx="2">
-            <a:schemeClr val="accent1"/>
-          </a:effectRef>
-          <a:fontRef idx="minor">
-            <a:schemeClr val="lt1"/>
-          </a:fontRef>
-        </p:style>
-        <p:txBody>
-          <a:bodyPr rtlCol="0" anchor="ctr"/>
-          <a:lstStyle/>
-          <a:p>
-            <a:pPr algn="ctr"/>
-            <a:endParaRPr/>
-          </a:p>
-        </p:txBody>
-      </p:sp>
-      <p:sp>
-        <p:nvSpPr>
-          <p:cNvPr id="4" name="TextBox 3"/>
-          <p:cNvSpPr txBox="1"/>
-          <p:nvPr/>
-        </p:nvSpPr>
-        <p:spPr>
-          <a:xfrm>
-            <a:off x="960711" y="239524"/>
-            <a:ext cx="10722093" cy="892552"/>
-          </a:xfrm>
-          <a:prstGeom prst="rect">
-            <a:avLst/>
-          </a:prstGeom>
-          <a:noFill/>
-        </p:spPr>
-        <p:txBody>
-          <a:bodyPr wrap="square">
-            <a:spAutoFit/>
-          </a:bodyPr>
-          <a:lstStyle/>
-          <a:p>
-            <a:pPr algn="l">
-              <a:defRPr sz="2600" b="1">
-                <a:solidFill>
-                  <a:srgbClr val="0F172A"/>
-                </a:solidFill>
-                <a:latin typeface="Georgia"/>
-              </a:defRPr>
-            </a:pPr>
-            <a:r>
-              <a:rPr lang="fr-FR" dirty="0"/>
-              <a:t>Interprétation des résultats </a:t>
-            </a:r>
-          </a:p>
-          <a:p>
-            <a:pPr algn="l">
-              <a:defRPr sz="2600" b="1">
-                <a:solidFill>
-                  <a:srgbClr val="0F172A"/>
-                </a:solidFill>
-                <a:latin typeface="Georgia"/>
-              </a:defRPr>
-            </a:pPr>
-            <a:r>
-              <a:rPr dirty="0"/>
-              <a:t>&amp; </a:t>
-            </a:r>
-            <a:r>
-              <a:rPr dirty="0" err="1"/>
-              <a:t>Analyse</a:t>
-            </a:r>
-            <a:r>
-              <a:rPr dirty="0"/>
-              <a:t> de la Feature Importance</a:t>
-            </a:r>
-          </a:p>
-        </p:txBody>
-      </p:sp>
-      <p:sp>
-        <p:nvSpPr>
-          <p:cNvPr id="6" name="Espace réservé du pied de page 5">
-            <a:extLst>
-              <a:ext uri="{FF2B5EF4-FFF2-40B4-BE49-F238E27FC236}">
-                <a16:creationId xmlns:a16="http://schemas.microsoft.com/office/drawing/2014/main" id="{9EAA2C0B-0343-0C8E-0A7E-F63A3CB11035}"/>
-              </a:ext>
-            </a:extLst>
-          </p:cNvPr>
-          <p:cNvSpPr>
-            <a:spLocks noGrp="1"/>
-          </p:cNvSpPr>
-          <p:nvPr>
-            <p:ph type="ftr" sz="quarter" idx="11"/>
-          </p:nvPr>
-        </p:nvSpPr>
-        <p:spPr/>
-        <p:txBody>
-          <a:bodyPr/>
-          <a:lstStyle/>
-          <a:p>
-            <a:r>
-              <a:rPr lang="en-US"/>
-              <a:t>Modélisation Prédictive (Machine Learning)</a:t>
-            </a:r>
-          </a:p>
-        </p:txBody>
-      </p:sp>
-      <p:sp>
-        <p:nvSpPr>
-          <p:cNvPr id="7" name="Espace réservé du numéro de diapositive 6">
-            <a:extLst>
-              <a:ext uri="{FF2B5EF4-FFF2-40B4-BE49-F238E27FC236}">
-                <a16:creationId xmlns:a16="http://schemas.microsoft.com/office/drawing/2014/main" id="{71E62298-ADC2-9685-A94A-56FA7803F027}"/>
-              </a:ext>
-            </a:extLst>
-          </p:cNvPr>
-          <p:cNvSpPr>
-            <a:spLocks noGrp="1"/>
-          </p:cNvSpPr>
-          <p:nvPr>
-            <p:ph type="sldNum" sz="quarter" idx="12"/>
-          </p:nvPr>
-        </p:nvSpPr>
-        <p:spPr/>
-        <p:txBody>
-          <a:bodyPr/>
-          <a:lstStyle/>
-          <a:p>
-            <a:fld id="{C1FF6DA9-008F-8B48-92A6-B652298478BF}" type="slidenum">
-              <a:rPr lang="en-US" smtClean="0"/>
-              <a:t>9</a:t>
-            </a:fld>
-            <a:endParaRPr lang="en-US"/>
-          </a:p>
-        </p:txBody>
-      </p:sp>
+      </p:pic>
     </p:spTree>
   </p:cSld>
   <p:clrMapOvr>
